--- a/docs/1st_Proposal_Team5_v2.pptx
+++ b/docs/1st_Proposal_Team5_v2.pptx
@@ -4,6 +4,9 @@
   <p:sldMasterIdLst>
     <p:sldMasterId id="2147483648" r:id="rId1"/>
   </p:sldMasterIdLst>
+  <p:notesMasterIdLst>
+    <p:notesMasterId r:id="rId12"/>
+  </p:notesMasterIdLst>
   <p:sldIdLst>
     <p:sldId id="256" r:id="rId2"/>
     <p:sldId id="257" r:id="rId3"/>
@@ -16,10 +19,7 @@
     <p:sldId id="264" r:id="rId10"/>
     <p:sldId id="265" r:id="rId11"/>
   </p:sldIdLst>
-  <p:notesMasterIdLst>
-    <p:notesMasterId r:id="rId12"/>
-  </p:notesMasterIdLst>
-  <p:sldSz cx="9144000" cy="5143500"/>
+  <p:sldSz cx="9144000" cy="5143500" type="screen16x9"/>
   <p:notesSz cx="5143500" cy="9144000"/>
   <p:defaultTextStyle>
     <a:lvl1pPr marL="0" algn="l" defTabSz="914400" rtl="0" eaLnBrk="1" latinLnBrk="0" hangingPunct="1">
@@ -116,27 +116,27 @@
   <p:extLst>
     <p:ext uri="{521415D9-36F7-43E2-AB2F-B90AF26B5E84}">
       <p14:sectionLst xmlns:p14="http://schemas.microsoft.com/office/powerpoint/2010/main">
-        <p14:section name="Intro" id="{b0798bf7-dfc0-9858-6a78-91215cbdb370}">
+        <p14:section name="Intro" id="{B0798BF7-DFC0-9858-6A78-91215CBDB370}">
           <p14:sldIdLst>
             <p14:sldId id="256"/>
           </p14:sldIdLst>
         </p14:section>
-        <p14:section name="Team" id="{3a96f6f8-26d1-60f3-ed72-7a093b13c26a}">
+        <p14:section name="Team" id="{3A96F6F8-26D1-60F3-ED72-7A093B13C26A}">
           <p14:sldIdLst>
             <p14:sldId id="257"/>
           </p14:sldIdLst>
         </p14:section>
-        <p14:section name="Problem" id="{7451ccf5-5632-0159-9e5d-b3ca07d132b8}">
+        <p14:section name="Problem" id="{7451CCF5-5632-0159-9E5D-B3CA07D132B8}">
           <p14:sldIdLst>
             <p14:sldId id="258"/>
           </p14:sldIdLst>
         </p14:section>
-        <p14:section name="Plan" id="{a636e60b-cc6d-19fc-5d65-8705851c8fee}">
+        <p14:section name="Plan" id="{A636E60B-CC6D-19FC-5D65-8705851C8FEE}">
           <p14:sldIdLst>
             <p14:sldId id="259"/>
           </p14:sldIdLst>
         </p14:section>
-        <p14:section name="Data" id="{89442611-6703-2ca7-8d50-f0a18dbb8666}">
+        <p14:section name="Data" id="{89442611-6703-2CA7-8D50-F0A18DBB8666}">
           <p14:sldIdLst>
             <p14:sldId id="260"/>
             <p14:sldId id="261"/>
@@ -145,7 +145,7 @@
             <p14:sldId id="264"/>
           </p14:sldIdLst>
         </p14:section>
-        <p14:section name="Outlook" id="{0c8104dd-aafa-3b01-6a06-6c5713173d65}">
+        <p14:section name="Outlook" id="{0C8104DD-AAFA-3B01-6A06-6C5713173D65}">
           <p14:sldIdLst>
             <p14:sldId id="265"/>
           </p14:sldIdLst>
@@ -181,240 +181,16 @@
           <a:chExt cx="0" cy="0"/>
         </a:xfrm>
       </p:grpSpPr>
-      <p:sp>
-        <p:nvSpPr>
-          <p:cNvPr id="2" name="Header Placeholder 1"/>
-          <p:cNvSpPr>
-            <a:spLocks noGrp="1"/>
-          </p:cNvSpPr>
-          <p:nvPr>
-            <p:ph type="hdr" sz="quarter"/>
-          </p:nvPr>
-        </p:nvSpPr>
-        <p:spPr>
-          <a:xfrm>
-            <a:off x="0" y="0"/>
-            <a:ext cx="2971800" cy="458788"/>
-          </a:xfrm>
-          <a:prstGeom prst="rect">
-            <a:avLst/>
-          </a:prstGeom>
-        </p:spPr>
-        <p:txBody>
-          <a:bodyPr vert="horz" lIns="91440" tIns="45720" rIns="91440" bIns="45720" rtlCol="0"/>
-          <a:lstStyle>
-            <a:lvl1pPr algn="l">
-              <a:defRPr sz="1200"/>
-            </a:lvl1pPr>
-          </a:lstStyle>
-          <a:p>
-            <a:endParaRPr lang="en-US"/>
-          </a:p>
-        </p:txBody>
-      </p:sp>
-      <p:sp>
-        <p:nvSpPr>
-          <p:cNvPr id="3" name="Date Placeholder 2"/>
-          <p:cNvSpPr>
-            <a:spLocks noGrp="1"/>
-          </p:cNvSpPr>
-          <p:nvPr>
-            <p:ph type="dt" idx="1"/>
-          </p:nvPr>
-        </p:nvSpPr>
-        <p:spPr>
-          <a:xfrm>
-            <a:off x="3884613" y="0"/>
-            <a:ext cx="2971800" cy="458788"/>
-          </a:xfrm>
-          <a:prstGeom prst="rect">
-            <a:avLst/>
-          </a:prstGeom>
-        </p:spPr>
-        <p:txBody>
-          <a:bodyPr vert="horz" lIns="91440" tIns="45720" rIns="91440" bIns="45720" rtlCol="0"/>
-          <a:lstStyle>
-            <a:lvl1pPr algn="r">
-              <a:defRPr sz="1200"/>
-            </a:lvl1pPr>
-          </a:lstStyle>
-          <a:p>
-            <a:fld id="{5282F153-3F37-0F45-9E97-73ACFA13230C}" type="datetimeFigureOut">
-              <a:rPr lang="en-US"/>
-              <a:t>7/23/19</a:t>
-            </a:fld>
-            <a:endParaRPr lang="en-US"/>
-          </a:p>
-        </p:txBody>
-      </p:sp>
-      <p:sp>
-        <p:nvSpPr>
-          <p:cNvPr id="4" name="Slide Image Placeholder 3"/>
-          <p:cNvSpPr>
-            <a:spLocks noGrp="1" noRot="1" noChangeAspect="1"/>
-          </p:cNvSpPr>
-          <p:nvPr>
-            <p:ph type="sldImg" idx="2"/>
-          </p:nvPr>
-        </p:nvSpPr>
-        <p:spPr>
-          <a:xfrm>
-            <a:off x="685800" y="1143000"/>
-            <a:ext cx="5486400" cy="3086100"/>
-          </a:xfrm>
-          <a:prstGeom prst="rect">
-            <a:avLst/>
-          </a:prstGeom>
-          <a:noFill/>
-          <a:ln w="12700">
-            <a:solidFill>
-              <a:prstClr val="black"/>
-            </a:solidFill>
-          </a:ln>
-        </p:spPr>
-        <p:txBody>
-          <a:bodyPr vert="horz" lIns="91440" tIns="45720" rIns="91440" bIns="45720" rtlCol="0" anchor="ctr"/>
-          <a:lstStyle/>
-          <a:p>
-            <a:endParaRPr lang="en-US"/>
-          </a:p>
-        </p:txBody>
-      </p:sp>
-      <p:sp>
-        <p:nvSpPr>
-          <p:cNvPr id="5" name="Notes Placeholder 4"/>
-          <p:cNvSpPr>
-            <a:spLocks noGrp="1"/>
-          </p:cNvSpPr>
-          <p:nvPr>
-            <p:ph type="body" sz="quarter" idx="3"/>
-          </p:nvPr>
-        </p:nvSpPr>
-        <p:spPr>
-          <a:xfrm>
-            <a:off x="685800" y="4400550"/>
-            <a:ext cx="5486400" cy="3600450"/>
-          </a:xfrm>
-          <a:prstGeom prst="rect">
-            <a:avLst/>
-          </a:prstGeom>
-        </p:spPr>
-        <p:txBody>
-          <a:bodyPr vert="horz" lIns="91440" tIns="45720" rIns="91440" bIns="45720" rtlCol="0"/>
-          <a:lstStyle/>
-          <a:p>
-            <a:pPr lvl="0"/>
-            <a:r>
-              <a:rPr lang="en-US"/>
-              <a:t>Click to edit Master text styles</a:t>
-            </a:r>
-          </a:p>
-          <a:p>
-            <a:pPr lvl="1"/>
-            <a:r>
-              <a:rPr lang="en-US"/>
-              <a:t>Second level</a:t>
-            </a:r>
-          </a:p>
-          <a:p>
-            <a:pPr lvl="2"/>
-            <a:r>
-              <a:rPr lang="en-US"/>
-              <a:t>Third level</a:t>
-            </a:r>
-          </a:p>
-          <a:p>
-            <a:pPr lvl="3"/>
-            <a:r>
-              <a:rPr lang="en-US"/>
-              <a:t>Fourth level</a:t>
-            </a:r>
-          </a:p>
-          <a:p>
-            <a:pPr lvl="4"/>
-            <a:r>
-              <a:rPr lang="en-US"/>
-              <a:t>Fifth level</a:t>
-            </a:r>
-          </a:p>
-        </p:txBody>
-      </p:sp>
-      <p:sp>
-        <p:nvSpPr>
-          <p:cNvPr id="6" name="Footer Placeholder 5"/>
-          <p:cNvSpPr>
-            <a:spLocks noGrp="1"/>
-          </p:cNvSpPr>
-          <p:nvPr>
-            <p:ph type="ftr" sz="quarter" idx="4"/>
-          </p:nvPr>
-        </p:nvSpPr>
-        <p:spPr>
-          <a:xfrm>
-            <a:off x="0" y="8685213"/>
-            <a:ext cx="2971800" cy="458787"/>
-          </a:xfrm>
-          <a:prstGeom prst="rect">
-            <a:avLst/>
-          </a:prstGeom>
-        </p:spPr>
-        <p:txBody>
-          <a:bodyPr vert="horz" lIns="91440" tIns="45720" rIns="91440" bIns="45720" rtlCol="0" anchor="b"/>
-          <a:lstStyle>
-            <a:lvl1pPr algn="l">
-              <a:defRPr sz="1200"/>
-            </a:lvl1pPr>
-          </a:lstStyle>
-          <a:p>
-            <a:endParaRPr lang="en-US"/>
-          </a:p>
-        </p:txBody>
-      </p:sp>
-      <p:sp>
-        <p:nvSpPr>
-          <p:cNvPr id="7" name="Slide Number Placeholder 6"/>
-          <p:cNvSpPr>
-            <a:spLocks noGrp="1"/>
-          </p:cNvSpPr>
-          <p:nvPr>
-            <p:ph type="sldNum" sz="quarter" idx="5"/>
-          </p:nvPr>
-        </p:nvSpPr>
-        <p:spPr>
-          <a:xfrm>
-            <a:off x="3884613" y="8685213"/>
-            <a:ext cx="2971800" cy="458787"/>
-          </a:xfrm>
-          <a:prstGeom prst="rect">
-            <a:avLst/>
-          </a:prstGeom>
-        </p:spPr>
-        <p:txBody>
-          <a:bodyPr vert="horz" lIns="91440" tIns="45720" rIns="91440" bIns="45720" rtlCol="0" anchor="b"/>
-          <a:lstStyle>
-            <a:lvl1pPr algn="r">
-              <a:defRPr sz="1200"/>
-            </a:lvl1pPr>
-          </a:lstStyle>
-          <a:p>
-            <a:fld id="{CE5E9CC1-C706-0F49-92D6-E571CC5EEA8F}" type="slidenum">
-              <a:rPr lang="en-US"/>
-              <a:t>‹#›</a:t>
-            </a:fld>
-            <a:endParaRPr lang="en-US"/>
-          </a:p>
-        </p:txBody>
-      </p:sp>
     </p:spTree>
     <p:extLst>
       <p:ext uri="{BB962C8B-B14F-4D97-AF65-F5344CB8AC3E}">
-        <p14:creationId xmlns:p14="http://schemas.microsoft.com/office/powerpoint/2010/main" val="1024086991"/>
+        <p14:creationId xmlns:p14="http://schemas.microsoft.com/office/powerpoint/2010/main" val="1045247026"/>
       </p:ext>
     </p:extLst>
   </p:cSld>
   <p:clrMap bg1="lt1" tx1="dk1" bg2="lt2" tx2="dk2" accent1="accent1" accent2="accent2" accent3="accent3" accent4="accent4" accent5="accent5" accent6="accent6" hlink="hlink" folHlink="folHlink"/>
   <p:notesStyle>
-    <a:lvl1pPr marL="0" algn="l" defTabSz="914400" rtl="0" eaLnBrk="1" latinLnBrk="0" hangingPunct="1">
+    <a:lvl1pPr marL="0" algn="l" defTabSz="914400" rtl="0" eaLnBrk="1" latinLnBrk="1" hangingPunct="1">
       <a:defRPr sz="1200" kern="1200">
         <a:solidFill>
           <a:schemeClr val="tx1"/>
@@ -424,7 +200,7 @@
         <a:cs typeface="+mn-cs"/>
       </a:defRPr>
     </a:lvl1pPr>
-    <a:lvl2pPr marL="457200" algn="l" defTabSz="914400" rtl="0" eaLnBrk="1" latinLnBrk="0" hangingPunct="1">
+    <a:lvl2pPr marL="457200" algn="l" defTabSz="914400" rtl="0" eaLnBrk="1" latinLnBrk="1" hangingPunct="1">
       <a:defRPr sz="1200" kern="1200">
         <a:solidFill>
           <a:schemeClr val="tx1"/>
@@ -434,7 +210,7 @@
         <a:cs typeface="+mn-cs"/>
       </a:defRPr>
     </a:lvl2pPr>
-    <a:lvl3pPr marL="914400" algn="l" defTabSz="914400" rtl="0" eaLnBrk="1" latinLnBrk="0" hangingPunct="1">
+    <a:lvl3pPr marL="914400" algn="l" defTabSz="914400" rtl="0" eaLnBrk="1" latinLnBrk="1" hangingPunct="1">
       <a:defRPr sz="1200" kern="1200">
         <a:solidFill>
           <a:schemeClr val="tx1"/>
@@ -444,7 +220,7 @@
         <a:cs typeface="+mn-cs"/>
       </a:defRPr>
     </a:lvl3pPr>
-    <a:lvl4pPr marL="1371600" algn="l" defTabSz="914400" rtl="0" eaLnBrk="1" latinLnBrk="0" hangingPunct="1">
+    <a:lvl4pPr marL="1371600" algn="l" defTabSz="914400" rtl="0" eaLnBrk="1" latinLnBrk="1" hangingPunct="1">
       <a:defRPr sz="1200" kern="1200">
         <a:solidFill>
           <a:schemeClr val="tx1"/>
@@ -454,7 +230,7 @@
         <a:cs typeface="+mn-cs"/>
       </a:defRPr>
     </a:lvl4pPr>
-    <a:lvl5pPr marL="1828800" algn="l" defTabSz="914400" rtl="0" eaLnBrk="1" latinLnBrk="0" hangingPunct="1">
+    <a:lvl5pPr marL="1828800" algn="l" defTabSz="914400" rtl="0" eaLnBrk="1" latinLnBrk="1" hangingPunct="1">
       <a:defRPr sz="1200" kern="1200">
         <a:solidFill>
           <a:schemeClr val="tx1"/>
@@ -464,7 +240,7 @@
         <a:cs typeface="+mn-cs"/>
       </a:defRPr>
     </a:lvl5pPr>
-    <a:lvl6pPr marL="2286000" algn="l" defTabSz="914400" rtl="0" eaLnBrk="1" latinLnBrk="0" hangingPunct="1">
+    <a:lvl6pPr marL="2286000" algn="l" defTabSz="914400" rtl="0" eaLnBrk="1" latinLnBrk="1" hangingPunct="1">
       <a:defRPr sz="1200" kern="1200">
         <a:solidFill>
           <a:schemeClr val="tx1"/>
@@ -474,7 +250,7 @@
         <a:cs typeface="+mn-cs"/>
       </a:defRPr>
     </a:lvl6pPr>
-    <a:lvl7pPr marL="2743200" algn="l" defTabSz="914400" rtl="0" eaLnBrk="1" latinLnBrk="0" hangingPunct="1">
+    <a:lvl7pPr marL="2743200" algn="l" defTabSz="914400" rtl="0" eaLnBrk="1" latinLnBrk="1" hangingPunct="1">
       <a:defRPr sz="1200" kern="1200">
         <a:solidFill>
           <a:schemeClr val="tx1"/>
@@ -484,7 +260,7 @@
         <a:cs typeface="+mn-cs"/>
       </a:defRPr>
     </a:lvl7pPr>
-    <a:lvl8pPr marL="3200400" algn="l" defTabSz="914400" rtl="0" eaLnBrk="1" latinLnBrk="0" hangingPunct="1">
+    <a:lvl8pPr marL="3200400" algn="l" defTabSz="914400" rtl="0" eaLnBrk="1" latinLnBrk="1" hangingPunct="1">
       <a:defRPr sz="1200" kern="1200">
         <a:solidFill>
           <a:schemeClr val="tx1"/>
@@ -494,7 +270,7 @@
         <a:cs typeface="+mn-cs"/>
       </a:defRPr>
     </a:lvl8pPr>
-    <a:lvl9pPr marL="3657600" algn="l" defTabSz="914400" rtl="0" eaLnBrk="1" latinLnBrk="0" hangingPunct="1">
+    <a:lvl9pPr marL="3657600" algn="l" defTabSz="914400" rtl="0" eaLnBrk="1" latinLnBrk="1" hangingPunct="1">
       <a:defRPr sz="1200" kern="1200">
         <a:solidFill>
           <a:schemeClr val="tx1"/>
@@ -556,7 +332,6 @@
               <a:rPr lang="en-US" dirty="0"/>
               <a:t>Title. Team 5 first proposal: AIS track-based traffic analysis of the Norfolk / Hampton Roads port approach and selection of monitoring priority zones. Members: Ko Youngjo, Kim Heeseon, Baek Jiwon, Cho Minje.</a:t>
             </a:r>
-            <a:endParaRPr lang="en-US" dirty="0"/>
           </a:p>
         </p:txBody>
       </p:sp>
@@ -644,7 +419,6 @@
               <a:rPr lang="en-US" dirty="0"/>
               <a:t>Expected insights: efficient maritime patrol, detection of ghost / illicit vessels, early warning for collision-risk zones, and maintenance prioritization for heavily used lanes. Limitation: AIS tracks can be split by reception gaps, so track counts are not port calls; spatial overlap of paths does not mean simultaneous encounters. The priority zones are observation candidates, not collision probabilities.</a:t>
             </a:r>
-            <a:endParaRPr lang="en-US" dirty="0"/>
           </a:p>
         </p:txBody>
       </p:sp>
@@ -732,7 +506,6 @@
               <a:rPr lang="en-US" dirty="0"/>
               <a:t>Team introduction. Fill in each member's background and research interest; roles will be finalized after the initial data check.</a:t>
             </a:r>
-            <a:endParaRPr lang="en-US" dirty="0"/>
           </a:p>
         </p:txBody>
       </p:sp>
@@ -820,7 +593,6 @@
               <a:rPr lang="en-US" dirty="0"/>
               <a:t>Why this problem: approach channels are chokepoints shared by many vessel types; monitoring resources are limited, so we need evidence on where and when traffic concentrates; NOAA AIS Vessel Tracks 2024 makes this quantitative. Three research questions guide the work.</a:t>
             </a:r>
-            <a:endParaRPr lang="en-US" dirty="0"/>
           </a:p>
         </p:txBody>
       </p:sp>
@@ -908,7 +680,6 @@
               <a:rPr lang="en-US" dirty="0"/>
               <a:t>Plan: (1) data build and preprocessing, (2) traffic characterization, (3) monitoring priority zone selection, (4) robustness check. Each step has an owner slot — role assignment to be finalized.</a:t>
             </a:r>
-            <a:endParaRPr lang="en-US" dirty="0"/>
           </a:p>
         </p:txBody>
       </p:sp>
@@ -996,7 +767,6 @@
               <a:rPr lang="en-US" dirty="0"/>
               <a:t>AIS Vessel Tracks 2024 is a GeoPackage — a SQLite database holding features, attributes, CRS metadata and spatial indexes. Its single feature layer, AISVesselTracks2024, has 11 fields: 10 attributes plus the Shape geometry, in EPSG:4269 (NAD83 lon/lat). Each row is a track for one time interval, so one vessel (MMSI) appears in many rows: raw AIS is sampled to one minute and a new track starts after a 30-minute or 1-nautical-mile gap. VesselGroup gives a broad category; we keep Cargo and Tanker.</a:t>
             </a:r>
-            <a:endParaRPr lang="en-US" dirty="0"/>
           </a:p>
         </p:txBody>
       </p:sp>
@@ -1084,7 +854,6 @@
               <a:rPr lang="en-US" dirty="0"/>
               <a:t>The downloaded archive holds one GeoPackage, a SQLite container with three parts: the feature layer AISVesselTracks2024 (attributes plus MULTILINESTRING Shape geometry), GeoPackage metadata tables (layer and CRS, EPSG:4269), and an RTree spatial index on Shape. Our extract uses the RTree for a fast bounding-box candidate lookup, then an exact geometry intersection to remove false positives, filters Cargo and Tanker on VesselGroup, reads the result in pandas chunks, and writes a CSV where the binary Shape is converted to WKT text in Shape_WKT. The CRS label is carried in a Geometry_CRS column because CSV does not keep CRS metadata.</a:t>
             </a:r>
-            <a:endParaRPr lang="en-US" dirty="0"/>
           </a:p>
         </p:txBody>
       </p:sp>
@@ -1172,7 +941,6 @@
               <a:rPr lang="en-US" dirty="0"/>
               <a:t>Each row carries one vessel track for a time interval. Shape holds the whole line; MMSI identifies the vessel and repeats across rows; start/end time bound the interval; VesselGroup gives the broad category. VesselType is only a numeric code and needs a codebook before we interpret it. OBJECTID is a row identifier used by the spatial index. The map shows one real row from our first-pass extract: OBJECTID 50958, MMSI 563156300, a Cargo track from 1 to 6 January 2024. Reference points are approximate and there is no coastline layer; the line was redrawn from the extract plot.</a:t>
             </a:r>
-            <a:endParaRPr lang="en-US" dirty="0"/>
           </a:p>
         </p:txBody>
       </p:sp>
@@ -1260,7 +1028,6 @@
               <a:rPr lang="en-US" dirty="0"/>
               <a:t>First-pass extract: we kept every Cargo or Tanker track whose geometry intersects a broad rectangle from longitude −77.0 to −75.5 and latitude 36.3 to 37.5. That gives 10,943 rows: 10,311 Cargo rows from 1,865 distinct vessels and 632 Tanker rows from 138 vessels — about five rows per vessel, which is why we count unique MMSI separately from tracks. The CSV is about 373 MB and adds Shape_WKT, Geometry_CRS and Subset_BBox. The rectangle is temporary, not the final study boundary, and tracks crossing its edge are kept whole.</a:t>
             </a:r>
-            <a:endParaRPr lang="en-US" dirty="0"/>
           </a:p>
         </p:txBody>
       </p:sp>
@@ -1348,7 +1115,6 @@
               <a:rPr lang="en-US" dirty="0"/>
               <a:t>Main data: NOAA MarineCadastre AIS Vessel Tracks 2024, Jan–Dec 2024. Done so far: spatial-index extract on a broad rectangle and the Cargo/Tanker filter, giving 10,943 rows. Next: confirm the study boundary from NOAA ENCs and rerun the filter; decide whether we target all Cargo or a narrower type, using a VesselType codebook (the source says Cargo, not Bulk_Carrier); decide per analysis whether tracks are clipped or kept whole, and run quality checks; then reproject to UTM 18N and build the Python dataset. The raw GeoPackage stays unchanged and the CSV can be regenerated from the documented filter.</a:t>
             </a:r>
-            <a:endParaRPr lang="en-US" dirty="0"/>
           </a:p>
         </p:txBody>
       </p:sp>
@@ -1426,6 +1192,7 @@
         <a:solidFill>
           <a:srgbClr val="0A0B0D"/>
         </a:solidFill>
+        <a:effectLst/>
       </p:bgPr>
     </p:bg>
     <p:spTree>
@@ -1458,6 +1225,7 @@
         <a:solidFill>
           <a:srgbClr val="FFFFFF"/>
         </a:solidFill>
+        <a:effectLst/>
       </p:bgPr>
     </p:bg>
     <p:spTree>
@@ -1477,9 +1245,11 @@
       <p:sp>
         <p:nvSpPr>
           <p:cNvPr id="2" name="Text 0"/>
-          <p:cNvSpPr/>
+          <p:cNvSpPr>
+            <a:spLocks noGrp="1"/>
+          </p:cNvSpPr>
           <p:nvPr>
-            <p:ph idx="100" type="body" hasCustomPrompt="1"/>
+            <p:ph type="body" idx="100" hasCustomPrompt="1"/>
           </p:nvPr>
         </p:nvSpPr>
         <p:spPr>
@@ -1496,9 +1266,9 @@
         <p:txBody>
           <a:bodyPr wrap="square" rtlCol="0"/>
           <a:lstStyle>
-            <a:lvl1pPr indent="0" marL="0">
-              <a:buNone/>
-              <a:defRPr lang="en-US" sz="1100" spc="150" kern="0" dirty="0">
+            <a:lvl1pPr marL="0" indent="0">
+              <a:buNone/>
+              <a:defRPr lang="en-US" sz="1100" kern="0" spc="150" dirty="0">
                 <a:solidFill>
                   <a:schemeClr val="accent1"/>
                 </a:solidFill>
@@ -1509,7 +1279,7 @@
             </a:lvl1pPr>
           </a:lstStyle>
           <a:p>
-            <a:pPr indent="0" marL="0">
+            <a:pPr marL="0" indent="0">
               <a:buNone/>
             </a:pPr>
             <a:endParaRPr lang="en-US" sz="1100" dirty="0"/>
@@ -1519,9 +1289,11 @@
       <p:sp>
         <p:nvSpPr>
           <p:cNvPr id="3" name="Text 0"/>
-          <p:cNvSpPr/>
+          <p:cNvSpPr>
+            <a:spLocks noGrp="1"/>
+          </p:cNvSpPr>
           <p:nvPr>
-            <p:ph idx="101" type="title" hasCustomPrompt="1"/>
+            <p:ph type="title" idx="101" hasCustomPrompt="1"/>
           </p:nvPr>
         </p:nvSpPr>
         <p:spPr>
@@ -1538,7 +1310,7 @@
         <p:txBody>
           <a:bodyPr wrap="square" rtlCol="0"/>
           <a:lstStyle>
-            <a:lvl1pPr algn="l" indent="0" marL="0">
+            <a:lvl1pPr marL="0" indent="0" algn="l">
               <a:buNone/>
               <a:defRPr lang="en-US" sz="3600" dirty="0">
                 <a:solidFill>
@@ -1551,7 +1323,7 @@
             </a:lvl1pPr>
           </a:lstStyle>
           <a:p>
-            <a:pPr algn="l" indent="0" marL="0">
+            <a:pPr marL="0" indent="0" algn="l">
               <a:buNone/>
             </a:pPr>
             <a:endParaRPr lang="en-US" sz="3600" dirty="0"/>
@@ -1579,7 +1351,7 @@
           <a:bodyPr wrap="square" lIns="0" tIns="0" rIns="0" bIns="0" rtlCol="0" anchor="ctr"/>
           <a:lstStyle/>
           <a:p>
-            <a:pPr indent="0" marL="0">
+            <a:pPr marL="0" indent="0">
               <a:buNone/>
             </a:pPr>
             <a:r>
@@ -1617,7 +1389,7 @@
           </a:prstGeom>
           <a:extLst>
             <a:ext uri="{C572A759-6A51-4108-AA02-DFA0A04FC94B}">
-              <ma14:wrappingTextBoxFlag xmlns:ma14="http://schemas.microsoft.com/office/mac/drawingml/2011/main" val="0"/>
+              <ma14:wrappingTextBoxFlag xmlns:ma14="http://schemas.microsoft.com/office/mac/drawingml/2011/main" xmlns="" val="0"/>
             </a:ext>
           </a:extLst>
         </p:spPr>
@@ -1638,8 +1410,8 @@
           <a:p>
             <a:pPr algn="r"/>
             <a:fld id="{F7021451-1387-4CA6-816F-3879F97B5CBC}" type="slidenum">
-              <a:rPr b="0" lang="en-US"/>
-              <a:t>1003</a:t>
+              <a:rPr lang="en-US" b="0"/>
+              <a:t>‹#›</a:t>
             </a:fld>
             <a:endParaRPr lang="en-US"/>
           </a:p>
@@ -1656,6 +1428,11 @@
 <file path=ppt/slideMasters/slideMaster1.xml><?xml version="1.0" encoding="utf-8"?>
 <p:sldMaster xmlns:a="http://schemas.openxmlformats.org/drawingml/2006/main" xmlns:r="http://schemas.openxmlformats.org/officeDocument/2006/relationships" xmlns:p="http://schemas.openxmlformats.org/presentationml/2006/main">
   <p:cSld>
+    <p:bg>
+      <p:bgRef idx="1001">
+        <a:schemeClr val="bg1"/>
+      </p:bgRef>
+    </p:bg>
     <p:spTree>
       <p:nvGrpSpPr>
         <p:cNvPr id="1" name=""/>
@@ -1690,7 +1467,7 @@
           </a:prstGeom>
           <a:extLst>
             <a:ext uri="{C572A759-6A51-4108-AA02-DFA0A04FC94B}">
-              <ma14:wrappingTextBoxFlag xmlns:ma14="http://schemas.microsoft.com/office/mac/drawingml/2011/main" val="0"/>
+              <ma14:wrappingTextBoxFlag xmlns:ma14="http://schemas.microsoft.com/office/mac/drawingml/2011/main" xmlns="" val="0"/>
             </a:ext>
           </a:extLst>
         </p:spPr>
@@ -1711,8 +1488,8 @@
           <a:p>
             <a:pPr algn="r"/>
             <a:fld id="{F7021451-1387-4CA6-816F-3879F97B5CBC}" type="slidenum">
-              <a:rPr b="0" lang="en-US"/>
-              <a:t>null</a:t>
+              <a:rPr lang="en-US" b="0"/>
+              <a:t>‹#›</a:t>
             </a:fld>
             <a:endParaRPr lang="en-US"/>
           </a:p>
@@ -2022,7 +1799,7 @@
           <a:bodyPr wrap="square" lIns="0" tIns="0" rIns="0" bIns="0" rtlCol="0" anchor="ctr"/>
           <a:lstStyle/>
           <a:p>
-            <a:pPr algn="ctr" indent="0" marL="0">
+            <a:pPr marL="0" indent="0" algn="ctr">
               <a:buNone/>
             </a:pPr>
             <a:r>
@@ -2061,7 +1838,7 @@
           <a:bodyPr wrap="square" lIns="0" tIns="0" rIns="0" bIns="0" rtlCol="0" anchor="t"/>
           <a:lstStyle/>
           <a:p>
-            <a:pPr indent="0" marL="0">
+            <a:pPr marL="0" indent="0">
               <a:lnSpc>
                 <a:spcPct val="95000"/>
               </a:lnSpc>
@@ -2103,7 +1880,7 @@
           <a:bodyPr wrap="square" lIns="0" tIns="0" rIns="0" bIns="0" rtlCol="0" anchor="t"/>
           <a:lstStyle/>
           <a:p>
-            <a:pPr indent="0" marL="0">
+            <a:pPr marL="0" indent="0">
               <a:buNone/>
             </a:pPr>
             <a:r>
@@ -2146,7 +1923,7 @@
           <a:bodyPr wrap="square" lIns="0" tIns="0" rIns="0" bIns="0" rtlCol="0" anchor="ctr"/>
           <a:lstStyle/>
           <a:p>
-            <a:pPr algn="ctr" indent="0" marL="0">
+            <a:pPr marL="0" indent="0" algn="ctr">
               <a:buNone/>
             </a:pPr>
             <a:r>
@@ -2185,7 +1962,7 @@
           <a:bodyPr wrap="square" lIns="0" tIns="0" rIns="0" bIns="0" rtlCol="0" anchor="ctr"/>
           <a:lstStyle/>
           <a:p>
-            <a:pPr indent="0" marL="0">
+            <a:pPr marL="0" indent="0">
               <a:buNone/>
             </a:pPr>
             <a:r>
@@ -2224,7 +2001,7 @@
           </a:solidFill>
           <a:ln/>
           <a:effectLst>
-            <a:outerShdw sx="100000" sy="100000" kx="0" ky="0" algn="bl" rotWithShape="0" blurRad="228600" dist="76200" dir="5400000">
+            <a:outerShdw blurRad="228600" dist="76200" dir="5400000" algn="bl" rotWithShape="0">
               <a:srgbClr val="000000">
                 <a:alpha val="45000"/>
               </a:srgbClr>
@@ -2273,7 +2050,7 @@
           <a:bodyPr wrap="square" lIns="0" tIns="0" rIns="0" bIns="0" rtlCol="0" anchor="ctr"/>
           <a:lstStyle/>
           <a:p>
-            <a:pPr indent="0" marL="0">
+            <a:pPr marL="0" indent="0">
               <a:buNone/>
             </a:pPr>
             <a:r>
@@ -2312,7 +2089,7 @@
           <a:bodyPr wrap="square" lIns="0" tIns="0" rIns="0" bIns="0" rtlCol="0" anchor="ctr"/>
           <a:lstStyle/>
           <a:p>
-            <a:pPr algn="r" indent="0" marL="0">
+            <a:pPr marL="0" indent="0" algn="r">
               <a:buNone/>
             </a:pPr>
             <a:r>
@@ -3891,7 +3668,7 @@
           <a:bodyPr wrap="square" lIns="0" tIns="0" rIns="0" bIns="0" rtlCol="0" anchor="ctr"/>
           <a:lstStyle/>
           <a:p>
-            <a:pPr indent="0" marL="0">
+            <a:pPr marL="0" indent="0">
               <a:buNone/>
             </a:pPr>
             <a:r>
@@ -3930,7 +3707,7 @@
           <a:bodyPr wrap="square" lIns="0" tIns="0" rIns="0" bIns="0" rtlCol="0" anchor="ctr"/>
           <a:lstStyle/>
           <a:p>
-            <a:pPr algn="r" indent="0" marL="0">
+            <a:pPr marL="0" indent="0" algn="r">
               <a:buNone/>
             </a:pPr>
             <a:r>
@@ -3969,7 +3746,7 @@
           <a:bodyPr wrap="square" lIns="0" tIns="0" rIns="0" bIns="0" rtlCol="0" anchor="ctr"/>
           <a:lstStyle/>
           <a:p>
-            <a:pPr indent="0" marL="0">
+            <a:pPr marL="0" indent="0">
               <a:buNone/>
             </a:pPr>
             <a:r>
@@ -4008,7 +3785,7 @@
           <a:bodyPr wrap="square" lIns="0" tIns="0" rIns="0" bIns="0" rtlCol="0" anchor="ctr"/>
           <a:lstStyle/>
           <a:p>
-            <a:pPr algn="r" indent="0" marL="0">
+            <a:pPr marL="0" indent="0" algn="r">
               <a:buNone/>
             </a:pPr>
             <a:r>
@@ -4047,7 +3824,7 @@
           <a:bodyPr wrap="square" lIns="0" tIns="0" rIns="0" bIns="0" rtlCol="0" anchor="ctr"/>
           <a:lstStyle/>
           <a:p>
-            <a:pPr indent="0" marL="0">
+            <a:pPr marL="0" indent="0">
               <a:buNone/>
             </a:pPr>
             <a:r>
@@ -4086,7 +3863,7 @@
           <a:bodyPr wrap="square" lIns="0" tIns="0" rIns="0" bIns="0" rtlCol="0" anchor="ctr"/>
           <a:lstStyle/>
           <a:p>
-            <a:pPr algn="r" indent="0" marL="0">
+            <a:pPr marL="0" indent="0" algn="r">
               <a:buNone/>
             </a:pPr>
             <a:r>
@@ -4150,11 +3927,11 @@
           <a:bodyPr wrap="square" lIns="0" tIns="0" rIns="0" bIns="0" rtlCol="0" anchor="ctr"/>
           <a:lstStyle/>
           <a:p>
-            <a:pPr indent="0" marL="0">
-              <a:buNone/>
-            </a:pPr>
-            <a:r>
-              <a:rPr lang="en-US" sz="1100" spc="150" kern="0" dirty="0">
+            <a:pPr marL="0" indent="0">
+              <a:buNone/>
+            </a:pPr>
+            <a:r>
+              <a:rPr lang="en-US" sz="1100" kern="0" spc="150" dirty="0">
                 <a:solidFill>
                   <a:srgbClr val="7FA6FF"/>
                 </a:solidFill>
@@ -4189,7 +3966,7 @@
           <a:bodyPr wrap="square" lIns="0" tIns="0" rIns="0" bIns="0" rtlCol="0" anchor="t"/>
           <a:lstStyle/>
           <a:p>
-            <a:pPr indent="0" marL="0">
+            <a:pPr marL="0" indent="0">
               <a:buNone/>
             </a:pPr>
             <a:r>
@@ -4228,11 +4005,11 @@
           <a:bodyPr wrap="square" lIns="0" tIns="0" rIns="0" bIns="0" rtlCol="0" anchor="ctr"/>
           <a:lstStyle/>
           <a:p>
-            <a:pPr indent="0" marL="0">
-              <a:buNone/>
-            </a:pPr>
-            <a:r>
-              <a:rPr lang="en-US" sz="1100" spc="150" kern="0" dirty="0">
+            <a:pPr marL="0" indent="0">
+              <a:buNone/>
+            </a:pPr>
+            <a:r>
+              <a:rPr lang="en-US" sz="1100" kern="0" spc="150" dirty="0">
                 <a:solidFill>
                   <a:srgbClr val="8A919E"/>
                 </a:solidFill>
@@ -4267,7 +4044,7 @@
           <a:bodyPr wrap="square" lIns="0" tIns="0" rIns="0" bIns="0" rtlCol="0" anchor="ctr"/>
           <a:lstStyle/>
           <a:p>
-            <a:pPr indent="0" marL="0">
+            <a:pPr marL="0" indent="0">
               <a:buNone/>
             </a:pPr>
             <a:r>
@@ -4281,9 +4058,6 @@
               </a:rPr>
               <a:t>✓  </a:t>
             </a:r>
-            <a:pPr indent="0" marL="0">
-              <a:buNone/>
-            </a:pPr>
             <a:r>
               <a:rPr lang="en-US" sz="1400" dirty="0">
                 <a:solidFill>
@@ -4320,7 +4094,7 @@
           <a:bodyPr wrap="square" lIns="0" tIns="0" rIns="0" bIns="0" rtlCol="0" anchor="ctr"/>
           <a:lstStyle/>
           <a:p>
-            <a:pPr indent="0" marL="0">
+            <a:pPr marL="0" indent="0">
               <a:buNone/>
             </a:pPr>
             <a:r>
@@ -4334,9 +4108,6 @@
               </a:rPr>
               <a:t>✓  </a:t>
             </a:r>
-            <a:pPr indent="0" marL="0">
-              <a:buNone/>
-            </a:pPr>
             <a:r>
               <a:rPr lang="en-US" sz="1400" dirty="0">
                 <a:solidFill>
@@ -4373,7 +4144,7 @@
           <a:bodyPr wrap="square" lIns="0" tIns="0" rIns="0" bIns="0" rtlCol="0" anchor="ctr"/>
           <a:lstStyle/>
           <a:p>
-            <a:pPr indent="0" marL="0">
+            <a:pPr marL="0" indent="0">
               <a:buNone/>
             </a:pPr>
             <a:r>
@@ -4387,9 +4158,6 @@
               </a:rPr>
               <a:t>✓  </a:t>
             </a:r>
-            <a:pPr indent="0" marL="0">
-              <a:buNone/>
-            </a:pPr>
             <a:r>
               <a:rPr lang="en-US" sz="1400" dirty="0">
                 <a:solidFill>
@@ -4426,7 +4194,7 @@
           <a:bodyPr wrap="square" lIns="0" tIns="0" rIns="0" bIns="0" rtlCol="0" anchor="ctr"/>
           <a:lstStyle/>
           <a:p>
-            <a:pPr indent="0" marL="0">
+            <a:pPr marL="0" indent="0">
               <a:buNone/>
             </a:pPr>
             <a:r>
@@ -4440,9 +4208,6 @@
               </a:rPr>
               <a:t>✓  </a:t>
             </a:r>
-            <a:pPr indent="0" marL="0">
-              <a:buNone/>
-            </a:pPr>
             <a:r>
               <a:rPr lang="en-US" sz="1400" dirty="0">
                 <a:solidFill>
@@ -4502,295 +4267,7 @@
       </p:sp>
       <p:pic>
         <p:nvPicPr>
-          <p:cNvPr id="11" name="app icon 0" descr="preencoded.png">    </p:cNvPr>
-          <p:cNvPicPr>
-            <a:picLocks noChangeAspect="1"/>
-          </p:cNvPicPr>
-          <p:nvPr/>
-        </p:nvPicPr>
-        <p:blipFill>
-          <a:blip r:embed="rId1"/>
-          <a:stretch>
-            <a:fillRect/>
-          </a:stretch>
-        </p:blipFill>
-        <p:spPr>
-          <a:xfrm>
-            <a:off x="3731118" y="1765158"/>
-            <a:ext cx="218724" cy="218724"/>
-          </a:xfrm>
-          <a:prstGeom prst="rect">
-            <a:avLst/>
-          </a:prstGeom>
-        </p:spPr>
-      </p:pic>
-      <p:sp>
-        <p:nvSpPr>
-          <p:cNvPr id="12" name="app h 0"/>
-          <p:cNvSpPr txBox="1"/>
-          <p:nvPr/>
-        </p:nvSpPr>
-        <p:spPr>
-          <a:xfrm>
-            <a:off x="4178808" y="1664208"/>
-            <a:ext cx="1645920" cy="420624"/>
-          </a:xfrm>
-          <a:prstGeom prst="rect">
-            <a:avLst/>
-          </a:prstGeom>
-          <a:noFill/>
-          <a:ln/>
-        </p:spPr>
-        <p:txBody>
-          <a:bodyPr wrap="square" lIns="0" tIns="0" rIns="0" bIns="0" rtlCol="0" anchor="ctr"/>
-          <a:lstStyle/>
-          <a:p>
-            <a:pPr indent="0" marL="0">
-              <a:buNone/>
-            </a:pPr>
-            <a:r>
-              <a:rPr lang="en-US" sz="1350" dirty="0">
-                <a:solidFill>
-                  <a:srgbClr val="FFFFFF"/>
-                </a:solidFill>
-                <a:latin typeface="프리젠테이션 7 Bold" pitchFamily="34" charset="0"/>
-                <a:ea typeface="프리젠테이션 7 Bold" pitchFamily="34" charset="-122"/>
-                <a:cs typeface="프리젠테이션 7 Bold" pitchFamily="34" charset="-120"/>
-              </a:rPr>
-              <a:t>Efficient maritime patrol</a:t>
-            </a:r>
-            <a:endParaRPr lang="en-US" sz="1350" dirty="0"/>
-          </a:p>
-        </p:txBody>
-      </p:sp>
-      <p:sp>
-        <p:nvSpPr>
-          <p:cNvPr id="13" name="app d 0"/>
-          <p:cNvSpPr txBox="1"/>
-          <p:nvPr/>
-        </p:nvSpPr>
-        <p:spPr>
-          <a:xfrm>
-            <a:off x="3630168" y="2194560"/>
-            <a:ext cx="2130552" cy="594360"/>
-          </a:xfrm>
-          <a:prstGeom prst="rect">
-            <a:avLst/>
-          </a:prstGeom>
-          <a:noFill/>
-          <a:ln/>
-        </p:spPr>
-        <p:txBody>
-          <a:bodyPr wrap="square" lIns="0" tIns="0" rIns="0" bIns="0" rtlCol="0" anchor="t"/>
-          <a:lstStyle/>
-          <a:p>
-            <a:pPr indent="0" marL="0">
-              <a:buNone/>
-            </a:pPr>
-            <a:r>
-              <a:rPr lang="en-US" sz="1150" dirty="0">
-                <a:solidFill>
-                  <a:srgbClr val="B8BEC8"/>
-                </a:solidFill>
-                <a:latin typeface="프리젠테이션 4 Regular" pitchFamily="34" charset="0"/>
-                <a:ea typeface="프리젠테이션 4 Regular" pitchFamily="34" charset="-122"/>
-                <a:cs typeface="프리젠테이션 4 Regular" pitchFamily="34" charset="-120"/>
-              </a:rPr>
-              <a:t>Allocate patrol and VTS attention to zones that persist across months and criteria.</a:t>
-            </a:r>
-            <a:endParaRPr lang="en-US" sz="1150" dirty="0"/>
-          </a:p>
-        </p:txBody>
-      </p:sp>
-      <p:sp>
-        <p:nvSpPr>
-          <p:cNvPr id="14" name="app card 1"/>
-          <p:cNvSpPr/>
-          <p:nvPr/>
-        </p:nvSpPr>
-        <p:spPr>
-          <a:xfrm>
-            <a:off x="6172200" y="1463040"/>
-            <a:ext cx="2514600" cy="1417320"/>
-          </a:xfrm>
-          <a:prstGeom prst="roundRect">
-            <a:avLst>
-              <a:gd name="adj" fmla="val 14194"/>
-            </a:avLst>
-          </a:prstGeom>
-          <a:solidFill>
-            <a:srgbClr val="1B1D22"/>
-          </a:solidFill>
-          <a:ln/>
-        </p:spPr>
-      </p:sp>
-      <p:sp>
-        <p:nvSpPr>
-          <p:cNvPr id="15" name="app icon 1 bg"/>
-          <p:cNvSpPr/>
-          <p:nvPr/>
-        </p:nvSpPr>
-        <p:spPr>
-          <a:xfrm>
-            <a:off x="6373368" y="1664208"/>
-            <a:ext cx="420624" cy="420624"/>
-          </a:xfrm>
-          <a:prstGeom prst="ellipse">
-            <a:avLst/>
-          </a:prstGeom>
-          <a:solidFill>
-            <a:srgbClr val="26292F"/>
-          </a:solidFill>
-          <a:ln/>
-        </p:spPr>
-      </p:sp>
-      <p:pic>
-        <p:nvPicPr>
-          <p:cNvPr id="16" name="app icon 1" descr="preencoded.png">    </p:cNvPr>
-          <p:cNvPicPr>
-            <a:picLocks noChangeAspect="1"/>
-          </p:cNvPicPr>
-          <p:nvPr/>
-        </p:nvPicPr>
-        <p:blipFill>
-          <a:blip r:embed="rId2"/>
-          <a:stretch>
-            <a:fillRect/>
-          </a:stretch>
-        </p:blipFill>
-        <p:spPr>
-          <a:xfrm>
-            <a:off x="6474318" y="1765158"/>
-            <a:ext cx="218724" cy="218724"/>
-          </a:xfrm>
-          <a:prstGeom prst="rect">
-            <a:avLst/>
-          </a:prstGeom>
-        </p:spPr>
-      </p:pic>
-      <p:sp>
-        <p:nvSpPr>
-          <p:cNvPr id="17" name="app h 1"/>
-          <p:cNvSpPr txBox="1"/>
-          <p:nvPr/>
-        </p:nvSpPr>
-        <p:spPr>
-          <a:xfrm>
-            <a:off x="6922008" y="1664208"/>
-            <a:ext cx="1645920" cy="420624"/>
-          </a:xfrm>
-          <a:prstGeom prst="rect">
-            <a:avLst/>
-          </a:prstGeom>
-          <a:noFill/>
-          <a:ln/>
-        </p:spPr>
-        <p:txBody>
-          <a:bodyPr wrap="square" lIns="0" tIns="0" rIns="0" bIns="0" rtlCol="0" anchor="ctr"/>
-          <a:lstStyle/>
-          <a:p>
-            <a:pPr indent="0" marL="0">
-              <a:buNone/>
-            </a:pPr>
-            <a:r>
-              <a:rPr lang="en-US" sz="1350" dirty="0">
-                <a:solidFill>
-                  <a:srgbClr val="FFFFFF"/>
-                </a:solidFill>
-                <a:latin typeface="프리젠테이션 7 Bold" pitchFamily="34" charset="0"/>
-                <a:ea typeface="프리젠테이션 7 Bold" pitchFamily="34" charset="-122"/>
-                <a:cs typeface="프리젠테이션 7 Bold" pitchFamily="34" charset="-120"/>
-              </a:rPr>
-              <a:t>Spot ghost / illicit vessels</a:t>
-            </a:r>
-            <a:endParaRPr lang="en-US" sz="1350" dirty="0"/>
-          </a:p>
-        </p:txBody>
-      </p:sp>
-      <p:sp>
-        <p:nvSpPr>
-          <p:cNvPr id="18" name="app d 1"/>
-          <p:cNvSpPr txBox="1"/>
-          <p:nvPr/>
-        </p:nvSpPr>
-        <p:spPr>
-          <a:xfrm>
-            <a:off x="6373368" y="2194560"/>
-            <a:ext cx="2130552" cy="594360"/>
-          </a:xfrm>
-          <a:prstGeom prst="rect">
-            <a:avLst/>
-          </a:prstGeom>
-          <a:noFill/>
-          <a:ln/>
-        </p:spPr>
-        <p:txBody>
-          <a:bodyPr wrap="square" lIns="0" tIns="0" rIns="0" bIns="0" rtlCol="0" anchor="t"/>
-          <a:lstStyle/>
-          <a:p>
-            <a:pPr indent="0" marL="0">
-              <a:buNone/>
-            </a:pPr>
-            <a:r>
-              <a:rPr lang="en-US" sz="1150" dirty="0">
-                <a:solidFill>
-                  <a:srgbClr val="B8BEC8"/>
-                </a:solidFill>
-                <a:latin typeface="프리젠테이션 4 Regular" pitchFamily="34" charset="0"/>
-                <a:ea typeface="프리젠테이션 4 Regular" pitchFamily="34" charset="-122"/>
-                <a:cs typeface="프리젠테이션 4 Regular" pitchFamily="34" charset="-120"/>
-              </a:rPr>
-              <a:t>Use the normal-traffic baseline to flag tracks that vanish or stray in busy zones.</a:t>
-            </a:r>
-            <a:endParaRPr lang="en-US" sz="1150" dirty="0"/>
-          </a:p>
-        </p:txBody>
-      </p:sp>
-      <p:sp>
-        <p:nvSpPr>
-          <p:cNvPr id="19" name="app card 2"/>
-          <p:cNvSpPr/>
-          <p:nvPr/>
-        </p:nvSpPr>
-        <p:spPr>
-          <a:xfrm>
-            <a:off x="3429000" y="3081528"/>
-            <a:ext cx="2514600" cy="1417320"/>
-          </a:xfrm>
-          <a:prstGeom prst="roundRect">
-            <a:avLst>
-              <a:gd name="adj" fmla="val 14194"/>
-            </a:avLst>
-          </a:prstGeom>
-          <a:solidFill>
-            <a:srgbClr val="1B1D22"/>
-          </a:solidFill>
-          <a:ln/>
-        </p:spPr>
-      </p:sp>
-      <p:sp>
-        <p:nvSpPr>
-          <p:cNvPr id="20" name="app icon 2 bg"/>
-          <p:cNvSpPr/>
-          <p:nvPr/>
-        </p:nvSpPr>
-        <p:spPr>
-          <a:xfrm>
-            <a:off x="3630168" y="3282696"/>
-            <a:ext cx="420624" cy="420624"/>
-          </a:xfrm>
-          <a:prstGeom prst="ellipse">
-            <a:avLst/>
-          </a:prstGeom>
-          <a:solidFill>
-            <a:srgbClr val="26292F"/>
-          </a:solidFill>
-          <a:ln/>
-        </p:spPr>
-      </p:sp>
-      <p:pic>
-        <p:nvPicPr>
-          <p:cNvPr id="21" name="app icon 2" descr="preencoded.png">    </p:cNvPr>
+          <p:cNvPr id="11" name="app icon 0" descr="preencoded.png"/>
           <p:cNvPicPr>
             <a:picLocks noChangeAspect="1"/>
           </p:cNvPicPr>
@@ -4804,7 +4281,7 @@
         </p:blipFill>
         <p:spPr>
           <a:xfrm>
-            <a:off x="3731118" y="3383646"/>
+            <a:off x="3731118" y="1765158"/>
             <a:ext cx="218724" cy="218724"/>
           </a:xfrm>
           <a:prstGeom prst="rect">
@@ -4814,13 +4291,13 @@
       </p:pic>
       <p:sp>
         <p:nvSpPr>
-          <p:cNvPr id="22" name="app h 2"/>
-          <p:cNvSpPr txBox="1"/>
-          <p:nvPr/>
-        </p:nvSpPr>
-        <p:spPr>
-          <a:xfrm>
-            <a:off x="4178808" y="3282696"/>
+          <p:cNvPr id="12" name="app h 0"/>
+          <p:cNvSpPr txBox="1"/>
+          <p:nvPr/>
+        </p:nvSpPr>
+        <p:spPr>
+          <a:xfrm>
+            <a:off x="4178808" y="1664208"/>
             <a:ext cx="1645920" cy="420624"/>
           </a:xfrm>
           <a:prstGeom prst="rect">
@@ -4833,7 +4310,7 @@
           <a:bodyPr wrap="square" lIns="0" tIns="0" rIns="0" bIns="0" rtlCol="0" anchor="ctr"/>
           <a:lstStyle/>
           <a:p>
-            <a:pPr indent="0" marL="0">
+            <a:pPr marL="0" indent="0">
               <a:buNone/>
             </a:pPr>
             <a:r>
@@ -4845,7 +4322,7 @@
                 <a:ea typeface="프리젠테이션 7 Bold" pitchFamily="34" charset="-122"/>
                 <a:cs typeface="프리젠테이션 7 Bold" pitchFamily="34" charset="-120"/>
               </a:rPr>
-              <a:t>Early collision-risk alerts</a:t>
+              <a:t>Efficient maritime patrol</a:t>
             </a:r>
             <a:endParaRPr lang="en-US" sz="1350" dirty="0"/>
           </a:p>
@@ -4853,13 +4330,13 @@
       </p:sp>
       <p:sp>
         <p:nvSpPr>
-          <p:cNvPr id="23" name="app d 2"/>
-          <p:cNvSpPr txBox="1"/>
-          <p:nvPr/>
-        </p:nvSpPr>
-        <p:spPr>
-          <a:xfrm>
-            <a:off x="3630168" y="3813048"/>
+          <p:cNvPr id="13" name="app d 0"/>
+          <p:cNvSpPr txBox="1"/>
+          <p:nvPr/>
+        </p:nvSpPr>
+        <p:spPr>
+          <a:xfrm>
+            <a:off x="3630168" y="2194560"/>
             <a:ext cx="2130552" cy="594360"/>
           </a:xfrm>
           <a:prstGeom prst="rect">
@@ -4872,7 +4349,7 @@
           <a:bodyPr wrap="square" lIns="0" tIns="0" rIns="0" bIns="0" rtlCol="0" anchor="t"/>
           <a:lstStyle/>
           <a:p>
-            <a:pPr indent="0" marL="0">
+            <a:pPr marL="0" indent="0">
               <a:buNone/>
             </a:pPr>
             <a:r>
@@ -4884,7 +4361,7 @@
                 <a:ea typeface="프리젠테이션 4 Regular" pitchFamily="34" charset="-122"/>
                 <a:cs typeface="프리젠테이션 4 Regular" pitchFamily="34" charset="-120"/>
               </a:rPr>
-              <a:t>Zones where cargo and tanker lanes overlap become candidates for warnings.</a:t>
+              <a:t>Allocate patrol and VTS attention to zones that persist across months and criteria.</a:t>
             </a:r>
             <a:endParaRPr lang="en-US" sz="1150" dirty="0"/>
           </a:p>
@@ -4892,13 +4369,13 @@
       </p:sp>
       <p:sp>
         <p:nvSpPr>
-          <p:cNvPr id="24" name="app card 3"/>
+          <p:cNvPr id="14" name="app card 1"/>
           <p:cNvSpPr/>
           <p:nvPr/>
         </p:nvSpPr>
         <p:spPr>
           <a:xfrm>
-            <a:off x="6172200" y="3081528"/>
+            <a:off x="6172200" y="1463040"/>
             <a:ext cx="2514600" cy="1417320"/>
           </a:xfrm>
           <a:prstGeom prst="roundRect">
@@ -4914,13 +4391,13 @@
       </p:sp>
       <p:sp>
         <p:nvSpPr>
-          <p:cNvPr id="25" name="app icon 3 bg"/>
+          <p:cNvPr id="15" name="app icon 1 bg"/>
           <p:cNvSpPr/>
           <p:nvPr/>
         </p:nvSpPr>
         <p:spPr>
           <a:xfrm>
-            <a:off x="6373368" y="3282696"/>
+            <a:off x="6373368" y="1664208"/>
             <a:ext cx="420624" cy="420624"/>
           </a:xfrm>
           <a:prstGeom prst="ellipse">
@@ -4934,7 +4411,7 @@
       </p:sp>
       <p:pic>
         <p:nvPicPr>
-          <p:cNvPr id="26" name="app icon 3" descr="preencoded.png">    </p:cNvPr>
+          <p:cNvPr id="16" name="app icon 1" descr="preencoded.png"/>
           <p:cNvPicPr>
             <a:picLocks noChangeAspect="1"/>
           </p:cNvPicPr>
@@ -4948,7 +4425,7 @@
         </p:blipFill>
         <p:spPr>
           <a:xfrm>
-            <a:off x="6474318" y="3383646"/>
+            <a:off x="6474318" y="1765158"/>
             <a:ext cx="218724" cy="218724"/>
           </a:xfrm>
           <a:prstGeom prst="rect">
@@ -4958,13 +4435,13 @@
       </p:pic>
       <p:sp>
         <p:nvSpPr>
-          <p:cNvPr id="27" name="app h 3"/>
-          <p:cNvSpPr txBox="1"/>
-          <p:nvPr/>
-        </p:nvSpPr>
-        <p:spPr>
-          <a:xfrm>
-            <a:off x="6922008" y="3282696"/>
+          <p:cNvPr id="17" name="app h 1"/>
+          <p:cNvSpPr txBox="1"/>
+          <p:nvPr/>
+        </p:nvSpPr>
+        <p:spPr>
+          <a:xfrm>
+            <a:off x="6922008" y="1664208"/>
             <a:ext cx="1645920" cy="420624"/>
           </a:xfrm>
           <a:prstGeom prst="rect">
@@ -4977,7 +4454,7 @@
           <a:bodyPr wrap="square" lIns="0" tIns="0" rIns="0" bIns="0" rtlCol="0" anchor="ctr"/>
           <a:lstStyle/>
           <a:p>
-            <a:pPr indent="0" marL="0">
+            <a:pPr marL="0" indent="0">
               <a:buNone/>
             </a:pPr>
             <a:r>
@@ -4989,7 +4466,7 @@
                 <a:ea typeface="프리젠테이션 7 Bold" pitchFamily="34" charset="-122"/>
                 <a:cs typeface="프리젠테이션 7 Bold" pitchFamily="34" charset="-120"/>
               </a:rPr>
-              <a:t>Channel maintenance</a:t>
+              <a:t>Spot ghost / illicit vessels</a:t>
             </a:r>
             <a:endParaRPr lang="en-US" sz="1350" dirty="0"/>
           </a:p>
@@ -4997,13 +4474,13 @@
       </p:sp>
       <p:sp>
         <p:nvSpPr>
-          <p:cNvPr id="28" name="app d 3"/>
-          <p:cNvSpPr txBox="1"/>
-          <p:nvPr/>
-        </p:nvSpPr>
-        <p:spPr>
-          <a:xfrm>
-            <a:off x="6373368" y="3813048"/>
+          <p:cNvPr id="18" name="app d 1"/>
+          <p:cNvSpPr txBox="1"/>
+          <p:nvPr/>
+        </p:nvSpPr>
+        <p:spPr>
+          <a:xfrm>
+            <a:off x="6373368" y="2194560"/>
             <a:ext cx="2130552" cy="594360"/>
           </a:xfrm>
           <a:prstGeom prst="rect">
@@ -5016,7 +4493,7 @@
           <a:bodyPr wrap="square" lIns="0" tIns="0" rIns="0" bIns="0" rtlCol="0" anchor="t"/>
           <a:lstStyle/>
           <a:p>
-            <a:pPr indent="0" marL="0">
+            <a:pPr marL="0" indent="0">
               <a:buNone/>
             </a:pPr>
             <a:r>
@@ -5028,6 +4505,294 @@
                 <a:ea typeface="프리젠테이션 4 Regular" pitchFamily="34" charset="-122"/>
                 <a:cs typeface="프리젠테이션 4 Regular" pitchFamily="34" charset="-120"/>
               </a:rPr>
+              <a:t>Use the normal-traffic baseline to flag tracks that vanish or stray in busy zones.</a:t>
+            </a:r>
+            <a:endParaRPr lang="en-US" sz="1150" dirty="0"/>
+          </a:p>
+        </p:txBody>
+      </p:sp>
+      <p:sp>
+        <p:nvSpPr>
+          <p:cNvPr id="19" name="app card 2"/>
+          <p:cNvSpPr/>
+          <p:nvPr/>
+        </p:nvSpPr>
+        <p:spPr>
+          <a:xfrm>
+            <a:off x="3429000" y="3081528"/>
+            <a:ext cx="2514600" cy="1417320"/>
+          </a:xfrm>
+          <a:prstGeom prst="roundRect">
+            <a:avLst>
+              <a:gd name="adj" fmla="val 14194"/>
+            </a:avLst>
+          </a:prstGeom>
+          <a:solidFill>
+            <a:srgbClr val="1B1D22"/>
+          </a:solidFill>
+          <a:ln/>
+        </p:spPr>
+      </p:sp>
+      <p:sp>
+        <p:nvSpPr>
+          <p:cNvPr id="20" name="app icon 2 bg"/>
+          <p:cNvSpPr/>
+          <p:nvPr/>
+        </p:nvSpPr>
+        <p:spPr>
+          <a:xfrm>
+            <a:off x="3630168" y="3282696"/>
+            <a:ext cx="420624" cy="420624"/>
+          </a:xfrm>
+          <a:prstGeom prst="ellipse">
+            <a:avLst/>
+          </a:prstGeom>
+          <a:solidFill>
+            <a:srgbClr val="26292F"/>
+          </a:solidFill>
+          <a:ln/>
+        </p:spPr>
+      </p:sp>
+      <p:pic>
+        <p:nvPicPr>
+          <p:cNvPr id="21" name="app icon 2" descr="preencoded.png"/>
+          <p:cNvPicPr>
+            <a:picLocks noChangeAspect="1"/>
+          </p:cNvPicPr>
+          <p:nvPr/>
+        </p:nvPicPr>
+        <p:blipFill>
+          <a:blip r:embed="rId5"/>
+          <a:stretch>
+            <a:fillRect/>
+          </a:stretch>
+        </p:blipFill>
+        <p:spPr>
+          <a:xfrm>
+            <a:off x="3731118" y="3383646"/>
+            <a:ext cx="218724" cy="218724"/>
+          </a:xfrm>
+          <a:prstGeom prst="rect">
+            <a:avLst/>
+          </a:prstGeom>
+        </p:spPr>
+      </p:pic>
+      <p:sp>
+        <p:nvSpPr>
+          <p:cNvPr id="22" name="app h 2"/>
+          <p:cNvSpPr txBox="1"/>
+          <p:nvPr/>
+        </p:nvSpPr>
+        <p:spPr>
+          <a:xfrm>
+            <a:off x="4178808" y="3282696"/>
+            <a:ext cx="1645920" cy="420624"/>
+          </a:xfrm>
+          <a:prstGeom prst="rect">
+            <a:avLst/>
+          </a:prstGeom>
+          <a:noFill/>
+          <a:ln/>
+        </p:spPr>
+        <p:txBody>
+          <a:bodyPr wrap="square" lIns="0" tIns="0" rIns="0" bIns="0" rtlCol="0" anchor="ctr"/>
+          <a:lstStyle/>
+          <a:p>
+            <a:pPr marL="0" indent="0">
+              <a:buNone/>
+            </a:pPr>
+            <a:r>
+              <a:rPr lang="en-US" sz="1350" dirty="0">
+                <a:solidFill>
+                  <a:srgbClr val="FFFFFF"/>
+                </a:solidFill>
+                <a:latin typeface="프리젠테이션 7 Bold" pitchFamily="34" charset="0"/>
+                <a:ea typeface="프리젠테이션 7 Bold" pitchFamily="34" charset="-122"/>
+                <a:cs typeface="프리젠테이션 7 Bold" pitchFamily="34" charset="-120"/>
+              </a:rPr>
+              <a:t>Early collision-risk alerts</a:t>
+            </a:r>
+            <a:endParaRPr lang="en-US" sz="1350" dirty="0"/>
+          </a:p>
+        </p:txBody>
+      </p:sp>
+      <p:sp>
+        <p:nvSpPr>
+          <p:cNvPr id="23" name="app d 2"/>
+          <p:cNvSpPr txBox="1"/>
+          <p:nvPr/>
+        </p:nvSpPr>
+        <p:spPr>
+          <a:xfrm>
+            <a:off x="3630168" y="3813048"/>
+            <a:ext cx="2130552" cy="594360"/>
+          </a:xfrm>
+          <a:prstGeom prst="rect">
+            <a:avLst/>
+          </a:prstGeom>
+          <a:noFill/>
+          <a:ln/>
+        </p:spPr>
+        <p:txBody>
+          <a:bodyPr wrap="square" lIns="0" tIns="0" rIns="0" bIns="0" rtlCol="0" anchor="t"/>
+          <a:lstStyle/>
+          <a:p>
+            <a:pPr marL="0" indent="0">
+              <a:buNone/>
+            </a:pPr>
+            <a:r>
+              <a:rPr lang="en-US" sz="1150" dirty="0">
+                <a:solidFill>
+                  <a:srgbClr val="B8BEC8"/>
+                </a:solidFill>
+                <a:latin typeface="프리젠테이션 4 Regular" pitchFamily="34" charset="0"/>
+                <a:ea typeface="프리젠테이션 4 Regular" pitchFamily="34" charset="-122"/>
+                <a:cs typeface="프리젠테이션 4 Regular" pitchFamily="34" charset="-120"/>
+              </a:rPr>
+              <a:t>Zones where cargo and tanker lanes overlap become candidates for warnings.</a:t>
+            </a:r>
+            <a:endParaRPr lang="en-US" sz="1150" dirty="0"/>
+          </a:p>
+        </p:txBody>
+      </p:sp>
+      <p:sp>
+        <p:nvSpPr>
+          <p:cNvPr id="24" name="app card 3"/>
+          <p:cNvSpPr/>
+          <p:nvPr/>
+        </p:nvSpPr>
+        <p:spPr>
+          <a:xfrm>
+            <a:off x="6172200" y="3081528"/>
+            <a:ext cx="2514600" cy="1417320"/>
+          </a:xfrm>
+          <a:prstGeom prst="roundRect">
+            <a:avLst>
+              <a:gd name="adj" fmla="val 14194"/>
+            </a:avLst>
+          </a:prstGeom>
+          <a:solidFill>
+            <a:srgbClr val="1B1D22"/>
+          </a:solidFill>
+          <a:ln/>
+        </p:spPr>
+      </p:sp>
+      <p:sp>
+        <p:nvSpPr>
+          <p:cNvPr id="25" name="app icon 3 bg"/>
+          <p:cNvSpPr/>
+          <p:nvPr/>
+        </p:nvSpPr>
+        <p:spPr>
+          <a:xfrm>
+            <a:off x="6373368" y="3282696"/>
+            <a:ext cx="420624" cy="420624"/>
+          </a:xfrm>
+          <a:prstGeom prst="ellipse">
+            <a:avLst/>
+          </a:prstGeom>
+          <a:solidFill>
+            <a:srgbClr val="26292F"/>
+          </a:solidFill>
+          <a:ln/>
+        </p:spPr>
+      </p:sp>
+      <p:pic>
+        <p:nvPicPr>
+          <p:cNvPr id="26" name="app icon 3" descr="preencoded.png"/>
+          <p:cNvPicPr>
+            <a:picLocks noChangeAspect="1"/>
+          </p:cNvPicPr>
+          <p:nvPr/>
+        </p:nvPicPr>
+        <p:blipFill>
+          <a:blip r:embed="rId6"/>
+          <a:stretch>
+            <a:fillRect/>
+          </a:stretch>
+        </p:blipFill>
+        <p:spPr>
+          <a:xfrm>
+            <a:off x="6474318" y="3383646"/>
+            <a:ext cx="218724" cy="218724"/>
+          </a:xfrm>
+          <a:prstGeom prst="rect">
+            <a:avLst/>
+          </a:prstGeom>
+        </p:spPr>
+      </p:pic>
+      <p:sp>
+        <p:nvSpPr>
+          <p:cNvPr id="27" name="app h 3"/>
+          <p:cNvSpPr txBox="1"/>
+          <p:nvPr/>
+        </p:nvSpPr>
+        <p:spPr>
+          <a:xfrm>
+            <a:off x="6922008" y="3282696"/>
+            <a:ext cx="1645920" cy="420624"/>
+          </a:xfrm>
+          <a:prstGeom prst="rect">
+            <a:avLst/>
+          </a:prstGeom>
+          <a:noFill/>
+          <a:ln/>
+        </p:spPr>
+        <p:txBody>
+          <a:bodyPr wrap="square" lIns="0" tIns="0" rIns="0" bIns="0" rtlCol="0" anchor="ctr"/>
+          <a:lstStyle/>
+          <a:p>
+            <a:pPr marL="0" indent="0">
+              <a:buNone/>
+            </a:pPr>
+            <a:r>
+              <a:rPr lang="en-US" sz="1350" dirty="0">
+                <a:solidFill>
+                  <a:srgbClr val="FFFFFF"/>
+                </a:solidFill>
+                <a:latin typeface="프리젠테이션 7 Bold" pitchFamily="34" charset="0"/>
+                <a:ea typeface="프리젠테이션 7 Bold" pitchFamily="34" charset="-122"/>
+                <a:cs typeface="프리젠테이션 7 Bold" pitchFamily="34" charset="-120"/>
+              </a:rPr>
+              <a:t>Channel maintenance</a:t>
+            </a:r>
+            <a:endParaRPr lang="en-US" sz="1350" dirty="0"/>
+          </a:p>
+        </p:txBody>
+      </p:sp>
+      <p:sp>
+        <p:nvSpPr>
+          <p:cNvPr id="28" name="app d 3"/>
+          <p:cNvSpPr txBox="1"/>
+          <p:nvPr/>
+        </p:nvSpPr>
+        <p:spPr>
+          <a:xfrm>
+            <a:off x="6373368" y="3813048"/>
+            <a:ext cx="2130552" cy="594360"/>
+          </a:xfrm>
+          <a:prstGeom prst="rect">
+            <a:avLst/>
+          </a:prstGeom>
+          <a:noFill/>
+          <a:ln/>
+        </p:spPr>
+        <p:txBody>
+          <a:bodyPr wrap="square" lIns="0" tIns="0" rIns="0" bIns="0" rtlCol="0" anchor="t"/>
+          <a:lstStyle/>
+          <a:p>
+            <a:pPr marL="0" indent="0">
+              <a:buNone/>
+            </a:pPr>
+            <a:r>
+              <a:rPr lang="en-US" sz="1150" dirty="0">
+                <a:solidFill>
+                  <a:srgbClr val="B8BEC8"/>
+                </a:solidFill>
+                <a:latin typeface="프리젠테이션 4 Regular" pitchFamily="34" charset="0"/>
+                <a:ea typeface="프리젠테이션 4 Regular" pitchFamily="34" charset="-122"/>
+                <a:cs typeface="프리젠테이션 4 Regular" pitchFamily="34" charset="-120"/>
+              </a:rPr>
               <a:t>Prioritize inspection, dredging and aids-to-navigation upkeep on busy lanes.</a:t>
             </a:r>
             <a:endParaRPr lang="en-US" sz="1150" dirty="0"/>
@@ -5055,7 +4820,7 @@
           <a:bodyPr wrap="square" lIns="0" tIns="0" rIns="0" bIns="0" rtlCol="0" anchor="ctr"/>
           <a:lstStyle/>
           <a:p>
-            <a:pPr indent="0" marL="0">
+            <a:pPr marL="0" indent="0">
               <a:buNone/>
             </a:pPr>
             <a:r>
@@ -5101,9 +4866,11 @@
       <p:sp>
         <p:nvSpPr>
           <p:cNvPr id="2" name="Text 0"/>
-          <p:cNvSpPr/>
+          <p:cNvSpPr>
+            <a:spLocks noGrp="1"/>
+          </p:cNvSpPr>
           <p:nvPr>
-            <p:ph idx="100" type="body" hasCustomPrompt="1"/>
+            <p:ph type="body" idx="100" hasCustomPrompt="1"/>
           </p:nvPr>
         </p:nvSpPr>
         <p:spPr>
@@ -5121,11 +4888,11 @@
           <a:bodyPr wrap="square" lIns="0" tIns="0" rIns="0" bIns="0" rtlCol="0"/>
           <a:lstStyle/>
           <a:p>
-            <a:pPr indent="0" marL="0">
-              <a:buNone/>
-            </a:pPr>
-            <a:r>
-              <a:rPr lang="en-US" sz="1100" spc="150" kern="0" dirty="0">
+            <a:pPr marL="0" indent="0">
+              <a:buNone/>
+            </a:pPr>
+            <a:r>
+              <a:rPr lang="en-US" sz="1100" kern="0" spc="150" dirty="0">
                 <a:solidFill>
                   <a:schemeClr val="accent1"/>
                 </a:solidFill>
@@ -5142,9 +4909,11 @@
       <p:sp>
         <p:nvSpPr>
           <p:cNvPr id="3" name="Text 0"/>
-          <p:cNvSpPr/>
+          <p:cNvSpPr>
+            <a:spLocks noGrp="1"/>
+          </p:cNvSpPr>
           <p:nvPr>
-            <p:ph idx="101" type="title" hasCustomPrompt="1"/>
+            <p:ph type="title" idx="101" hasCustomPrompt="1"/>
           </p:nvPr>
         </p:nvSpPr>
         <p:spPr>
@@ -5162,7 +4931,7 @@
           <a:bodyPr wrap="square" lIns="0" tIns="0" rIns="0" bIns="0" rtlCol="0" anchor="t"/>
           <a:lstStyle/>
           <a:p>
-            <a:pPr algn="l" indent="0" marL="0">
+            <a:pPr marL="0" indent="0" algn="l">
               <a:buNone/>
             </a:pPr>
             <a:r>
@@ -5225,7 +4994,7 @@
           <a:bodyPr wrap="square" lIns="0" tIns="0" rIns="0" bIns="0" rtlCol="0" anchor="ctr"/>
           <a:lstStyle/>
           <a:p>
-            <a:pPr algn="ctr" indent="0" marL="0">
+            <a:pPr marL="0" indent="0" algn="ctr">
               <a:buNone/>
             </a:pPr>
             <a:r>
@@ -5264,7 +5033,7 @@
           <a:bodyPr wrap="square" lIns="0" tIns="0" rIns="0" bIns="0" rtlCol="0" anchor="ctr"/>
           <a:lstStyle/>
           <a:p>
-            <a:pPr indent="0" marL="0">
+            <a:pPr marL="0" indent="0">
               <a:buNone/>
             </a:pPr>
             <a:r>
@@ -5303,7 +5072,7 @@
           <a:bodyPr wrap="square" lIns="0" tIns="0" rIns="0" bIns="0" rtlCol="0" anchor="ctr"/>
           <a:lstStyle/>
           <a:p>
-            <a:pPr indent="0" marL="0">
+            <a:pPr marL="0" indent="0">
               <a:buNone/>
             </a:pPr>
             <a:r>
@@ -5342,7 +5111,7 @@
           <a:bodyPr wrap="square" lIns="0" tIns="0" rIns="0" bIns="0" rtlCol="0" anchor="t"/>
           <a:lstStyle/>
           <a:p>
-            <a:pPr indent="0" marL="0">
+            <a:pPr marL="0" indent="0">
               <a:buNone/>
             </a:pPr>
             <a:r>
@@ -5385,7 +5154,7 @@
           <a:bodyPr wrap="square" lIns="0" tIns="0" rIns="0" bIns="0" rtlCol="0" anchor="ctr"/>
           <a:lstStyle/>
           <a:p>
-            <a:pPr algn="ctr" indent="0" marL="0">
+            <a:pPr marL="0" indent="0" algn="ctr">
               <a:buNone/>
             </a:pPr>
             <a:r>
@@ -5448,7 +5217,7 @@
           <a:bodyPr wrap="square" lIns="0" tIns="0" rIns="0" bIns="0" rtlCol="0" anchor="ctr"/>
           <a:lstStyle/>
           <a:p>
-            <a:pPr algn="ctr" indent="0" marL="0">
+            <a:pPr marL="0" indent="0" algn="ctr">
               <a:buNone/>
             </a:pPr>
             <a:r>
@@ -5487,7 +5256,7 @@
           <a:bodyPr wrap="square" lIns="0" tIns="0" rIns="0" bIns="0" rtlCol="0" anchor="ctr"/>
           <a:lstStyle/>
           <a:p>
-            <a:pPr indent="0" marL="0">
+            <a:pPr marL="0" indent="0">
               <a:buNone/>
             </a:pPr>
             <a:r>
@@ -5526,7 +5295,7 @@
           <a:bodyPr wrap="square" lIns="0" tIns="0" rIns="0" bIns="0" rtlCol="0" anchor="ctr"/>
           <a:lstStyle/>
           <a:p>
-            <a:pPr indent="0" marL="0">
+            <a:pPr marL="0" indent="0">
               <a:buNone/>
             </a:pPr>
             <a:r>
@@ -5565,7 +5334,7 @@
           <a:bodyPr wrap="square" lIns="0" tIns="0" rIns="0" bIns="0" rtlCol="0" anchor="t"/>
           <a:lstStyle/>
           <a:p>
-            <a:pPr indent="0" marL="0">
+            <a:pPr marL="0" indent="0">
               <a:buNone/>
             </a:pPr>
             <a:r>
@@ -5608,7 +5377,7 @@
           <a:bodyPr wrap="square" lIns="0" tIns="0" rIns="0" bIns="0" rtlCol="0" anchor="ctr"/>
           <a:lstStyle/>
           <a:p>
-            <a:pPr algn="ctr" indent="0" marL="0">
+            <a:pPr marL="0" indent="0" algn="ctr">
               <a:buNone/>
             </a:pPr>
             <a:r>
@@ -5650,14 +5419,14 @@
       </p:sp>
       <p:pic>
         <p:nvPicPr>
-          <p:cNvPr id="17" name="photo 2" descr="Photo of 백지원">    </p:cNvPr>
+          <p:cNvPr id="17" name="photo 2" descr="Photo of 백지원"/>
           <p:cNvPicPr>
             <a:picLocks noChangeAspect="1"/>
           </p:cNvPicPr>
           <p:nvPr/>
         </p:nvPicPr>
         <p:blipFill>
-          <a:blip r:embed="rId1"/>
+          <a:blip r:embed="rId3"/>
           <a:stretch>
             <a:fillRect/>
           </a:stretch>
@@ -5693,7 +5462,7 @@
           <a:bodyPr wrap="square" lIns="0" tIns="0" rIns="0" bIns="0" rtlCol="0" anchor="ctr"/>
           <a:lstStyle/>
           <a:p>
-            <a:pPr indent="0" marL="0">
+            <a:pPr marL="0" indent="0">
               <a:buNone/>
             </a:pPr>
             <a:r>
@@ -5732,7 +5501,7 @@
           <a:bodyPr wrap="square" lIns="0" tIns="0" rIns="0" bIns="0" rtlCol="0" anchor="ctr"/>
           <a:lstStyle/>
           <a:p>
-            <a:pPr indent="0" marL="0">
+            <a:pPr marL="0" indent="0">
               <a:buNone/>
             </a:pPr>
             <a:r>
@@ -5771,7 +5540,7 @@
           <a:bodyPr wrap="square" lIns="0" tIns="0" rIns="0" bIns="0" rtlCol="0" anchor="t"/>
           <a:lstStyle/>
           <a:p>
-            <a:pPr indent="0" marL="0">
+            <a:pPr marL="0" indent="0">
               <a:buNone/>
             </a:pPr>
             <a:r>
@@ -5814,7 +5583,7 @@
           <a:bodyPr wrap="square" lIns="0" tIns="0" rIns="0" bIns="0" rtlCol="0" anchor="ctr"/>
           <a:lstStyle/>
           <a:p>
-            <a:pPr algn="ctr" indent="0" marL="0">
+            <a:pPr marL="0" indent="0" algn="ctr">
               <a:buNone/>
             </a:pPr>
             <a:r>
@@ -5877,7 +5646,7 @@
           <a:bodyPr wrap="square" lIns="0" tIns="0" rIns="0" bIns="0" rtlCol="0" anchor="ctr"/>
           <a:lstStyle/>
           <a:p>
-            <a:pPr algn="ctr" indent="0" marL="0">
+            <a:pPr marL="0" indent="0" algn="ctr">
               <a:buNone/>
             </a:pPr>
             <a:r>
@@ -5916,7 +5685,7 @@
           <a:bodyPr wrap="square" lIns="0" tIns="0" rIns="0" bIns="0" rtlCol="0" anchor="ctr"/>
           <a:lstStyle/>
           <a:p>
-            <a:pPr indent="0" marL="0">
+            <a:pPr marL="0" indent="0">
               <a:buNone/>
             </a:pPr>
             <a:r>
@@ -5955,7 +5724,7 @@
           <a:bodyPr wrap="square" lIns="0" tIns="0" rIns="0" bIns="0" rtlCol="0" anchor="ctr"/>
           <a:lstStyle/>
           <a:p>
-            <a:pPr indent="0" marL="0">
+            <a:pPr marL="0" indent="0">
               <a:buNone/>
             </a:pPr>
             <a:r>
@@ -5994,7 +5763,7 @@
           <a:bodyPr wrap="square" lIns="0" tIns="0" rIns="0" bIns="0" rtlCol="0" anchor="t"/>
           <a:lstStyle/>
           <a:p>
-            <a:pPr indent="0" marL="0">
+            <a:pPr marL="0" indent="0">
               <a:buNone/>
             </a:pPr>
             <a:r>
@@ -6037,7 +5806,7 @@
           <a:bodyPr wrap="square" lIns="0" tIns="0" rIns="0" bIns="0" rtlCol="0" anchor="ctr"/>
           <a:lstStyle/>
           <a:p>
-            <a:pPr algn="ctr" indent="0" marL="0">
+            <a:pPr marL="0" indent="0" algn="ctr">
               <a:buNone/>
             </a:pPr>
             <a:r>
@@ -6057,7 +5826,7 @@
       </p:sp>
       <p:sp>
         <p:nvSpPr>
-          <p:cNvPr id="25" name="Slide Number Placeholder 0"/>
+          <p:cNvPr id="28" name="Slide Number Placeholder 0"/>
           <p:cNvSpPr>
             <a:spLocks noGrp="1"/>
           </p:cNvSpPr>
@@ -6075,7 +5844,7 @@
           </a:prstGeom>
           <a:extLst>
             <a:ext uri="{C572A759-6A51-4108-AA02-DFA0A04FC94B}">
-              <ma14:wrappingTextBoxFlag xmlns:ma14="http://schemas.microsoft.com/office/mac/drawingml/2011/main" val="0"/>
+              <ma14:wrappingTextBoxFlag xmlns:ma14="http://schemas.microsoft.com/office/mac/drawingml/2011/main" xmlns="" val="0"/>
             </a:ext>
           </a:extLst>
         </p:spPr>
@@ -6096,7 +5865,7 @@
           <a:p>
             <a:pPr algn="r"/>
             <a:fld id="{F7021451-1387-4CA6-816F-3879F97B5CBC}" type="slidenum">
-              <a:rPr b="0" lang="en-US"/>
+              <a:rPr lang="en-US" b="0"/>
               <a:t>2</a:t>
             </a:fld>
             <a:endParaRPr lang="en-US"/>
@@ -6131,9 +5900,11 @@
       <p:sp>
         <p:nvSpPr>
           <p:cNvPr id="2" name="Text 0"/>
-          <p:cNvSpPr/>
+          <p:cNvSpPr>
+            <a:spLocks noGrp="1"/>
+          </p:cNvSpPr>
           <p:nvPr>
-            <p:ph idx="100" type="body" hasCustomPrompt="1"/>
+            <p:ph type="body" idx="100" hasCustomPrompt="1"/>
           </p:nvPr>
         </p:nvSpPr>
         <p:spPr>
@@ -6151,11 +5922,11 @@
           <a:bodyPr wrap="square" lIns="0" tIns="0" rIns="0" bIns="0" rtlCol="0"/>
           <a:lstStyle/>
           <a:p>
-            <a:pPr indent="0" marL="0">
-              <a:buNone/>
-            </a:pPr>
-            <a:r>
-              <a:rPr lang="en-US" sz="1100" spc="150" kern="0" dirty="0">
+            <a:pPr marL="0" indent="0">
+              <a:buNone/>
+            </a:pPr>
+            <a:r>
+              <a:rPr lang="en-US" sz="1100" kern="0" spc="150" dirty="0">
                 <a:solidFill>
                   <a:schemeClr val="accent1"/>
                 </a:solidFill>
@@ -6172,9 +5943,11 @@
       <p:sp>
         <p:nvSpPr>
           <p:cNvPr id="3" name="Text 0"/>
-          <p:cNvSpPr/>
+          <p:cNvSpPr>
+            <a:spLocks noGrp="1"/>
+          </p:cNvSpPr>
           <p:nvPr>
-            <p:ph idx="101" type="title" hasCustomPrompt="1"/>
+            <p:ph type="title" idx="101" hasCustomPrompt="1"/>
           </p:nvPr>
         </p:nvSpPr>
         <p:spPr>
@@ -6192,7 +5965,7 @@
           <a:bodyPr wrap="square" lIns="0" tIns="0" rIns="0" bIns="0" rtlCol="0" anchor="t"/>
           <a:lstStyle/>
           <a:p>
-            <a:pPr algn="l" indent="0" marL="0">
+            <a:pPr marL="0" indent="0" algn="l">
               <a:buNone/>
             </a:pPr>
             <a:r>
@@ -6232,251 +6005,7 @@
       </p:sp>
       <p:pic>
         <p:nvPicPr>
-          <p:cNvPr id="5" name="reason icon 0" descr="preencoded.png">    </p:cNvPr>
-          <p:cNvPicPr>
-            <a:picLocks noChangeAspect="1"/>
-          </p:cNvPicPr>
-          <p:nvPr/>
-        </p:nvPicPr>
-        <p:blipFill>
-          <a:blip r:embed="rId1"/>
-          <a:stretch>
-            <a:fillRect/>
-          </a:stretch>
-        </p:blipFill>
-        <p:spPr>
-          <a:xfrm>
-            <a:off x="593263" y="1599103"/>
-            <a:ext cx="294803" cy="294803"/>
-          </a:xfrm>
-          <a:prstGeom prst="rect">
-            <a:avLst/>
-          </a:prstGeom>
-        </p:spPr>
-      </p:pic>
-      <p:sp>
-        <p:nvSpPr>
-          <p:cNvPr id="6" name="reason h 0"/>
-          <p:cNvSpPr txBox="1"/>
-          <p:nvPr/>
-        </p:nvSpPr>
-        <p:spPr>
-          <a:xfrm>
-            <a:off x="1188720" y="1444752"/>
-            <a:ext cx="3566160" cy="310896"/>
-          </a:xfrm>
-          <a:prstGeom prst="rect">
-            <a:avLst/>
-          </a:prstGeom>
-          <a:noFill/>
-          <a:ln/>
-        </p:spPr>
-        <p:txBody>
-          <a:bodyPr wrap="square" lIns="0" tIns="0" rIns="0" bIns="0" rtlCol="0" anchor="ctr"/>
-          <a:lstStyle/>
-          <a:p>
-            <a:pPr indent="0" marL="0">
-              <a:buNone/>
-            </a:pPr>
-            <a:r>
-              <a:rPr lang="en-US" sz="1600" dirty="0">
-                <a:solidFill>
-                  <a:srgbClr val="0A0B0D"/>
-                </a:solidFill>
-                <a:latin typeface="프리젠테이션 7 Bold" pitchFamily="34" charset="0"/>
-                <a:ea typeface="프리젠테이션 7 Bold" pitchFamily="34" charset="-122"/>
-                <a:cs typeface="프리젠테이션 7 Bold" pitchFamily="34" charset="-120"/>
-              </a:rPr>
-              <a:t>Traffic converges at a chokepoint</a:t>
-            </a:r>
-            <a:endParaRPr lang="en-US" sz="1600" dirty="0"/>
-          </a:p>
-        </p:txBody>
-      </p:sp>
-      <p:sp>
-        <p:nvSpPr>
-          <p:cNvPr id="7" name="reason d 0"/>
-          <p:cNvSpPr txBox="1"/>
-          <p:nvPr/>
-        </p:nvSpPr>
-        <p:spPr>
-          <a:xfrm>
-            <a:off x="1188720" y="1764792"/>
-            <a:ext cx="3566160" cy="548640"/>
-          </a:xfrm>
-          <a:prstGeom prst="rect">
-            <a:avLst/>
-          </a:prstGeom>
-          <a:noFill/>
-          <a:ln/>
-        </p:spPr>
-        <p:txBody>
-          <a:bodyPr wrap="square" lIns="0" tIns="0" rIns="0" bIns="0" rtlCol="0" anchor="t"/>
-          <a:lstStyle/>
-          <a:p>
-            <a:pPr indent="0" marL="0">
-              <a:buNone/>
-            </a:pPr>
-            <a:r>
-              <a:rPr lang="en-US" sz="1300" dirty="0">
-                <a:solidFill>
-                  <a:srgbClr val="5B616E"/>
-                </a:solidFill>
-                <a:latin typeface="프리젠테이션 4 Regular" pitchFamily="34" charset="0"/>
-                <a:ea typeface="프리젠테이션 4 Regular" pitchFamily="34" charset="-122"/>
-                <a:cs typeface="프리젠테이션 4 Regular" pitchFamily="34" charset="-120"/>
-              </a:rPr>
-              <a:t>Cargo ships, tankers, tugs and naval vessels all squeeze into the same approach lanes.</a:t>
-            </a:r>
-            <a:endParaRPr lang="en-US" sz="1300" dirty="0"/>
-          </a:p>
-        </p:txBody>
-      </p:sp>
-      <p:sp>
-        <p:nvSpPr>
-          <p:cNvPr id="8" name="reason icon 1 bg"/>
-          <p:cNvSpPr/>
-          <p:nvPr/>
-        </p:nvSpPr>
-        <p:spPr>
-          <a:xfrm>
-            <a:off x="457200" y="2487168"/>
-            <a:ext cx="566928" cy="566928"/>
-          </a:xfrm>
-          <a:prstGeom prst="ellipse">
-            <a:avLst/>
-          </a:prstGeom>
-          <a:solidFill>
-            <a:srgbClr val="EEF0F3"/>
-          </a:solidFill>
-          <a:ln/>
-        </p:spPr>
-      </p:sp>
-      <p:pic>
-        <p:nvPicPr>
-          <p:cNvPr id="9" name="reason icon 1" descr="preencoded.png">    </p:cNvPr>
-          <p:cNvPicPr>
-            <a:picLocks noChangeAspect="1"/>
-          </p:cNvPicPr>
-          <p:nvPr/>
-        </p:nvPicPr>
-        <p:blipFill>
-          <a:blip r:embed="rId2"/>
-          <a:stretch>
-            <a:fillRect/>
-          </a:stretch>
-        </p:blipFill>
-        <p:spPr>
-          <a:xfrm>
-            <a:off x="593263" y="2623231"/>
-            <a:ext cx="294803" cy="294803"/>
-          </a:xfrm>
-          <a:prstGeom prst="rect">
-            <a:avLst/>
-          </a:prstGeom>
-        </p:spPr>
-      </p:pic>
-      <p:sp>
-        <p:nvSpPr>
-          <p:cNvPr id="10" name="reason h 1"/>
-          <p:cNvSpPr txBox="1"/>
-          <p:nvPr/>
-        </p:nvSpPr>
-        <p:spPr>
-          <a:xfrm>
-            <a:off x="1188720" y="2468880"/>
-            <a:ext cx="3566160" cy="310896"/>
-          </a:xfrm>
-          <a:prstGeom prst="rect">
-            <a:avLst/>
-          </a:prstGeom>
-          <a:noFill/>
-          <a:ln/>
-        </p:spPr>
-        <p:txBody>
-          <a:bodyPr wrap="square" lIns="0" tIns="0" rIns="0" bIns="0" rtlCol="0" anchor="ctr"/>
-          <a:lstStyle/>
-          <a:p>
-            <a:pPr indent="0" marL="0">
-              <a:buNone/>
-            </a:pPr>
-            <a:r>
-              <a:rPr lang="en-US" sz="1600" dirty="0">
-                <a:solidFill>
-                  <a:srgbClr val="0A0B0D"/>
-                </a:solidFill>
-                <a:latin typeface="프리젠테이션 7 Bold" pitchFamily="34" charset="0"/>
-                <a:ea typeface="프리젠테이션 7 Bold" pitchFamily="34" charset="-122"/>
-                <a:cs typeface="프리젠테이션 7 Bold" pitchFamily="34" charset="-120"/>
-              </a:rPr>
-              <a:t>Monitoring resources are limited</a:t>
-            </a:r>
-            <a:endParaRPr lang="en-US" sz="1600" dirty="0"/>
-          </a:p>
-        </p:txBody>
-      </p:sp>
-      <p:sp>
-        <p:nvSpPr>
-          <p:cNvPr id="11" name="reason d 1"/>
-          <p:cNvSpPr txBox="1"/>
-          <p:nvPr/>
-        </p:nvSpPr>
-        <p:spPr>
-          <a:xfrm>
-            <a:off x="1188720" y="2788920"/>
-            <a:ext cx="3566160" cy="548640"/>
-          </a:xfrm>
-          <a:prstGeom prst="rect">
-            <a:avLst/>
-          </a:prstGeom>
-          <a:noFill/>
-          <a:ln/>
-        </p:spPr>
-        <p:txBody>
-          <a:bodyPr wrap="square" lIns="0" tIns="0" rIns="0" bIns="0" rtlCol="0" anchor="t"/>
-          <a:lstStyle/>
-          <a:p>
-            <a:pPr indent="0" marL="0">
-              <a:buNone/>
-            </a:pPr>
-            <a:r>
-              <a:rPr lang="en-US" sz="1300" dirty="0">
-                <a:solidFill>
-                  <a:srgbClr val="5B616E"/>
-                </a:solidFill>
-                <a:latin typeface="프리젠테이션 4 Regular" pitchFamily="34" charset="0"/>
-                <a:ea typeface="프리젠테이션 4 Regular" pitchFamily="34" charset="-122"/>
-                <a:cs typeface="프리젠테이션 4 Regular" pitchFamily="34" charset="-120"/>
-              </a:rPr>
-              <a:t>Patrol and VTS attention must go where — and when — traffic actually concentrates.</a:t>
-            </a:r>
-            <a:endParaRPr lang="en-US" sz="1300" dirty="0"/>
-          </a:p>
-        </p:txBody>
-      </p:sp>
-      <p:sp>
-        <p:nvSpPr>
-          <p:cNvPr id="12" name="reason icon 2 bg"/>
-          <p:cNvSpPr/>
-          <p:nvPr/>
-        </p:nvSpPr>
-        <p:spPr>
-          <a:xfrm>
-            <a:off x="457200" y="3511296"/>
-            <a:ext cx="566928" cy="566928"/>
-          </a:xfrm>
-          <a:prstGeom prst="ellipse">
-            <a:avLst/>
-          </a:prstGeom>
-          <a:solidFill>
-            <a:srgbClr val="EEF0F3"/>
-          </a:solidFill>
-          <a:ln/>
-        </p:spPr>
-      </p:sp>
-      <p:pic>
-        <p:nvPicPr>
-          <p:cNvPr id="13" name="reason icon 2" descr="preencoded.png">    </p:cNvPr>
+          <p:cNvPr id="5" name="reason icon 0" descr="preencoded.png"/>
           <p:cNvPicPr>
             <a:picLocks noChangeAspect="1"/>
           </p:cNvPicPr>
@@ -6490,7 +6019,7 @@
         </p:blipFill>
         <p:spPr>
           <a:xfrm>
-            <a:off x="593263" y="3647359"/>
+            <a:off x="593263" y="1599103"/>
             <a:ext cx="294803" cy="294803"/>
           </a:xfrm>
           <a:prstGeom prst="rect">
@@ -6500,13 +6029,13 @@
       </p:pic>
       <p:sp>
         <p:nvSpPr>
-          <p:cNvPr id="14" name="reason h 2"/>
-          <p:cNvSpPr txBox="1"/>
-          <p:nvPr/>
-        </p:nvSpPr>
-        <p:spPr>
-          <a:xfrm>
-            <a:off x="1188720" y="3493008"/>
+          <p:cNvPr id="6" name="reason h 0"/>
+          <p:cNvSpPr txBox="1"/>
+          <p:nvPr/>
+        </p:nvSpPr>
+        <p:spPr>
+          <a:xfrm>
+            <a:off x="1188720" y="1444752"/>
             <a:ext cx="3566160" cy="310896"/>
           </a:xfrm>
           <a:prstGeom prst="rect">
@@ -6519,7 +6048,7 @@
           <a:bodyPr wrap="square" lIns="0" tIns="0" rIns="0" bIns="0" rtlCol="0" anchor="ctr"/>
           <a:lstStyle/>
           <a:p>
-            <a:pPr indent="0" marL="0">
+            <a:pPr marL="0" indent="0">
               <a:buNone/>
             </a:pPr>
             <a:r>
@@ -6531,6 +6060,250 @@
                 <a:ea typeface="프리젠테이션 7 Bold" pitchFamily="34" charset="-122"/>
                 <a:cs typeface="프리젠테이션 7 Bold" pitchFamily="34" charset="-120"/>
               </a:rPr>
+              <a:t>Traffic converges at a chokepoint</a:t>
+            </a:r>
+            <a:endParaRPr lang="en-US" sz="1600" dirty="0"/>
+          </a:p>
+        </p:txBody>
+      </p:sp>
+      <p:sp>
+        <p:nvSpPr>
+          <p:cNvPr id="7" name="reason d 0"/>
+          <p:cNvSpPr txBox="1"/>
+          <p:nvPr/>
+        </p:nvSpPr>
+        <p:spPr>
+          <a:xfrm>
+            <a:off x="1188720" y="1764792"/>
+            <a:ext cx="3566160" cy="548640"/>
+          </a:xfrm>
+          <a:prstGeom prst="rect">
+            <a:avLst/>
+          </a:prstGeom>
+          <a:noFill/>
+          <a:ln/>
+        </p:spPr>
+        <p:txBody>
+          <a:bodyPr wrap="square" lIns="0" tIns="0" rIns="0" bIns="0" rtlCol="0" anchor="t"/>
+          <a:lstStyle/>
+          <a:p>
+            <a:pPr marL="0" indent="0">
+              <a:buNone/>
+            </a:pPr>
+            <a:r>
+              <a:rPr lang="en-US" sz="1300" dirty="0">
+                <a:solidFill>
+                  <a:srgbClr val="5B616E"/>
+                </a:solidFill>
+                <a:latin typeface="프리젠테이션 4 Regular" pitchFamily="34" charset="0"/>
+                <a:ea typeface="프리젠테이션 4 Regular" pitchFamily="34" charset="-122"/>
+                <a:cs typeface="프리젠테이션 4 Regular" pitchFamily="34" charset="-120"/>
+              </a:rPr>
+              <a:t>Cargo ships, tankers, tugs and naval vessels all squeeze into the same approach lanes.</a:t>
+            </a:r>
+            <a:endParaRPr lang="en-US" sz="1300" dirty="0"/>
+          </a:p>
+        </p:txBody>
+      </p:sp>
+      <p:sp>
+        <p:nvSpPr>
+          <p:cNvPr id="8" name="reason icon 1 bg"/>
+          <p:cNvSpPr/>
+          <p:nvPr/>
+        </p:nvSpPr>
+        <p:spPr>
+          <a:xfrm>
+            <a:off x="457200" y="2487168"/>
+            <a:ext cx="566928" cy="566928"/>
+          </a:xfrm>
+          <a:prstGeom prst="ellipse">
+            <a:avLst/>
+          </a:prstGeom>
+          <a:solidFill>
+            <a:srgbClr val="EEF0F3"/>
+          </a:solidFill>
+          <a:ln/>
+        </p:spPr>
+      </p:sp>
+      <p:pic>
+        <p:nvPicPr>
+          <p:cNvPr id="9" name="reason icon 1" descr="preencoded.png"/>
+          <p:cNvPicPr>
+            <a:picLocks noChangeAspect="1"/>
+          </p:cNvPicPr>
+          <p:nvPr/>
+        </p:nvPicPr>
+        <p:blipFill>
+          <a:blip r:embed="rId4"/>
+          <a:stretch>
+            <a:fillRect/>
+          </a:stretch>
+        </p:blipFill>
+        <p:spPr>
+          <a:xfrm>
+            <a:off x="593263" y="2623231"/>
+            <a:ext cx="294803" cy="294803"/>
+          </a:xfrm>
+          <a:prstGeom prst="rect">
+            <a:avLst/>
+          </a:prstGeom>
+        </p:spPr>
+      </p:pic>
+      <p:sp>
+        <p:nvSpPr>
+          <p:cNvPr id="10" name="reason h 1"/>
+          <p:cNvSpPr txBox="1"/>
+          <p:nvPr/>
+        </p:nvSpPr>
+        <p:spPr>
+          <a:xfrm>
+            <a:off x="1188720" y="2468880"/>
+            <a:ext cx="3566160" cy="310896"/>
+          </a:xfrm>
+          <a:prstGeom prst="rect">
+            <a:avLst/>
+          </a:prstGeom>
+          <a:noFill/>
+          <a:ln/>
+        </p:spPr>
+        <p:txBody>
+          <a:bodyPr wrap="square" lIns="0" tIns="0" rIns="0" bIns="0" rtlCol="0" anchor="ctr"/>
+          <a:lstStyle/>
+          <a:p>
+            <a:pPr marL="0" indent="0">
+              <a:buNone/>
+            </a:pPr>
+            <a:r>
+              <a:rPr lang="en-US" sz="1600" dirty="0">
+                <a:solidFill>
+                  <a:srgbClr val="0A0B0D"/>
+                </a:solidFill>
+                <a:latin typeface="프리젠테이션 7 Bold" pitchFamily="34" charset="0"/>
+                <a:ea typeface="프리젠테이션 7 Bold" pitchFamily="34" charset="-122"/>
+                <a:cs typeface="프리젠테이션 7 Bold" pitchFamily="34" charset="-120"/>
+              </a:rPr>
+              <a:t>Monitoring resources are limited</a:t>
+            </a:r>
+            <a:endParaRPr lang="en-US" sz="1600" dirty="0"/>
+          </a:p>
+        </p:txBody>
+      </p:sp>
+      <p:sp>
+        <p:nvSpPr>
+          <p:cNvPr id="11" name="reason d 1"/>
+          <p:cNvSpPr txBox="1"/>
+          <p:nvPr/>
+        </p:nvSpPr>
+        <p:spPr>
+          <a:xfrm>
+            <a:off x="1188720" y="2788920"/>
+            <a:ext cx="3566160" cy="548640"/>
+          </a:xfrm>
+          <a:prstGeom prst="rect">
+            <a:avLst/>
+          </a:prstGeom>
+          <a:noFill/>
+          <a:ln/>
+        </p:spPr>
+        <p:txBody>
+          <a:bodyPr wrap="square" lIns="0" tIns="0" rIns="0" bIns="0" rtlCol="0" anchor="t"/>
+          <a:lstStyle/>
+          <a:p>
+            <a:pPr marL="0" indent="0">
+              <a:buNone/>
+            </a:pPr>
+            <a:r>
+              <a:rPr lang="en-US" sz="1300" dirty="0">
+                <a:solidFill>
+                  <a:srgbClr val="5B616E"/>
+                </a:solidFill>
+                <a:latin typeface="프리젠테이션 4 Regular" pitchFamily="34" charset="0"/>
+                <a:ea typeface="프리젠테이션 4 Regular" pitchFamily="34" charset="-122"/>
+                <a:cs typeface="프리젠테이션 4 Regular" pitchFamily="34" charset="-120"/>
+              </a:rPr>
+              <a:t>Patrol and VTS attention must go where — and when — traffic actually concentrates.</a:t>
+            </a:r>
+            <a:endParaRPr lang="en-US" sz="1300" dirty="0"/>
+          </a:p>
+        </p:txBody>
+      </p:sp>
+      <p:sp>
+        <p:nvSpPr>
+          <p:cNvPr id="12" name="reason icon 2 bg"/>
+          <p:cNvSpPr/>
+          <p:nvPr/>
+        </p:nvSpPr>
+        <p:spPr>
+          <a:xfrm>
+            <a:off x="457200" y="3511296"/>
+            <a:ext cx="566928" cy="566928"/>
+          </a:xfrm>
+          <a:prstGeom prst="ellipse">
+            <a:avLst/>
+          </a:prstGeom>
+          <a:solidFill>
+            <a:srgbClr val="EEF0F3"/>
+          </a:solidFill>
+          <a:ln/>
+        </p:spPr>
+      </p:sp>
+      <p:pic>
+        <p:nvPicPr>
+          <p:cNvPr id="13" name="reason icon 2" descr="preencoded.png"/>
+          <p:cNvPicPr>
+            <a:picLocks noChangeAspect="1"/>
+          </p:cNvPicPr>
+          <p:nvPr/>
+        </p:nvPicPr>
+        <p:blipFill>
+          <a:blip r:embed="rId5"/>
+          <a:stretch>
+            <a:fillRect/>
+          </a:stretch>
+        </p:blipFill>
+        <p:spPr>
+          <a:xfrm>
+            <a:off x="593263" y="3647359"/>
+            <a:ext cx="294803" cy="294803"/>
+          </a:xfrm>
+          <a:prstGeom prst="rect">
+            <a:avLst/>
+          </a:prstGeom>
+        </p:spPr>
+      </p:pic>
+      <p:sp>
+        <p:nvSpPr>
+          <p:cNvPr id="14" name="reason h 2"/>
+          <p:cNvSpPr txBox="1"/>
+          <p:nvPr/>
+        </p:nvSpPr>
+        <p:spPr>
+          <a:xfrm>
+            <a:off x="1188720" y="3493008"/>
+            <a:ext cx="3566160" cy="310896"/>
+          </a:xfrm>
+          <a:prstGeom prst="rect">
+            <a:avLst/>
+          </a:prstGeom>
+          <a:noFill/>
+          <a:ln/>
+        </p:spPr>
+        <p:txBody>
+          <a:bodyPr wrap="square" lIns="0" tIns="0" rIns="0" bIns="0" rtlCol="0" anchor="ctr"/>
+          <a:lstStyle/>
+          <a:p>
+            <a:pPr marL="0" indent="0">
+              <a:buNone/>
+            </a:pPr>
+            <a:r>
+              <a:rPr lang="en-US" sz="1600" dirty="0">
+                <a:solidFill>
+                  <a:srgbClr val="0A0B0D"/>
+                </a:solidFill>
+                <a:latin typeface="프리젠테이션 7 Bold" pitchFamily="34" charset="0"/>
+                <a:ea typeface="프리젠테이션 7 Bold" pitchFamily="34" charset="-122"/>
+                <a:cs typeface="프리젠테이션 7 Bold" pitchFamily="34" charset="-120"/>
+              </a:rPr>
               <a:t>AIS makes it measurable</a:t>
             </a:r>
             <a:endParaRPr lang="en-US" sz="1600" dirty="0"/>
@@ -6558,7 +6331,7 @@
           <a:bodyPr wrap="square" lIns="0" tIns="0" rIns="0" bIns="0" rtlCol="0" anchor="t"/>
           <a:lstStyle/>
           <a:p>
-            <a:pPr indent="0" marL="0">
+            <a:pPr marL="0" indent="0">
               <a:buNone/>
             </a:pPr>
             <a:r>
@@ -6619,11 +6392,11 @@
           <a:bodyPr wrap="square" lIns="0" tIns="0" rIns="0" bIns="0" rtlCol="0" anchor="ctr"/>
           <a:lstStyle/>
           <a:p>
-            <a:pPr indent="0" marL="0">
-              <a:buNone/>
-            </a:pPr>
-            <a:r>
-              <a:rPr lang="en-US" sz="1100" spc="150" kern="0" dirty="0">
+            <a:pPr marL="0" indent="0">
+              <a:buNone/>
+            </a:pPr>
+            <a:r>
+              <a:rPr lang="en-US" sz="1100" kern="0" spc="150" dirty="0">
                 <a:solidFill>
                   <a:srgbClr val="7FA6FF"/>
                 </a:solidFill>
@@ -6658,7 +6431,7 @@
           <a:bodyPr wrap="square" lIns="0" tIns="0" rIns="0" bIns="0" rtlCol="0" anchor="ctr"/>
           <a:lstStyle/>
           <a:p>
-            <a:pPr indent="0" marL="0">
+            <a:pPr marL="0" indent="0">
               <a:buNone/>
             </a:pPr>
             <a:r>
@@ -6697,7 +6470,7 @@
           <a:bodyPr wrap="square" lIns="0" tIns="0" rIns="0" bIns="0" rtlCol="0" anchor="t"/>
           <a:lstStyle/>
           <a:p>
-            <a:pPr indent="0" marL="0">
+            <a:pPr marL="0" indent="0">
               <a:buNone/>
             </a:pPr>
             <a:r>
@@ -6736,7 +6509,7 @@
           <a:bodyPr wrap="square" lIns="0" tIns="0" rIns="0" bIns="0" rtlCol="0" anchor="ctr"/>
           <a:lstStyle/>
           <a:p>
-            <a:pPr indent="0" marL="0">
+            <a:pPr marL="0" indent="0">
               <a:buNone/>
             </a:pPr>
             <a:r>
@@ -6775,7 +6548,7 @@
           <a:bodyPr wrap="square" lIns="0" tIns="0" rIns="0" bIns="0" rtlCol="0" anchor="t"/>
           <a:lstStyle/>
           <a:p>
-            <a:pPr indent="0" marL="0">
+            <a:pPr marL="0" indent="0">
               <a:buNone/>
             </a:pPr>
             <a:r>
@@ -6814,7 +6587,7 @@
           <a:bodyPr wrap="square" lIns="0" tIns="0" rIns="0" bIns="0" rtlCol="0" anchor="ctr"/>
           <a:lstStyle/>
           <a:p>
-            <a:pPr indent="0" marL="0">
+            <a:pPr marL="0" indent="0">
               <a:buNone/>
             </a:pPr>
             <a:r>
@@ -6853,7 +6626,7 @@
           <a:bodyPr wrap="square" lIns="0" tIns="0" rIns="0" bIns="0" rtlCol="0" anchor="t"/>
           <a:lstStyle/>
           <a:p>
-            <a:pPr indent="0" marL="0">
+            <a:pPr marL="0" indent="0">
               <a:buNone/>
             </a:pPr>
             <a:r>
@@ -6891,7 +6664,7 @@
           </a:prstGeom>
           <a:extLst>
             <a:ext uri="{C572A759-6A51-4108-AA02-DFA0A04FC94B}">
-              <ma14:wrappingTextBoxFlag xmlns:ma14="http://schemas.microsoft.com/office/mac/drawingml/2011/main" val="0"/>
+              <ma14:wrappingTextBoxFlag xmlns:ma14="http://schemas.microsoft.com/office/mac/drawingml/2011/main" xmlns="" val="0"/>
             </a:ext>
           </a:extLst>
         </p:spPr>
@@ -6912,7 +6685,7 @@
           <a:p>
             <a:pPr algn="r"/>
             <a:fld id="{F7021451-1387-4CA6-816F-3879F97B5CBC}" type="slidenum">
-              <a:rPr b="0" lang="en-US"/>
+              <a:rPr lang="en-US" b="0"/>
               <a:t>3</a:t>
             </a:fld>
             <a:endParaRPr lang="en-US"/>
@@ -6947,9 +6720,11 @@
       <p:sp>
         <p:nvSpPr>
           <p:cNvPr id="2" name="Text 0"/>
-          <p:cNvSpPr/>
+          <p:cNvSpPr>
+            <a:spLocks noGrp="1"/>
+          </p:cNvSpPr>
           <p:nvPr>
-            <p:ph idx="100" type="body" hasCustomPrompt="1"/>
+            <p:ph type="body" idx="100" hasCustomPrompt="1"/>
           </p:nvPr>
         </p:nvSpPr>
         <p:spPr>
@@ -6967,11 +6742,11 @@
           <a:bodyPr wrap="square" lIns="0" tIns="0" rIns="0" bIns="0" rtlCol="0"/>
           <a:lstStyle/>
           <a:p>
-            <a:pPr indent="0" marL="0">
-              <a:buNone/>
-            </a:pPr>
-            <a:r>
-              <a:rPr lang="en-US" sz="1100" spc="150" kern="0" dirty="0">
+            <a:pPr marL="0" indent="0">
+              <a:buNone/>
+            </a:pPr>
+            <a:r>
+              <a:rPr lang="en-US" sz="1100" kern="0" spc="150" dirty="0">
                 <a:solidFill>
                   <a:schemeClr val="accent1"/>
                 </a:solidFill>
@@ -6988,9 +6763,11 @@
       <p:sp>
         <p:nvSpPr>
           <p:cNvPr id="3" name="Text 0"/>
-          <p:cNvSpPr/>
+          <p:cNvSpPr>
+            <a:spLocks noGrp="1"/>
+          </p:cNvSpPr>
           <p:nvPr>
-            <p:ph idx="101" type="title" hasCustomPrompt="1"/>
+            <p:ph type="title" idx="101" hasCustomPrompt="1"/>
           </p:nvPr>
         </p:nvSpPr>
         <p:spPr>
@@ -7008,7 +6785,7 @@
           <a:bodyPr wrap="square" lIns="0" tIns="0" rIns="0" bIns="0" rtlCol="0" anchor="t"/>
           <a:lstStyle/>
           <a:p>
-            <a:pPr algn="l" indent="0" marL="0">
+            <a:pPr marL="0" indent="0" algn="l">
               <a:buNone/>
             </a:pPr>
             <a:r>
@@ -7071,7 +6848,7 @@
           <a:bodyPr wrap="square" lIns="0" tIns="0" rIns="0" bIns="0" rtlCol="0" anchor="ctr"/>
           <a:lstStyle/>
           <a:p>
-            <a:pPr algn="ctr" indent="0" marL="0">
+            <a:pPr marL="0" indent="0" algn="ctr">
               <a:buNone/>
             </a:pPr>
             <a:r>
@@ -7110,7 +6887,7 @@
           <a:bodyPr wrap="square" lIns="0" tIns="0" rIns="0" bIns="0" rtlCol="0" anchor="t"/>
           <a:lstStyle/>
           <a:p>
-            <a:pPr indent="0" marL="0">
+            <a:pPr marL="0" indent="0">
               <a:buNone/>
             </a:pPr>
             <a:r>
@@ -7234,7 +7011,7 @@
           <a:bodyPr wrap="square" lIns="0" tIns="0" rIns="0" bIns="0" rtlCol="0" anchor="t"/>
           <a:lstStyle/>
           <a:p>
-            <a:pPr indent="0" marL="0">
+            <a:pPr marL="0" indent="0">
               <a:buNone/>
             </a:pPr>
             <a:r>
@@ -7248,9 +7025,6 @@
               </a:rPr>
               <a:t>→ </a:t>
             </a:r>
-            <a:pPr indent="0" marL="0">
-              <a:buNone/>
-            </a:pPr>
             <a:r>
               <a:rPr lang="en-US" sz="1100" dirty="0">
                 <a:solidFill>
@@ -7291,7 +7065,7 @@
           <a:bodyPr wrap="square" lIns="0" tIns="0" rIns="0" bIns="0" rtlCol="0" anchor="ctr"/>
           <a:lstStyle/>
           <a:p>
-            <a:pPr algn="ctr" indent="0" marL="0">
+            <a:pPr marL="0" indent="0" algn="ctr">
               <a:buNone/>
             </a:pPr>
             <a:r>
@@ -7354,7 +7128,7 @@
           <a:bodyPr wrap="square" lIns="0" tIns="0" rIns="0" bIns="0" rtlCol="0" anchor="ctr"/>
           <a:lstStyle/>
           <a:p>
-            <a:pPr algn="ctr" indent="0" marL="0">
+            <a:pPr marL="0" indent="0" algn="ctr">
               <a:buNone/>
             </a:pPr>
             <a:r>
@@ -7393,7 +7167,7 @@
           <a:bodyPr wrap="square" lIns="0" tIns="0" rIns="0" bIns="0" rtlCol="0" anchor="t"/>
           <a:lstStyle/>
           <a:p>
-            <a:pPr indent="0" marL="0">
+            <a:pPr marL="0" indent="0">
               <a:buNone/>
             </a:pPr>
             <a:r>
@@ -7517,7 +7291,7 @@
           <a:bodyPr wrap="square" lIns="0" tIns="0" rIns="0" bIns="0" rtlCol="0" anchor="t"/>
           <a:lstStyle/>
           <a:p>
-            <a:pPr indent="0" marL="0">
+            <a:pPr marL="0" indent="0">
               <a:buNone/>
             </a:pPr>
             <a:r>
@@ -7531,9 +7305,6 @@
               </a:rPr>
               <a:t>→ </a:t>
             </a:r>
-            <a:pPr indent="0" marL="0">
-              <a:buNone/>
-            </a:pPr>
             <a:r>
               <a:rPr lang="en-US" sz="1100" dirty="0">
                 <a:solidFill>
@@ -7574,7 +7345,7 @@
           <a:bodyPr wrap="square" lIns="0" tIns="0" rIns="0" bIns="0" rtlCol="0" anchor="ctr"/>
           <a:lstStyle/>
           <a:p>
-            <a:pPr algn="ctr" indent="0" marL="0">
+            <a:pPr marL="0" indent="0" algn="ctr">
               <a:buNone/>
             </a:pPr>
             <a:r>
@@ -7637,7 +7408,7 @@
           <a:bodyPr wrap="square" lIns="0" tIns="0" rIns="0" bIns="0" rtlCol="0" anchor="ctr"/>
           <a:lstStyle/>
           <a:p>
-            <a:pPr algn="ctr" indent="0" marL="0">
+            <a:pPr marL="0" indent="0" algn="ctr">
               <a:buNone/>
             </a:pPr>
             <a:r>
@@ -7676,7 +7447,7 @@
           <a:bodyPr wrap="square" lIns="0" tIns="0" rIns="0" bIns="0" rtlCol="0" anchor="t"/>
           <a:lstStyle/>
           <a:p>
-            <a:pPr indent="0" marL="0">
+            <a:pPr marL="0" indent="0">
               <a:buNone/>
             </a:pPr>
             <a:r>
@@ -7800,7 +7571,7 @@
           <a:bodyPr wrap="square" lIns="0" tIns="0" rIns="0" bIns="0" rtlCol="0" anchor="t"/>
           <a:lstStyle/>
           <a:p>
-            <a:pPr indent="0" marL="0">
+            <a:pPr marL="0" indent="0">
               <a:buNone/>
             </a:pPr>
             <a:r>
@@ -7814,9 +7585,6 @@
               </a:rPr>
               <a:t>→ </a:t>
             </a:r>
-            <a:pPr indent="0" marL="0">
-              <a:buNone/>
-            </a:pPr>
             <a:r>
               <a:rPr lang="en-US" sz="1100" dirty="0">
                 <a:solidFill>
@@ -7857,7 +7625,7 @@
           <a:bodyPr wrap="square" lIns="0" tIns="0" rIns="0" bIns="0" rtlCol="0" anchor="ctr"/>
           <a:lstStyle/>
           <a:p>
-            <a:pPr algn="ctr" indent="0" marL="0">
+            <a:pPr marL="0" indent="0" algn="ctr">
               <a:buNone/>
             </a:pPr>
             <a:r>
@@ -7920,7 +7688,7 @@
           <a:bodyPr wrap="square" lIns="0" tIns="0" rIns="0" bIns="0" rtlCol="0" anchor="ctr"/>
           <a:lstStyle/>
           <a:p>
-            <a:pPr algn="ctr" indent="0" marL="0">
+            <a:pPr marL="0" indent="0" algn="ctr">
               <a:buNone/>
             </a:pPr>
             <a:r>
@@ -7959,7 +7727,7 @@
           <a:bodyPr wrap="square" lIns="0" tIns="0" rIns="0" bIns="0" rtlCol="0" anchor="t"/>
           <a:lstStyle/>
           <a:p>
-            <a:pPr indent="0" marL="0">
+            <a:pPr marL="0" indent="0">
               <a:buNone/>
             </a:pPr>
             <a:r>
@@ -8083,7 +7851,7 @@
           <a:bodyPr wrap="square" lIns="0" tIns="0" rIns="0" bIns="0" rtlCol="0" anchor="t"/>
           <a:lstStyle/>
           <a:p>
-            <a:pPr indent="0" marL="0">
+            <a:pPr marL="0" indent="0">
               <a:buNone/>
             </a:pPr>
             <a:r>
@@ -8097,9 +7865,6 @@
               </a:rPr>
               <a:t>→ </a:t>
             </a:r>
-            <a:pPr indent="0" marL="0">
-              <a:buNone/>
-            </a:pPr>
             <a:r>
               <a:rPr lang="en-US" sz="1100" dirty="0">
                 <a:solidFill>
@@ -8140,7 +7905,7 @@
           <a:bodyPr wrap="square" lIns="0" tIns="0" rIns="0" bIns="0" rtlCol="0" anchor="ctr"/>
           <a:lstStyle/>
           <a:p>
-            <a:pPr algn="ctr" indent="0" marL="0">
+            <a:pPr marL="0" indent="0" algn="ctr">
               <a:buNone/>
             </a:pPr>
             <a:r>
@@ -8160,7 +7925,7 @@
       </p:sp>
       <p:sp>
         <p:nvSpPr>
-          <p:cNvPr id="25" name="Slide Number Placeholder 0"/>
+          <p:cNvPr id="28" name="Slide Number Placeholder 0"/>
           <p:cNvSpPr>
             <a:spLocks noGrp="1"/>
           </p:cNvSpPr>
@@ -8178,7 +7943,7 @@
           </a:prstGeom>
           <a:extLst>
             <a:ext uri="{C572A759-6A51-4108-AA02-DFA0A04FC94B}">
-              <ma14:wrappingTextBoxFlag xmlns:ma14="http://schemas.microsoft.com/office/mac/drawingml/2011/main" val="0"/>
+              <ma14:wrappingTextBoxFlag xmlns:ma14="http://schemas.microsoft.com/office/mac/drawingml/2011/main" xmlns="" val="0"/>
             </a:ext>
           </a:extLst>
         </p:spPr>
@@ -8199,7 +7964,7 @@
           <a:p>
             <a:pPr algn="r"/>
             <a:fld id="{F7021451-1387-4CA6-816F-3879F97B5CBC}" type="slidenum">
-              <a:rPr b="0" lang="en-US"/>
+              <a:rPr lang="en-US" b="0"/>
               <a:t>4</a:t>
             </a:fld>
             <a:endParaRPr lang="en-US"/>
@@ -8234,9 +7999,11 @@
       <p:sp>
         <p:nvSpPr>
           <p:cNvPr id="2" name="Text 0"/>
-          <p:cNvSpPr/>
+          <p:cNvSpPr>
+            <a:spLocks noGrp="1"/>
+          </p:cNvSpPr>
           <p:nvPr>
-            <p:ph idx="100" type="body" hasCustomPrompt="1"/>
+            <p:ph type="body" idx="100" hasCustomPrompt="1"/>
           </p:nvPr>
         </p:nvSpPr>
         <p:spPr>
@@ -8254,11 +8021,11 @@
           <a:bodyPr wrap="square" lIns="0" tIns="0" rIns="0" bIns="0" rtlCol="0"/>
           <a:lstStyle/>
           <a:p>
-            <a:pPr indent="0" marL="0">
-              <a:buNone/>
-            </a:pPr>
-            <a:r>
-              <a:rPr lang="en-US" sz="1100" spc="150" kern="0" dirty="0">
+            <a:pPr marL="0" indent="0">
+              <a:buNone/>
+            </a:pPr>
+            <a:r>
+              <a:rPr lang="en-US" sz="1100" kern="0" spc="150" dirty="0">
                 <a:solidFill>
                   <a:schemeClr val="accent1"/>
                 </a:solidFill>
@@ -8275,9 +8042,11 @@
       <p:sp>
         <p:nvSpPr>
           <p:cNvPr id="3" name="Text 0"/>
-          <p:cNvSpPr/>
+          <p:cNvSpPr>
+            <a:spLocks noGrp="1"/>
+          </p:cNvSpPr>
           <p:nvPr>
-            <p:ph idx="101" type="title" hasCustomPrompt="1"/>
+            <p:ph type="title" idx="101" hasCustomPrompt="1"/>
           </p:nvPr>
         </p:nvSpPr>
         <p:spPr>
@@ -8295,7 +8064,7 @@
           <a:bodyPr wrap="square" lIns="0" tIns="0" rIns="0" bIns="0" rtlCol="0" anchor="t"/>
           <a:lstStyle/>
           <a:p>
-            <a:pPr algn="l" indent="0" marL="0">
+            <a:pPr marL="0" indent="0" algn="l">
               <a:buNone/>
             </a:pPr>
             <a:r>
@@ -8356,7 +8125,7 @@
           <a:bodyPr wrap="square" lIns="0" tIns="0" rIns="0" bIns="0" rtlCol="0" anchor="ctr"/>
           <a:lstStyle/>
           <a:p>
-            <a:pPr indent="0" marL="0">
+            <a:pPr marL="0" indent="0">
               <a:buNone/>
             </a:pPr>
             <a:r>
@@ -8395,7 +8164,7 @@
           <a:bodyPr wrap="square" lIns="0" tIns="0" rIns="0" bIns="0" rtlCol="0" anchor="t"/>
           <a:lstStyle/>
           <a:p>
-            <a:pPr indent="0" marL="0">
+            <a:pPr marL="0" indent="0">
               <a:buNone/>
             </a:pPr>
             <a:r>
@@ -8412,7 +8181,7 @@
             <a:endParaRPr lang="en-US" sz="1000" dirty="0"/>
           </a:p>
           <a:p>
-            <a:pPr indent="0" marL="0">
+            <a:pPr marL="0" indent="0">
               <a:buNone/>
             </a:pPr>
             <a:r>
@@ -8473,7 +8242,7 @@
           <a:bodyPr wrap="square" lIns="0" tIns="0" rIns="0" bIns="0" rtlCol="0" anchor="ctr"/>
           <a:lstStyle/>
           <a:p>
-            <a:pPr indent="0" marL="0">
+            <a:pPr marL="0" indent="0">
               <a:buNone/>
             </a:pPr>
             <a:r>
@@ -8512,7 +8281,7 @@
           <a:bodyPr wrap="square" lIns="0" tIns="0" rIns="0" bIns="0" rtlCol="0" anchor="t"/>
           <a:lstStyle/>
           <a:p>
-            <a:pPr indent="0" marL="0">
+            <a:pPr marL="0" indent="0">
               <a:buNone/>
             </a:pPr>
             <a:r>
@@ -8529,7 +8298,7 @@
             <a:endParaRPr lang="en-US" sz="1000" dirty="0"/>
           </a:p>
           <a:p>
-            <a:pPr indent="0" marL="0">
+            <a:pPr marL="0" indent="0">
               <a:buNone/>
             </a:pPr>
             <a:r>
@@ -8590,7 +8359,7 @@
           <a:bodyPr wrap="square" lIns="0" tIns="0" rIns="0" bIns="0" rtlCol="0" anchor="ctr"/>
           <a:lstStyle/>
           <a:p>
-            <a:pPr indent="0" marL="0">
+            <a:pPr marL="0" indent="0">
               <a:buNone/>
             </a:pPr>
             <a:r>
@@ -8629,7 +8398,7 @@
           <a:bodyPr wrap="square" lIns="0" tIns="0" rIns="0" bIns="0" rtlCol="0" anchor="t"/>
           <a:lstStyle/>
           <a:p>
-            <a:pPr indent="0" marL="0">
+            <a:pPr marL="0" indent="0">
               <a:buNone/>
             </a:pPr>
             <a:r>
@@ -8646,7 +8415,7 @@
             <a:endParaRPr lang="en-US" sz="1000" dirty="0"/>
           </a:p>
           <a:p>
-            <a:pPr indent="0" marL="0">
+            <a:pPr marL="0" indent="0">
               <a:buNone/>
             </a:pPr>
             <a:r>
@@ -8707,7 +8476,7 @@
           <a:bodyPr wrap="square" lIns="0" tIns="0" rIns="0" bIns="0" rtlCol="0" anchor="ctr"/>
           <a:lstStyle/>
           <a:p>
-            <a:pPr indent="0" marL="0">
+            <a:pPr marL="0" indent="0">
               <a:buNone/>
             </a:pPr>
             <a:r>
@@ -8746,7 +8515,7 @@
           <a:bodyPr wrap="square" lIns="0" tIns="0" rIns="0" bIns="0" rtlCol="0" anchor="t"/>
           <a:lstStyle/>
           <a:p>
-            <a:pPr indent="0" marL="0">
+            <a:pPr marL="0" indent="0">
               <a:buNone/>
             </a:pPr>
             <a:r>
@@ -8763,7 +8532,7 @@
             <a:endParaRPr lang="en-US" sz="1000" dirty="0"/>
           </a:p>
           <a:p>
-            <a:pPr indent="0" marL="0">
+            <a:pPr marL="0" indent="0">
               <a:buNone/>
             </a:pPr>
             <a:r>
@@ -8802,7 +8571,7 @@
           <a:bodyPr wrap="square" lIns="0" tIns="0" rIns="0" bIns="0" rtlCol="0" anchor="ctr"/>
           <a:lstStyle/>
           <a:p>
-            <a:pPr indent="0" marL="0">
+            <a:pPr marL="0" indent="0">
               <a:buNone/>
             </a:pPr>
             <a:r>
@@ -8845,7 +8614,7 @@
           <a:bodyPr wrap="square" lIns="0" tIns="0" rIns="0" bIns="0" rtlCol="0" anchor="ctr"/>
           <a:lstStyle/>
           <a:p>
-            <a:pPr algn="ctr" indent="0" marL="0">
+            <a:pPr marL="0" indent="0" algn="ctr">
               <a:buNone/>
             </a:pPr>
             <a:r>
@@ -8888,7 +8657,7 @@
           <a:bodyPr wrap="square" lIns="0" tIns="0" rIns="0" bIns="0" rtlCol="0" anchor="ctr"/>
           <a:lstStyle/>
           <a:p>
-            <a:pPr algn="ctr" indent="0" marL="0">
+            <a:pPr marL="0" indent="0" algn="ctr">
               <a:buNone/>
             </a:pPr>
             <a:r>
@@ -8931,7 +8700,7 @@
           <a:bodyPr wrap="square" lIns="0" tIns="0" rIns="0" bIns="0" rtlCol="0" anchor="ctr"/>
           <a:lstStyle/>
           <a:p>
-            <a:pPr algn="ctr" indent="0" marL="0">
+            <a:pPr marL="0" indent="0" algn="ctr">
               <a:buNone/>
             </a:pPr>
             <a:r>
@@ -8974,7 +8743,7 @@
           <a:bodyPr wrap="square" lIns="0" tIns="0" rIns="0" bIns="0" rtlCol="0" anchor="ctr"/>
           <a:lstStyle/>
           <a:p>
-            <a:pPr algn="ctr" indent="0" marL="0">
+            <a:pPr marL="0" indent="0" algn="ctr">
               <a:buNone/>
             </a:pPr>
             <a:r>
@@ -9017,7 +8786,7 @@
           <a:bodyPr wrap="square" lIns="0" tIns="0" rIns="0" bIns="0" rtlCol="0" anchor="ctr"/>
           <a:lstStyle/>
           <a:p>
-            <a:pPr algn="ctr" indent="0" marL="0">
+            <a:pPr marL="0" indent="0" algn="ctr">
               <a:buNone/>
             </a:pPr>
             <a:r>
@@ -9056,7 +8825,7 @@
           <a:bodyPr wrap="square" lIns="0" tIns="0" rIns="0" bIns="0" rtlCol="0" anchor="ctr"/>
           <a:lstStyle/>
           <a:p>
-            <a:pPr indent="0" marL="0">
+            <a:pPr marL="0" indent="0">
               <a:buNone/>
             </a:pPr>
             <a:r>
@@ -9117,11 +8886,11 @@
           <a:bodyPr wrap="square" lIns="0" tIns="0" rIns="0" bIns="0" rtlCol="0" anchor="ctr"/>
           <a:lstStyle/>
           <a:p>
-            <a:pPr indent="0" marL="0">
-              <a:buNone/>
-            </a:pPr>
-            <a:r>
-              <a:rPr lang="en-US" sz="1100" spc="150" kern="0" dirty="0">
+            <a:pPr marL="0" indent="0">
+              <a:buNone/>
+            </a:pPr>
+            <a:r>
+              <a:rPr lang="en-US" sz="1100" kern="0" spc="150" dirty="0">
                 <a:solidFill>
                   <a:srgbClr val="7FA6FF"/>
                 </a:solidFill>
@@ -9156,7 +8925,7 @@
           <a:bodyPr wrap="square" lIns="0" tIns="0" rIns="0" bIns="0" rtlCol="0" anchor="t"/>
           <a:lstStyle/>
           <a:p>
-            <a:pPr indent="0" marL="0">
+            <a:pPr marL="0" indent="0">
               <a:buNone/>
             </a:pPr>
             <a:r>
@@ -9199,7 +8968,7 @@
           <a:bodyPr wrap="square" lIns="0" tIns="0" rIns="0" bIns="0" rtlCol="0" anchor="ctr"/>
           <a:lstStyle/>
           <a:p>
-            <a:pPr algn="ctr" indent="0" marL="0">
+            <a:pPr marL="0" indent="0" algn="ctr">
               <a:buNone/>
             </a:pPr>
             <a:r>
@@ -9283,7 +9052,7 @@
           <a:bodyPr wrap="square" lIns="0" tIns="0" rIns="0" bIns="0" rtlCol="0" anchor="ctr"/>
           <a:lstStyle/>
           <a:p>
-            <a:pPr algn="ctr" indent="0" marL="0">
+            <a:pPr marL="0" indent="0" algn="ctr">
               <a:buNone/>
             </a:pPr>
             <a:r>
@@ -9344,7 +9113,7 @@
           <a:bodyPr wrap="square" lIns="0" tIns="0" rIns="0" bIns="0" rtlCol="0" anchor="ctr"/>
           <a:lstStyle/>
           <a:p>
-            <a:pPr algn="ctr" indent="0" marL="0">
+            <a:pPr marL="0" indent="0" algn="ctr">
               <a:buNone/>
             </a:pPr>
             <a:r>
@@ -9405,7 +9174,7 @@
           <a:bodyPr wrap="square" lIns="0" tIns="0" rIns="0" bIns="0" rtlCol="0" anchor="ctr"/>
           <a:lstStyle/>
           <a:p>
-            <a:pPr algn="ctr" indent="0" marL="0">
+            <a:pPr marL="0" indent="0" algn="ctr">
               <a:buNone/>
             </a:pPr>
             <a:r>
@@ -9466,7 +9235,7 @@
           <a:bodyPr wrap="square" lIns="0" tIns="0" rIns="0" bIns="0" rtlCol="0" anchor="ctr"/>
           <a:lstStyle/>
           <a:p>
-            <a:pPr algn="ctr" indent="0" marL="0">
+            <a:pPr marL="0" indent="0" algn="ctr">
               <a:buNone/>
             </a:pPr>
             <a:r>
@@ -9505,7 +9274,7 @@
           <a:bodyPr wrap="square" lIns="0" tIns="0" rIns="0" bIns="0" rtlCol="0" anchor="ctr"/>
           <a:lstStyle/>
           <a:p>
-            <a:pPr algn="ctr" indent="0" marL="0">
+            <a:pPr marL="0" indent="0" algn="ctr">
               <a:buNone/>
             </a:pPr>
             <a:r>
@@ -9544,7 +9313,7 @@
           <a:bodyPr wrap="square" lIns="0" tIns="0" rIns="0" bIns="0" rtlCol="0" anchor="ctr"/>
           <a:lstStyle/>
           <a:p>
-            <a:pPr algn="r" indent="0" marL="0">
+            <a:pPr marL="0" indent="0" algn="r">
               <a:buNone/>
             </a:pPr>
             <a:r>
@@ -9583,7 +9352,7 @@
           <a:bodyPr wrap="square" lIns="0" tIns="0" rIns="0" bIns="0" rtlCol="0" anchor="t"/>
           <a:lstStyle/>
           <a:p>
-            <a:pPr indent="0" marL="0">
+            <a:pPr marL="0" indent="0">
               <a:buNone/>
             </a:pPr>
             <a:r>
@@ -9600,7 +9369,7 @@
             <a:endParaRPr lang="en-US" sz="1150" dirty="0"/>
           </a:p>
           <a:p>
-            <a:pPr indent="0" marL="0">
+            <a:pPr marL="0" indent="0">
               <a:buNone/>
             </a:pPr>
             <a:r>
@@ -9617,7 +9386,7 @@
             <a:endParaRPr lang="en-US" sz="1150" dirty="0"/>
           </a:p>
           <a:p>
-            <a:pPr indent="0" marL="0">
+            <a:pPr marL="0" indent="0">
               <a:buNone/>
             </a:pPr>
             <a:r>
@@ -9637,7 +9406,7 @@
       </p:sp>
       <p:sp>
         <p:nvSpPr>
-          <p:cNvPr id="25" name="Slide Number Placeholder 0"/>
+          <p:cNvPr id="39" name="Slide Number Placeholder 0"/>
           <p:cNvSpPr>
             <a:spLocks noGrp="1"/>
           </p:cNvSpPr>
@@ -9655,7 +9424,7 @@
           </a:prstGeom>
           <a:extLst>
             <a:ext uri="{C572A759-6A51-4108-AA02-DFA0A04FC94B}">
-              <ma14:wrappingTextBoxFlag xmlns:ma14="http://schemas.microsoft.com/office/mac/drawingml/2011/main" val="0"/>
+              <ma14:wrappingTextBoxFlag xmlns:ma14="http://schemas.microsoft.com/office/mac/drawingml/2011/main" xmlns="" val="0"/>
             </a:ext>
           </a:extLst>
         </p:spPr>
@@ -9676,7 +9445,7 @@
           <a:p>
             <a:pPr algn="r"/>
             <a:fld id="{F7021451-1387-4CA6-816F-3879F97B5CBC}" type="slidenum">
-              <a:rPr b="0" lang="en-US"/>
+              <a:rPr lang="en-US" b="0"/>
               <a:t>5</a:t>
             </a:fld>
             <a:endParaRPr lang="en-US"/>
@@ -9711,9 +9480,11 @@
       <p:sp>
         <p:nvSpPr>
           <p:cNvPr id="2" name="Text 0"/>
-          <p:cNvSpPr/>
+          <p:cNvSpPr>
+            <a:spLocks noGrp="1"/>
+          </p:cNvSpPr>
           <p:nvPr>
-            <p:ph idx="100" type="body" hasCustomPrompt="1"/>
+            <p:ph type="body" idx="100" hasCustomPrompt="1"/>
           </p:nvPr>
         </p:nvSpPr>
         <p:spPr>
@@ -9731,11 +9502,11 @@
           <a:bodyPr wrap="square" lIns="0" tIns="0" rIns="0" bIns="0" rtlCol="0"/>
           <a:lstStyle/>
           <a:p>
-            <a:pPr indent="0" marL="0">
-              <a:buNone/>
-            </a:pPr>
-            <a:r>
-              <a:rPr lang="en-US" sz="1100" spc="150" kern="0" dirty="0">
+            <a:pPr marL="0" indent="0">
+              <a:buNone/>
+            </a:pPr>
+            <a:r>
+              <a:rPr lang="en-US" sz="1100" kern="0" spc="150" dirty="0">
                 <a:solidFill>
                   <a:schemeClr val="accent1"/>
                 </a:solidFill>
@@ -9752,9 +9523,11 @@
       <p:sp>
         <p:nvSpPr>
           <p:cNvPr id="3" name="Text 0"/>
-          <p:cNvSpPr/>
+          <p:cNvSpPr>
+            <a:spLocks noGrp="1"/>
+          </p:cNvSpPr>
           <p:nvPr>
-            <p:ph idx="101" type="title" hasCustomPrompt="1"/>
+            <p:ph type="title" idx="101" hasCustomPrompt="1"/>
           </p:nvPr>
         </p:nvSpPr>
         <p:spPr>
@@ -9772,7 +9545,7 @@
           <a:bodyPr wrap="square" lIns="0" tIns="0" rIns="0" bIns="0" rtlCol="0" anchor="t"/>
           <a:lstStyle/>
           <a:p>
-            <a:pPr algn="l" indent="0" marL="0">
+            <a:pPr marL="0" indent="0" algn="l">
               <a:buNone/>
             </a:pPr>
             <a:r>
@@ -9833,7 +9606,7 @@
           <a:bodyPr wrap="square" lIns="0" tIns="0" rIns="0" bIns="0" rtlCol="0" anchor="ctr"/>
           <a:lstStyle/>
           <a:p>
-            <a:pPr indent="0" marL="0">
+            <a:pPr marL="0" indent="0">
               <a:buNone/>
             </a:pPr>
             <a:r>
@@ -9847,9 +9620,6 @@
               </a:rPr>
               <a:t>AISVesselTracks2024.gpkg</a:t>
             </a:r>
-            <a:pPr indent="0" marL="0">
-              <a:buNone/>
-            </a:pPr>
             <a:r>
               <a:rPr lang="en-US" sz="1200" dirty="0">
                 <a:solidFill>
@@ -9908,7 +9678,7 @@
           <a:bodyPr wrap="square" lIns="0" tIns="0" rIns="0" bIns="0" rtlCol="0" anchor="ctr"/>
           <a:lstStyle/>
           <a:p>
-            <a:pPr indent="0" marL="0">
+            <a:pPr marL="0" indent="0">
               <a:buNone/>
             </a:pPr>
             <a:r>
@@ -9947,7 +9717,7 @@
           <a:bodyPr wrap="square" lIns="0" tIns="0" rIns="0" bIns="0" rtlCol="0" anchor="ctr"/>
           <a:lstStyle/>
           <a:p>
-            <a:pPr indent="0" marL="0">
+            <a:pPr marL="0" indent="0">
               <a:buNone/>
             </a:pPr>
             <a:r>
@@ -9986,7 +9756,7 @@
           <a:bodyPr wrap="square" lIns="0" tIns="0" rIns="0" bIns="0" rtlCol="0" anchor="t"/>
           <a:lstStyle/>
           <a:p>
-            <a:pPr indent="0" marL="0">
+            <a:pPr marL="0" indent="0">
               <a:buNone/>
             </a:pPr>
             <a:r>
@@ -10047,7 +9817,7 @@
           <a:bodyPr wrap="square" lIns="0" tIns="0" rIns="0" bIns="0" rtlCol="0" anchor="ctr"/>
           <a:lstStyle/>
           <a:p>
-            <a:pPr indent="0" marL="0">
+            <a:pPr marL="0" indent="0">
               <a:buNone/>
             </a:pPr>
             <a:r>
@@ -10086,7 +9856,7 @@
           <a:bodyPr wrap="square" lIns="0" tIns="0" rIns="0" bIns="0" rtlCol="0" anchor="ctr"/>
           <a:lstStyle/>
           <a:p>
-            <a:pPr indent="0" marL="0">
+            <a:pPr marL="0" indent="0">
               <a:buNone/>
             </a:pPr>
             <a:r>
@@ -10125,7 +9895,7 @@
           <a:bodyPr wrap="square" lIns="0" tIns="0" rIns="0" bIns="0" rtlCol="0" anchor="t"/>
           <a:lstStyle/>
           <a:p>
-            <a:pPr indent="0" marL="0">
+            <a:pPr marL="0" indent="0">
               <a:buNone/>
             </a:pPr>
             <a:r>
@@ -10186,7 +9956,7 @@
           <a:bodyPr wrap="square" lIns="0" tIns="0" rIns="0" bIns="0" rtlCol="0" anchor="ctr"/>
           <a:lstStyle/>
           <a:p>
-            <a:pPr indent="0" marL="0">
+            <a:pPr marL="0" indent="0">
               <a:buNone/>
             </a:pPr>
             <a:r>
@@ -10225,7 +9995,7 @@
           <a:bodyPr wrap="square" lIns="0" tIns="0" rIns="0" bIns="0" rtlCol="0" anchor="ctr"/>
           <a:lstStyle/>
           <a:p>
-            <a:pPr indent="0" marL="0">
+            <a:pPr marL="0" indent="0">
               <a:buNone/>
             </a:pPr>
             <a:r>
@@ -10264,7 +10034,7 @@
           <a:bodyPr wrap="square" lIns="0" tIns="0" rIns="0" bIns="0" rtlCol="0" anchor="t"/>
           <a:lstStyle/>
           <a:p>
-            <a:pPr indent="0" marL="0">
+            <a:pPr marL="0" indent="0">
               <a:buNone/>
             </a:pPr>
             <a:r>
@@ -10327,7 +10097,7 @@
           <a:bodyPr wrap="square" lIns="0" tIns="0" rIns="0" bIns="0" rtlCol="0" anchor="ctr"/>
           <a:lstStyle/>
           <a:p>
-            <a:pPr algn="ctr" indent="0" marL="0">
+            <a:pPr marL="0" indent="0" algn="ctr">
               <a:buNone/>
             </a:pPr>
             <a:r>
@@ -10366,7 +10136,7 @@
           <a:bodyPr wrap="square" lIns="0" tIns="0" rIns="0" bIns="0" rtlCol="0" anchor="ctr"/>
           <a:lstStyle/>
           <a:p>
-            <a:pPr indent="0" marL="0">
+            <a:pPr marL="0" indent="0">
               <a:buNone/>
             </a:pPr>
             <a:r>
@@ -10405,7 +10175,7 @@
           <a:bodyPr wrap="square" lIns="0" tIns="0" rIns="0" bIns="0" rtlCol="0" anchor="t"/>
           <a:lstStyle/>
           <a:p>
-            <a:pPr indent="0" marL="0">
+            <a:pPr marL="0" indent="0">
               <a:buNone/>
             </a:pPr>
             <a:r>
@@ -10492,7 +10262,7 @@
           <a:bodyPr wrap="square" lIns="0" tIns="0" rIns="0" bIns="0" rtlCol="0" anchor="ctr"/>
           <a:lstStyle/>
           <a:p>
-            <a:pPr algn="ctr" indent="0" marL="0">
+            <a:pPr marL="0" indent="0" algn="ctr">
               <a:buNone/>
             </a:pPr>
             <a:r>
@@ -10531,7 +10301,7 @@
           <a:bodyPr wrap="square" lIns="0" tIns="0" rIns="0" bIns="0" rtlCol="0" anchor="ctr"/>
           <a:lstStyle/>
           <a:p>
-            <a:pPr indent="0" marL="0">
+            <a:pPr marL="0" indent="0">
               <a:buNone/>
             </a:pPr>
             <a:r>
@@ -10570,7 +10340,7 @@
           <a:bodyPr wrap="square" lIns="0" tIns="0" rIns="0" bIns="0" rtlCol="0" anchor="t"/>
           <a:lstStyle/>
           <a:p>
-            <a:pPr indent="0" marL="0">
+            <a:pPr marL="0" indent="0">
               <a:buNone/>
             </a:pPr>
             <a:r>
@@ -10657,7 +10427,7 @@
           <a:bodyPr wrap="square" lIns="0" tIns="0" rIns="0" bIns="0" rtlCol="0" anchor="ctr"/>
           <a:lstStyle/>
           <a:p>
-            <a:pPr algn="ctr" indent="0" marL="0">
+            <a:pPr marL="0" indent="0" algn="ctr">
               <a:buNone/>
             </a:pPr>
             <a:r>
@@ -10696,7 +10466,7 @@
           <a:bodyPr wrap="square" lIns="0" tIns="0" rIns="0" bIns="0" rtlCol="0" anchor="ctr"/>
           <a:lstStyle/>
           <a:p>
-            <a:pPr indent="0" marL="0">
+            <a:pPr marL="0" indent="0">
               <a:buNone/>
             </a:pPr>
             <a:r>
@@ -10735,7 +10505,7 @@
           <a:bodyPr wrap="square" lIns="0" tIns="0" rIns="0" bIns="0" rtlCol="0" anchor="t"/>
           <a:lstStyle/>
           <a:p>
-            <a:pPr indent="0" marL="0">
+            <a:pPr marL="0" indent="0">
               <a:buNone/>
             </a:pPr>
             <a:r>
@@ -10822,7 +10592,7 @@
           <a:bodyPr wrap="square" lIns="0" tIns="0" rIns="0" bIns="0" rtlCol="0" anchor="ctr"/>
           <a:lstStyle/>
           <a:p>
-            <a:pPr algn="ctr" indent="0" marL="0">
+            <a:pPr marL="0" indent="0" algn="ctr">
               <a:buNone/>
             </a:pPr>
             <a:r>
@@ -10861,7 +10631,7 @@
           <a:bodyPr wrap="square" lIns="0" tIns="0" rIns="0" bIns="0" rtlCol="0" anchor="ctr"/>
           <a:lstStyle/>
           <a:p>
-            <a:pPr indent="0" marL="0">
+            <a:pPr marL="0" indent="0">
               <a:buNone/>
             </a:pPr>
             <a:r>
@@ -10900,7 +10670,7 @@
           <a:bodyPr wrap="square" lIns="0" tIns="0" rIns="0" bIns="0" rtlCol="0" anchor="t"/>
           <a:lstStyle/>
           <a:p>
-            <a:pPr indent="0" marL="0">
+            <a:pPr marL="0" indent="0">
               <a:buNone/>
             </a:pPr>
             <a:r>
@@ -10987,7 +10757,7 @@
           <a:bodyPr wrap="square" lIns="0" tIns="0" rIns="0" bIns="0" rtlCol="0" anchor="ctr"/>
           <a:lstStyle/>
           <a:p>
-            <a:pPr algn="ctr" indent="0" marL="0">
+            <a:pPr marL="0" indent="0" algn="ctr">
               <a:buNone/>
             </a:pPr>
             <a:r>
@@ -11026,7 +10796,7 @@
           <a:bodyPr wrap="square" lIns="0" tIns="0" rIns="0" bIns="0" rtlCol="0" anchor="ctr"/>
           <a:lstStyle/>
           <a:p>
-            <a:pPr indent="0" marL="0">
+            <a:pPr marL="0" indent="0">
               <a:buNone/>
             </a:pPr>
             <a:r>
@@ -11065,7 +10835,7 @@
           <a:bodyPr wrap="square" lIns="0" tIns="0" rIns="0" bIns="0" rtlCol="0" anchor="t"/>
           <a:lstStyle/>
           <a:p>
-            <a:pPr indent="0" marL="0">
+            <a:pPr marL="0" indent="0">
               <a:buNone/>
             </a:pPr>
             <a:r>
@@ -11176,7 +10946,7 @@
           <a:bodyPr wrap="square" lIns="0" tIns="0" rIns="0" bIns="0" rtlCol="0" anchor="ctr"/>
           <a:lstStyle/>
           <a:p>
-            <a:pPr indent="0" marL="0">
+            <a:pPr marL="0" indent="0">
               <a:buNone/>
             </a:pPr>
             <a:r>
@@ -11196,7 +10966,7 @@
       </p:sp>
       <p:sp>
         <p:nvSpPr>
-          <p:cNvPr id="25" name="Slide Number Placeholder 0"/>
+          <p:cNvPr id="46" name="Slide Number Placeholder 0"/>
           <p:cNvSpPr>
             <a:spLocks noGrp="1"/>
           </p:cNvSpPr>
@@ -11214,7 +10984,7 @@
           </a:prstGeom>
           <a:extLst>
             <a:ext uri="{C572A759-6A51-4108-AA02-DFA0A04FC94B}">
-              <ma14:wrappingTextBoxFlag xmlns:ma14="http://schemas.microsoft.com/office/mac/drawingml/2011/main" val="0"/>
+              <ma14:wrappingTextBoxFlag xmlns:ma14="http://schemas.microsoft.com/office/mac/drawingml/2011/main" xmlns="" val="0"/>
             </a:ext>
           </a:extLst>
         </p:spPr>
@@ -11235,7 +11005,7 @@
           <a:p>
             <a:pPr algn="r"/>
             <a:fld id="{F7021451-1387-4CA6-816F-3879F97B5CBC}" type="slidenum">
-              <a:rPr b="0" lang="en-US"/>
+              <a:rPr lang="en-US" b="0"/>
               <a:t>6</a:t>
             </a:fld>
             <a:endParaRPr lang="en-US"/>
@@ -11270,9 +11040,11 @@
       <p:sp>
         <p:nvSpPr>
           <p:cNvPr id="2" name="Text 0"/>
-          <p:cNvSpPr/>
+          <p:cNvSpPr>
+            <a:spLocks noGrp="1"/>
+          </p:cNvSpPr>
           <p:nvPr>
-            <p:ph idx="100" type="body" hasCustomPrompt="1"/>
+            <p:ph type="body" idx="100" hasCustomPrompt="1"/>
           </p:nvPr>
         </p:nvSpPr>
         <p:spPr>
@@ -11290,11 +11062,11 @@
           <a:bodyPr wrap="square" lIns="0" tIns="0" rIns="0" bIns="0" rtlCol="0"/>
           <a:lstStyle/>
           <a:p>
-            <a:pPr indent="0" marL="0">
-              <a:buNone/>
-            </a:pPr>
-            <a:r>
-              <a:rPr lang="en-US" sz="1100" spc="150" kern="0" dirty="0">
+            <a:pPr marL="0" indent="0">
+              <a:buNone/>
+            </a:pPr>
+            <a:r>
+              <a:rPr lang="en-US" sz="1100" kern="0" spc="150" dirty="0">
                 <a:solidFill>
                   <a:schemeClr val="accent1"/>
                 </a:solidFill>
@@ -11311,9 +11083,11 @@
       <p:sp>
         <p:nvSpPr>
           <p:cNvPr id="3" name="Text 0"/>
-          <p:cNvSpPr/>
+          <p:cNvSpPr>
+            <a:spLocks noGrp="1"/>
+          </p:cNvSpPr>
           <p:nvPr>
-            <p:ph idx="101" type="title" hasCustomPrompt="1"/>
+            <p:ph type="title" idx="101" hasCustomPrompt="1"/>
           </p:nvPr>
         </p:nvSpPr>
         <p:spPr>
@@ -11331,7 +11105,7 @@
           <a:bodyPr wrap="square" lIns="0" tIns="0" rIns="0" bIns="0" rtlCol="0" anchor="t"/>
           <a:lstStyle/>
           <a:p>
-            <a:pPr algn="l" indent="0" marL="0">
+            <a:pPr marL="0" indent="0" algn="l">
               <a:buNone/>
             </a:pPr>
             <a:r>
@@ -11372,10 +11146,34 @@
             <a:tbl>
               <a:tblPr/>
               <a:tblGrid>
-                <a:gridCol w="1325880"/>
-                <a:gridCol w="914400"/>
-                <a:gridCol w="2011680"/>
-                <a:gridCol w="731520"/>
+                <a:gridCol w="1325880">
+                  <a:extLst>
+                    <a:ext uri="{9D8B030D-6E8A-4147-A177-3AD203B41FA5}">
+                      <a16:colId xmlns:a16="http://schemas.microsoft.com/office/drawing/2014/main" val="20000"/>
+                    </a:ext>
+                  </a:extLst>
+                </a:gridCol>
+                <a:gridCol w="914400">
+                  <a:extLst>
+                    <a:ext uri="{9D8B030D-6E8A-4147-A177-3AD203B41FA5}">
+                      <a16:colId xmlns:a16="http://schemas.microsoft.com/office/drawing/2014/main" val="20001"/>
+                    </a:ext>
+                  </a:extLst>
+                </a:gridCol>
+                <a:gridCol w="2011680">
+                  <a:extLst>
+                    <a:ext uri="{9D8B030D-6E8A-4147-A177-3AD203B41FA5}">
+                      <a16:colId xmlns:a16="http://schemas.microsoft.com/office/drawing/2014/main" val="20002"/>
+                    </a:ext>
+                  </a:extLst>
+                </a:gridCol>
+                <a:gridCol w="731520">
+                  <a:extLst>
+                    <a:ext uri="{9D8B030D-6E8A-4147-A177-3AD203B41FA5}">
+                      <a16:colId xmlns:a16="http://schemas.microsoft.com/office/drawing/2014/main" val="20003"/>
+                    </a:ext>
+                  </a:extLst>
+                </a:gridCol>
               </a:tblGrid>
               <a:tr h="265176">
                 <a:tc>
@@ -11383,7 +11181,7 @@
                     <a:bodyPr/>
                     <a:lstStyle/>
                     <a:p>
-                      <a:pPr indent="0" marL="0">
+                      <a:pPr marL="0" indent="0">
                         <a:buNone/>
                       </a:pPr>
                       <a:r>
@@ -11404,7 +11202,7 @@
                       </a:endParaRPr>
                     </a:p>
                   </a:txBody>
-                  <a:tcPr marL="45720" marR="45720" marT="45720" marB="45720" anchor="ctr">
+                  <a:tcPr marL="45720" marR="45720" anchor="ctr">
                     <a:lnL w="0" cap="flat" cmpd="sng" algn="ctr">
                       <a:noFill/>
                     </a:lnL>
@@ -11433,7 +11231,7 @@
                     <a:bodyPr/>
                     <a:lstStyle/>
                     <a:p>
-                      <a:pPr indent="0" marL="0">
+                      <a:pPr marL="0" indent="0">
                         <a:buNone/>
                       </a:pPr>
                       <a:r>
@@ -11454,7 +11252,7 @@
                       </a:endParaRPr>
                     </a:p>
                   </a:txBody>
-                  <a:tcPr marL="45720" marR="45720" marT="45720" marB="45720" anchor="ctr">
+                  <a:tcPr marL="45720" marR="45720" anchor="ctr">
                     <a:lnL w="0" cap="flat" cmpd="sng" algn="ctr">
                       <a:noFill/>
                     </a:lnL>
@@ -11483,7 +11281,7 @@
                     <a:bodyPr/>
                     <a:lstStyle/>
                     <a:p>
-                      <a:pPr indent="0" marL="0">
+                      <a:pPr marL="0" indent="0">
                         <a:buNone/>
                       </a:pPr>
                       <a:r>
@@ -11504,7 +11302,7 @@
                       </a:endParaRPr>
                     </a:p>
                   </a:txBody>
-                  <a:tcPr marL="45720" marR="45720" marT="45720" marB="45720" anchor="ctr">
+                  <a:tcPr marL="45720" marR="45720" anchor="ctr">
                     <a:lnL w="0" cap="flat" cmpd="sng" algn="ctr">
                       <a:noFill/>
                     </a:lnL>
@@ -11533,7 +11331,7 @@
                     <a:bodyPr/>
                     <a:lstStyle/>
                     <a:p>
-                      <a:pPr indent="0" marL="0">
+                      <a:pPr marL="0" indent="0">
                         <a:buNone/>
                       </a:pPr>
                       <a:r>
@@ -11554,7 +11352,7 @@
                       </a:endParaRPr>
                     </a:p>
                   </a:txBody>
-                  <a:tcPr marL="45720" marR="45720" marT="45720" marB="45720" anchor="ctr">
+                  <a:tcPr marL="45720" marR="45720" anchor="ctr">
                     <a:lnL w="0" cap="flat" cmpd="sng" algn="ctr">
                       <a:noFill/>
                     </a:lnL>
@@ -11578,6 +11376,11 @@
                     </a:solidFill>
                   </a:tcPr>
                 </a:tc>
+                <a:extLst>
+                  <a:ext uri="{0D108BD9-81ED-4DB2-BD59-A6C34878D82A}">
+                    <a16:rowId xmlns:a16="http://schemas.microsoft.com/office/drawing/2014/main" val="10000"/>
+                  </a:ext>
+                </a:extLst>
               </a:tr>
               <a:tr h="265176">
                 <a:tc>
@@ -11585,7 +11388,7 @@
                     <a:bodyPr/>
                     <a:lstStyle/>
                     <a:p>
-                      <a:pPr indent="0" marL="0">
+                      <a:pPr marL="0" indent="0">
                         <a:buNone/>
                       </a:pPr>
                       <a:r>
@@ -11606,15 +11409,21 @@
                       </a:endParaRPr>
                     </a:p>
                   </a:txBody>
-                  <a:tcPr marL="45720" marR="45720" marT="45720" marB="45720" anchor="ctr">
+                  <a:tcPr marL="45720" marR="45720" anchor="ctr">
                     <a:lnL w="0" cap="flat" cmpd="sng" algn="ctr">
                       <a:noFill/>
                     </a:lnL>
                     <a:lnR w="0" cap="flat" cmpd="sng" algn="ctr">
                       <a:noFill/>
                     </a:lnR>
-                    <a:lnT w="0" cap="flat" cmpd="sng" algn="ctr">
-                      <a:noFill/>
+                    <a:lnT w="12700" cap="flat" cmpd="sng" algn="ctr">
+                      <a:solidFill>
+                        <a:srgbClr val="0A0B0D"/>
+                      </a:solidFill>
+                      <a:prstDash val="solid"/>
+                      <a:round/>
+                      <a:headEnd type="none" w="med" len="med"/>
+                      <a:tailEnd type="none" w="med" len="med"/>
                     </a:lnT>
                     <a:lnB w="9525" cap="flat" cmpd="sng" algn="ctr">
                       <a:solidFill>
@@ -11632,7 +11441,7 @@
                     <a:bodyPr/>
                     <a:lstStyle/>
                     <a:p>
-                      <a:pPr indent="0" marL="0">
+                      <a:pPr marL="0" indent="0">
                         <a:buNone/>
                       </a:pPr>
                       <a:r>
@@ -11653,15 +11462,21 @@
                       </a:endParaRPr>
                     </a:p>
                   </a:txBody>
-                  <a:tcPr marL="45720" marR="45720" marT="45720" marB="45720" anchor="ctr">
+                  <a:tcPr marL="45720" marR="45720" anchor="ctr">
                     <a:lnL w="0" cap="flat" cmpd="sng" algn="ctr">
                       <a:noFill/>
                     </a:lnL>
                     <a:lnR w="0" cap="flat" cmpd="sng" algn="ctr">
                       <a:noFill/>
                     </a:lnR>
-                    <a:lnT w="0" cap="flat" cmpd="sng" algn="ctr">
-                      <a:noFill/>
+                    <a:lnT w="12700" cap="flat" cmpd="sng" algn="ctr">
+                      <a:solidFill>
+                        <a:srgbClr val="0A0B0D"/>
+                      </a:solidFill>
+                      <a:prstDash val="solid"/>
+                      <a:round/>
+                      <a:headEnd type="none" w="med" len="med"/>
+                      <a:tailEnd type="none" w="med" len="med"/>
                     </a:lnT>
                     <a:lnB w="9525" cap="flat" cmpd="sng" algn="ctr">
                       <a:solidFill>
@@ -11679,7 +11494,7 @@
                     <a:bodyPr/>
                     <a:lstStyle/>
                     <a:p>
-                      <a:pPr indent="0" marL="0">
+                      <a:pPr marL="0" indent="0">
                         <a:buNone/>
                       </a:pPr>
                       <a:r>
@@ -11700,15 +11515,21 @@
                       </a:endParaRPr>
                     </a:p>
                   </a:txBody>
-                  <a:tcPr marL="45720" marR="45720" marT="45720" marB="45720" anchor="ctr">
+                  <a:tcPr marL="45720" marR="45720" anchor="ctr">
                     <a:lnL w="0" cap="flat" cmpd="sng" algn="ctr">
                       <a:noFill/>
                     </a:lnL>
                     <a:lnR w="0" cap="flat" cmpd="sng" algn="ctr">
                       <a:noFill/>
                     </a:lnR>
-                    <a:lnT w="0" cap="flat" cmpd="sng" algn="ctr">
-                      <a:noFill/>
+                    <a:lnT w="12700" cap="flat" cmpd="sng" algn="ctr">
+                      <a:solidFill>
+                        <a:srgbClr val="0A0B0D"/>
+                      </a:solidFill>
+                      <a:prstDash val="solid"/>
+                      <a:round/>
+                      <a:headEnd type="none" w="med" len="med"/>
+                      <a:tailEnd type="none" w="med" len="med"/>
                     </a:lnT>
                     <a:lnB w="9525" cap="flat" cmpd="sng" algn="ctr">
                       <a:solidFill>
@@ -11726,7 +11547,7 @@
                     <a:bodyPr/>
                     <a:lstStyle/>
                     <a:p>
-                      <a:pPr indent="0" marL="0">
+                      <a:pPr marL="0" indent="0">
                         <a:buNone/>
                       </a:pPr>
                       <a:r>
@@ -11747,15 +11568,21 @@
                       </a:endParaRPr>
                     </a:p>
                   </a:txBody>
-                  <a:tcPr marL="45720" marR="45720" marT="45720" marB="45720" anchor="ctr">
+                  <a:tcPr marL="45720" marR="45720" anchor="ctr">
                     <a:lnL w="0" cap="flat" cmpd="sng" algn="ctr">
                       <a:noFill/>
                     </a:lnL>
                     <a:lnR w="0" cap="flat" cmpd="sng" algn="ctr">
                       <a:noFill/>
                     </a:lnR>
-                    <a:lnT w="0" cap="flat" cmpd="sng" algn="ctr">
-                      <a:noFill/>
+                    <a:lnT w="12700" cap="flat" cmpd="sng" algn="ctr">
+                      <a:solidFill>
+                        <a:srgbClr val="0A0B0D"/>
+                      </a:solidFill>
+                      <a:prstDash val="solid"/>
+                      <a:round/>
+                      <a:headEnd type="none" w="med" len="med"/>
+                      <a:tailEnd type="none" w="med" len="med"/>
                     </a:lnT>
                     <a:lnB w="9525" cap="flat" cmpd="sng" algn="ctr">
                       <a:solidFill>
@@ -11768,6 +11595,11 @@
                     </a:lnB>
                   </a:tcPr>
                 </a:tc>
+                <a:extLst>
+                  <a:ext uri="{0D108BD9-81ED-4DB2-BD59-A6C34878D82A}">
+                    <a16:rowId xmlns:a16="http://schemas.microsoft.com/office/drawing/2014/main" val="10001"/>
+                  </a:ext>
+                </a:extLst>
               </a:tr>
               <a:tr h="265176">
                 <a:tc>
@@ -11775,7 +11607,7 @@
                     <a:bodyPr/>
                     <a:lstStyle/>
                     <a:p>
-                      <a:pPr indent="0" marL="0">
+                      <a:pPr marL="0" indent="0">
                         <a:buNone/>
                       </a:pPr>
                       <a:r>
@@ -11796,15 +11628,21 @@
                       </a:endParaRPr>
                     </a:p>
                   </a:txBody>
-                  <a:tcPr marL="45720" marR="45720" marT="45720" marB="45720" anchor="ctr">
+                  <a:tcPr marL="45720" marR="45720" anchor="ctr">
                     <a:lnL w="0" cap="flat" cmpd="sng" algn="ctr">
                       <a:noFill/>
                     </a:lnL>
                     <a:lnR w="0" cap="flat" cmpd="sng" algn="ctr">
                       <a:noFill/>
                     </a:lnR>
-                    <a:lnT w="0" cap="flat" cmpd="sng" algn="ctr">
-                      <a:noFill/>
+                    <a:lnT w="9525" cap="flat" cmpd="sng" algn="ctr">
+                      <a:solidFill>
+                        <a:srgbClr val="DEE1E6"/>
+                      </a:solidFill>
+                      <a:prstDash val="solid"/>
+                      <a:round/>
+                      <a:headEnd type="none" w="med" len="med"/>
+                      <a:tailEnd type="none" w="med" len="med"/>
                     </a:lnT>
                     <a:lnB w="9525" cap="flat" cmpd="sng" algn="ctr">
                       <a:solidFill>
@@ -11822,7 +11660,7 @@
                     <a:bodyPr/>
                     <a:lstStyle/>
                     <a:p>
-                      <a:pPr indent="0" marL="0">
+                      <a:pPr marL="0" indent="0">
                         <a:buNone/>
                       </a:pPr>
                       <a:r>
@@ -11843,15 +11681,21 @@
                       </a:endParaRPr>
                     </a:p>
                   </a:txBody>
-                  <a:tcPr marL="45720" marR="45720" marT="45720" marB="45720" anchor="ctr">
+                  <a:tcPr marL="45720" marR="45720" anchor="ctr">
                     <a:lnL w="0" cap="flat" cmpd="sng" algn="ctr">
                       <a:noFill/>
                     </a:lnL>
                     <a:lnR w="0" cap="flat" cmpd="sng" algn="ctr">
                       <a:noFill/>
                     </a:lnR>
-                    <a:lnT w="0" cap="flat" cmpd="sng" algn="ctr">
-                      <a:noFill/>
+                    <a:lnT w="9525" cap="flat" cmpd="sng" algn="ctr">
+                      <a:solidFill>
+                        <a:srgbClr val="DEE1E6"/>
+                      </a:solidFill>
+                      <a:prstDash val="solid"/>
+                      <a:round/>
+                      <a:headEnd type="none" w="med" len="med"/>
+                      <a:tailEnd type="none" w="med" len="med"/>
                     </a:lnT>
                     <a:lnB w="9525" cap="flat" cmpd="sng" algn="ctr">
                       <a:solidFill>
@@ -11869,7 +11713,7 @@
                     <a:bodyPr/>
                     <a:lstStyle/>
                     <a:p>
-                      <a:pPr indent="0" marL="0">
+                      <a:pPr marL="0" indent="0">
                         <a:buNone/>
                       </a:pPr>
                       <a:r>
@@ -11890,15 +11734,21 @@
                       </a:endParaRPr>
                     </a:p>
                   </a:txBody>
-                  <a:tcPr marL="45720" marR="45720" marT="45720" marB="45720" anchor="ctr">
+                  <a:tcPr marL="45720" marR="45720" anchor="ctr">
                     <a:lnL w="0" cap="flat" cmpd="sng" algn="ctr">
                       <a:noFill/>
                     </a:lnL>
                     <a:lnR w="0" cap="flat" cmpd="sng" algn="ctr">
                       <a:noFill/>
                     </a:lnR>
-                    <a:lnT w="0" cap="flat" cmpd="sng" algn="ctr">
-                      <a:noFill/>
+                    <a:lnT w="9525" cap="flat" cmpd="sng" algn="ctr">
+                      <a:solidFill>
+                        <a:srgbClr val="DEE1E6"/>
+                      </a:solidFill>
+                      <a:prstDash val="solid"/>
+                      <a:round/>
+                      <a:headEnd type="none" w="med" len="med"/>
+                      <a:tailEnd type="none" w="med" len="med"/>
                     </a:lnT>
                     <a:lnB w="9525" cap="flat" cmpd="sng" algn="ctr">
                       <a:solidFill>
@@ -11916,7 +11766,7 @@
                     <a:bodyPr/>
                     <a:lstStyle/>
                     <a:p>
-                      <a:pPr indent="0" marL="0">
+                      <a:pPr marL="0" indent="0">
                         <a:buNone/>
                       </a:pPr>
                       <a:r>
@@ -11937,15 +11787,21 @@
                       </a:endParaRPr>
                     </a:p>
                   </a:txBody>
-                  <a:tcPr marL="45720" marR="45720" marT="45720" marB="45720" anchor="ctr">
+                  <a:tcPr marL="45720" marR="45720" anchor="ctr">
                     <a:lnL w="0" cap="flat" cmpd="sng" algn="ctr">
                       <a:noFill/>
                     </a:lnL>
                     <a:lnR w="0" cap="flat" cmpd="sng" algn="ctr">
                       <a:noFill/>
                     </a:lnR>
-                    <a:lnT w="0" cap="flat" cmpd="sng" algn="ctr">
-                      <a:noFill/>
+                    <a:lnT w="9525" cap="flat" cmpd="sng" algn="ctr">
+                      <a:solidFill>
+                        <a:srgbClr val="DEE1E6"/>
+                      </a:solidFill>
+                      <a:prstDash val="solid"/>
+                      <a:round/>
+                      <a:headEnd type="none" w="med" len="med"/>
+                      <a:tailEnd type="none" w="med" len="med"/>
                     </a:lnT>
                     <a:lnB w="9525" cap="flat" cmpd="sng" algn="ctr">
                       <a:solidFill>
@@ -11958,6 +11814,11 @@
                     </a:lnB>
                   </a:tcPr>
                 </a:tc>
+                <a:extLst>
+                  <a:ext uri="{0D108BD9-81ED-4DB2-BD59-A6C34878D82A}">
+                    <a16:rowId xmlns:a16="http://schemas.microsoft.com/office/drawing/2014/main" val="10002"/>
+                  </a:ext>
+                </a:extLst>
               </a:tr>
               <a:tr h="265176">
                 <a:tc>
@@ -11965,7 +11826,7 @@
                     <a:bodyPr/>
                     <a:lstStyle/>
                     <a:p>
-                      <a:pPr indent="0" marL="0">
+                      <a:pPr marL="0" indent="0">
                         <a:buNone/>
                       </a:pPr>
                       <a:r>
@@ -11986,15 +11847,21 @@
                       </a:endParaRPr>
                     </a:p>
                   </a:txBody>
-                  <a:tcPr marL="45720" marR="45720" marT="45720" marB="45720" anchor="ctr">
+                  <a:tcPr marL="45720" marR="45720" anchor="ctr">
                     <a:lnL w="0" cap="flat" cmpd="sng" algn="ctr">
                       <a:noFill/>
                     </a:lnL>
                     <a:lnR w="0" cap="flat" cmpd="sng" algn="ctr">
                       <a:noFill/>
                     </a:lnR>
-                    <a:lnT w="0" cap="flat" cmpd="sng" algn="ctr">
-                      <a:noFill/>
+                    <a:lnT w="9525" cap="flat" cmpd="sng" algn="ctr">
+                      <a:solidFill>
+                        <a:srgbClr val="DEE1E6"/>
+                      </a:solidFill>
+                      <a:prstDash val="solid"/>
+                      <a:round/>
+                      <a:headEnd type="none" w="med" len="med"/>
+                      <a:tailEnd type="none" w="med" len="med"/>
                     </a:lnT>
                     <a:lnB w="9525" cap="flat" cmpd="sng" algn="ctr">
                       <a:solidFill>
@@ -12012,7 +11879,7 @@
                     <a:bodyPr/>
                     <a:lstStyle/>
                     <a:p>
-                      <a:pPr indent="0" marL="0">
+                      <a:pPr marL="0" indent="0">
                         <a:buNone/>
                       </a:pPr>
                       <a:r>
@@ -12033,15 +11900,21 @@
                       </a:endParaRPr>
                     </a:p>
                   </a:txBody>
-                  <a:tcPr marL="45720" marR="45720" marT="45720" marB="45720" anchor="ctr">
+                  <a:tcPr marL="45720" marR="45720" anchor="ctr">
                     <a:lnL w="0" cap="flat" cmpd="sng" algn="ctr">
                       <a:noFill/>
                     </a:lnL>
                     <a:lnR w="0" cap="flat" cmpd="sng" algn="ctr">
                       <a:noFill/>
                     </a:lnR>
-                    <a:lnT w="0" cap="flat" cmpd="sng" algn="ctr">
-                      <a:noFill/>
+                    <a:lnT w="9525" cap="flat" cmpd="sng" algn="ctr">
+                      <a:solidFill>
+                        <a:srgbClr val="DEE1E6"/>
+                      </a:solidFill>
+                      <a:prstDash val="solid"/>
+                      <a:round/>
+                      <a:headEnd type="none" w="med" len="med"/>
+                      <a:tailEnd type="none" w="med" len="med"/>
                     </a:lnT>
                     <a:lnB w="9525" cap="flat" cmpd="sng" algn="ctr">
                       <a:solidFill>
@@ -12059,7 +11932,7 @@
                     <a:bodyPr/>
                     <a:lstStyle/>
                     <a:p>
-                      <a:pPr indent="0" marL="0">
+                      <a:pPr marL="0" indent="0">
                         <a:buNone/>
                       </a:pPr>
                       <a:r>
@@ -12080,15 +11953,21 @@
                       </a:endParaRPr>
                     </a:p>
                   </a:txBody>
-                  <a:tcPr marL="45720" marR="45720" marT="45720" marB="45720" anchor="ctr">
+                  <a:tcPr marL="45720" marR="45720" anchor="ctr">
                     <a:lnL w="0" cap="flat" cmpd="sng" algn="ctr">
                       <a:noFill/>
                     </a:lnL>
                     <a:lnR w="0" cap="flat" cmpd="sng" algn="ctr">
                       <a:noFill/>
                     </a:lnR>
-                    <a:lnT w="0" cap="flat" cmpd="sng" algn="ctr">
-                      <a:noFill/>
+                    <a:lnT w="9525" cap="flat" cmpd="sng" algn="ctr">
+                      <a:solidFill>
+                        <a:srgbClr val="DEE1E6"/>
+                      </a:solidFill>
+                      <a:prstDash val="solid"/>
+                      <a:round/>
+                      <a:headEnd type="none" w="med" len="med"/>
+                      <a:tailEnd type="none" w="med" len="med"/>
                     </a:lnT>
                     <a:lnB w="9525" cap="flat" cmpd="sng" algn="ctr">
                       <a:solidFill>
@@ -12106,7 +11985,7 @@
                     <a:bodyPr/>
                     <a:lstStyle/>
                     <a:p>
-                      <a:pPr indent="0" marL="0">
+                      <a:pPr marL="0" indent="0">
                         <a:buNone/>
                       </a:pPr>
                       <a:r>
@@ -12127,15 +12006,21 @@
                       </a:endParaRPr>
                     </a:p>
                   </a:txBody>
-                  <a:tcPr marL="45720" marR="45720" marT="45720" marB="45720" anchor="ctr">
+                  <a:tcPr marL="45720" marR="45720" anchor="ctr">
                     <a:lnL w="0" cap="flat" cmpd="sng" algn="ctr">
                       <a:noFill/>
                     </a:lnL>
                     <a:lnR w="0" cap="flat" cmpd="sng" algn="ctr">
                       <a:noFill/>
                     </a:lnR>
-                    <a:lnT w="0" cap="flat" cmpd="sng" algn="ctr">
-                      <a:noFill/>
+                    <a:lnT w="9525" cap="flat" cmpd="sng" algn="ctr">
+                      <a:solidFill>
+                        <a:srgbClr val="DEE1E6"/>
+                      </a:solidFill>
+                      <a:prstDash val="solid"/>
+                      <a:round/>
+                      <a:headEnd type="none" w="med" len="med"/>
+                      <a:tailEnd type="none" w="med" len="med"/>
                     </a:lnT>
                     <a:lnB w="9525" cap="flat" cmpd="sng" algn="ctr">
                       <a:solidFill>
@@ -12148,6 +12033,11 @@
                     </a:lnB>
                   </a:tcPr>
                 </a:tc>
+                <a:extLst>
+                  <a:ext uri="{0D108BD9-81ED-4DB2-BD59-A6C34878D82A}">
+                    <a16:rowId xmlns:a16="http://schemas.microsoft.com/office/drawing/2014/main" val="10003"/>
+                  </a:ext>
+                </a:extLst>
               </a:tr>
               <a:tr h="265176">
                 <a:tc>
@@ -12155,7 +12045,7 @@
                     <a:bodyPr/>
                     <a:lstStyle/>
                     <a:p>
-                      <a:pPr indent="0" marL="0">
+                      <a:pPr marL="0" indent="0">
                         <a:buNone/>
                       </a:pPr>
                       <a:r>
@@ -12176,15 +12066,21 @@
                       </a:endParaRPr>
                     </a:p>
                   </a:txBody>
-                  <a:tcPr marL="45720" marR="45720" marT="45720" marB="45720" anchor="ctr">
+                  <a:tcPr marL="45720" marR="45720" anchor="ctr">
                     <a:lnL w="0" cap="flat" cmpd="sng" algn="ctr">
                       <a:noFill/>
                     </a:lnL>
                     <a:lnR w="0" cap="flat" cmpd="sng" algn="ctr">
                       <a:noFill/>
                     </a:lnR>
-                    <a:lnT w="0" cap="flat" cmpd="sng" algn="ctr">
-                      <a:noFill/>
+                    <a:lnT w="9525" cap="flat" cmpd="sng" algn="ctr">
+                      <a:solidFill>
+                        <a:srgbClr val="DEE1E6"/>
+                      </a:solidFill>
+                      <a:prstDash val="solid"/>
+                      <a:round/>
+                      <a:headEnd type="none" w="med" len="med"/>
+                      <a:tailEnd type="none" w="med" len="med"/>
                     </a:lnT>
                     <a:lnB w="9525" cap="flat" cmpd="sng" algn="ctr">
                       <a:solidFill>
@@ -12202,7 +12098,7 @@
                     <a:bodyPr/>
                     <a:lstStyle/>
                     <a:p>
-                      <a:pPr indent="0" marL="0">
+                      <a:pPr marL="0" indent="0">
                         <a:buNone/>
                       </a:pPr>
                       <a:r>
@@ -12223,15 +12119,21 @@
                       </a:endParaRPr>
                     </a:p>
                   </a:txBody>
-                  <a:tcPr marL="45720" marR="45720" marT="45720" marB="45720" anchor="ctr">
+                  <a:tcPr marL="45720" marR="45720" anchor="ctr">
                     <a:lnL w="0" cap="flat" cmpd="sng" algn="ctr">
                       <a:noFill/>
                     </a:lnL>
                     <a:lnR w="0" cap="flat" cmpd="sng" algn="ctr">
                       <a:noFill/>
                     </a:lnR>
-                    <a:lnT w="0" cap="flat" cmpd="sng" algn="ctr">
-                      <a:noFill/>
+                    <a:lnT w="9525" cap="flat" cmpd="sng" algn="ctr">
+                      <a:solidFill>
+                        <a:srgbClr val="DEE1E6"/>
+                      </a:solidFill>
+                      <a:prstDash val="solid"/>
+                      <a:round/>
+                      <a:headEnd type="none" w="med" len="med"/>
+                      <a:tailEnd type="none" w="med" len="med"/>
                     </a:lnT>
                     <a:lnB w="9525" cap="flat" cmpd="sng" algn="ctr">
                       <a:solidFill>
@@ -12249,7 +12151,7 @@
                     <a:bodyPr/>
                     <a:lstStyle/>
                     <a:p>
-                      <a:pPr indent="0" marL="0">
+                      <a:pPr marL="0" indent="0">
                         <a:buNone/>
                       </a:pPr>
                       <a:r>
@@ -12270,15 +12172,21 @@
                       </a:endParaRPr>
                     </a:p>
                   </a:txBody>
-                  <a:tcPr marL="45720" marR="45720" marT="45720" marB="45720" anchor="ctr">
+                  <a:tcPr marL="45720" marR="45720" anchor="ctr">
                     <a:lnL w="0" cap="flat" cmpd="sng" algn="ctr">
                       <a:noFill/>
                     </a:lnL>
                     <a:lnR w="0" cap="flat" cmpd="sng" algn="ctr">
                       <a:noFill/>
                     </a:lnR>
-                    <a:lnT w="0" cap="flat" cmpd="sng" algn="ctr">
-                      <a:noFill/>
+                    <a:lnT w="9525" cap="flat" cmpd="sng" algn="ctr">
+                      <a:solidFill>
+                        <a:srgbClr val="DEE1E6"/>
+                      </a:solidFill>
+                      <a:prstDash val="solid"/>
+                      <a:round/>
+                      <a:headEnd type="none" w="med" len="med"/>
+                      <a:tailEnd type="none" w="med" len="med"/>
                     </a:lnT>
                     <a:lnB w="9525" cap="flat" cmpd="sng" algn="ctr">
                       <a:solidFill>
@@ -12296,7 +12204,7 @@
                     <a:bodyPr/>
                     <a:lstStyle/>
                     <a:p>
-                      <a:pPr indent="0" marL="0">
+                      <a:pPr marL="0" indent="0">
                         <a:buNone/>
                       </a:pPr>
                       <a:r>
@@ -12317,15 +12225,21 @@
                       </a:endParaRPr>
                     </a:p>
                   </a:txBody>
-                  <a:tcPr marL="45720" marR="45720" marT="45720" marB="45720" anchor="ctr">
+                  <a:tcPr marL="45720" marR="45720" anchor="ctr">
                     <a:lnL w="0" cap="flat" cmpd="sng" algn="ctr">
                       <a:noFill/>
                     </a:lnL>
                     <a:lnR w="0" cap="flat" cmpd="sng" algn="ctr">
                       <a:noFill/>
                     </a:lnR>
-                    <a:lnT w="0" cap="flat" cmpd="sng" algn="ctr">
-                      <a:noFill/>
+                    <a:lnT w="9525" cap="flat" cmpd="sng" algn="ctr">
+                      <a:solidFill>
+                        <a:srgbClr val="DEE1E6"/>
+                      </a:solidFill>
+                      <a:prstDash val="solid"/>
+                      <a:round/>
+                      <a:headEnd type="none" w="med" len="med"/>
+                      <a:tailEnd type="none" w="med" len="med"/>
                     </a:lnT>
                     <a:lnB w="9525" cap="flat" cmpd="sng" algn="ctr">
                       <a:solidFill>
@@ -12338,6 +12252,11 @@
                     </a:lnB>
                   </a:tcPr>
                 </a:tc>
+                <a:extLst>
+                  <a:ext uri="{0D108BD9-81ED-4DB2-BD59-A6C34878D82A}">
+                    <a16:rowId xmlns:a16="http://schemas.microsoft.com/office/drawing/2014/main" val="10004"/>
+                  </a:ext>
+                </a:extLst>
               </a:tr>
               <a:tr h="265176">
                 <a:tc>
@@ -12345,7 +12264,7 @@
                     <a:bodyPr/>
                     <a:lstStyle/>
                     <a:p>
-                      <a:pPr indent="0" marL="0">
+                      <a:pPr marL="0" indent="0">
                         <a:buNone/>
                       </a:pPr>
                       <a:r>
@@ -12366,15 +12285,21 @@
                       </a:endParaRPr>
                     </a:p>
                   </a:txBody>
-                  <a:tcPr marL="45720" marR="45720" marT="45720" marB="45720" anchor="ctr">
+                  <a:tcPr marL="45720" marR="45720" anchor="ctr">
                     <a:lnL w="0" cap="flat" cmpd="sng" algn="ctr">
                       <a:noFill/>
                     </a:lnL>
                     <a:lnR w="0" cap="flat" cmpd="sng" algn="ctr">
                       <a:noFill/>
                     </a:lnR>
-                    <a:lnT w="0" cap="flat" cmpd="sng" algn="ctr">
-                      <a:noFill/>
+                    <a:lnT w="9525" cap="flat" cmpd="sng" algn="ctr">
+                      <a:solidFill>
+                        <a:srgbClr val="DEE1E6"/>
+                      </a:solidFill>
+                      <a:prstDash val="solid"/>
+                      <a:round/>
+                      <a:headEnd type="none" w="med" len="med"/>
+                      <a:tailEnd type="none" w="med" len="med"/>
                     </a:lnT>
                     <a:lnB w="9525" cap="flat" cmpd="sng" algn="ctr">
                       <a:solidFill>
@@ -12392,7 +12317,7 @@
                     <a:bodyPr/>
                     <a:lstStyle/>
                     <a:p>
-                      <a:pPr indent="0" marL="0">
+                      <a:pPr marL="0" indent="0">
                         <a:buNone/>
                       </a:pPr>
                       <a:r>
@@ -12413,15 +12338,21 @@
                       </a:endParaRPr>
                     </a:p>
                   </a:txBody>
-                  <a:tcPr marL="45720" marR="45720" marT="45720" marB="45720" anchor="ctr">
+                  <a:tcPr marL="45720" marR="45720" anchor="ctr">
                     <a:lnL w="0" cap="flat" cmpd="sng" algn="ctr">
                       <a:noFill/>
                     </a:lnL>
                     <a:lnR w="0" cap="flat" cmpd="sng" algn="ctr">
                       <a:noFill/>
                     </a:lnR>
-                    <a:lnT w="0" cap="flat" cmpd="sng" algn="ctr">
-                      <a:noFill/>
+                    <a:lnT w="9525" cap="flat" cmpd="sng" algn="ctr">
+                      <a:solidFill>
+                        <a:srgbClr val="DEE1E6"/>
+                      </a:solidFill>
+                      <a:prstDash val="solid"/>
+                      <a:round/>
+                      <a:headEnd type="none" w="med" len="med"/>
+                      <a:tailEnd type="none" w="med" len="med"/>
                     </a:lnT>
                     <a:lnB w="9525" cap="flat" cmpd="sng" algn="ctr">
                       <a:solidFill>
@@ -12439,7 +12370,7 @@
                     <a:bodyPr/>
                     <a:lstStyle/>
                     <a:p>
-                      <a:pPr indent="0" marL="0">
+                      <a:pPr marL="0" indent="0">
                         <a:buNone/>
                       </a:pPr>
                       <a:r>
@@ -12460,15 +12391,21 @@
                       </a:endParaRPr>
                     </a:p>
                   </a:txBody>
-                  <a:tcPr marL="45720" marR="45720" marT="45720" marB="45720" anchor="ctr">
+                  <a:tcPr marL="45720" marR="45720" anchor="ctr">
                     <a:lnL w="0" cap="flat" cmpd="sng" algn="ctr">
                       <a:noFill/>
                     </a:lnL>
                     <a:lnR w="0" cap="flat" cmpd="sng" algn="ctr">
                       <a:noFill/>
                     </a:lnR>
-                    <a:lnT w="0" cap="flat" cmpd="sng" algn="ctr">
-                      <a:noFill/>
+                    <a:lnT w="9525" cap="flat" cmpd="sng" algn="ctr">
+                      <a:solidFill>
+                        <a:srgbClr val="DEE1E6"/>
+                      </a:solidFill>
+                      <a:prstDash val="solid"/>
+                      <a:round/>
+                      <a:headEnd type="none" w="med" len="med"/>
+                      <a:tailEnd type="none" w="med" len="med"/>
                     </a:lnT>
                     <a:lnB w="9525" cap="flat" cmpd="sng" algn="ctr">
                       <a:solidFill>
@@ -12486,7 +12423,7 @@
                     <a:bodyPr/>
                     <a:lstStyle/>
                     <a:p>
-                      <a:pPr indent="0" marL="0">
+                      <a:pPr marL="0" indent="0">
                         <a:buNone/>
                       </a:pPr>
                       <a:r>
@@ -12507,15 +12444,21 @@
                       </a:endParaRPr>
                     </a:p>
                   </a:txBody>
-                  <a:tcPr marL="45720" marR="45720" marT="45720" marB="45720" anchor="ctr">
+                  <a:tcPr marL="45720" marR="45720" anchor="ctr">
                     <a:lnL w="0" cap="flat" cmpd="sng" algn="ctr">
                       <a:noFill/>
                     </a:lnL>
                     <a:lnR w="0" cap="flat" cmpd="sng" algn="ctr">
                       <a:noFill/>
                     </a:lnR>
-                    <a:lnT w="0" cap="flat" cmpd="sng" algn="ctr">
-                      <a:noFill/>
+                    <a:lnT w="9525" cap="flat" cmpd="sng" algn="ctr">
+                      <a:solidFill>
+                        <a:srgbClr val="DEE1E6"/>
+                      </a:solidFill>
+                      <a:prstDash val="solid"/>
+                      <a:round/>
+                      <a:headEnd type="none" w="med" len="med"/>
+                      <a:tailEnd type="none" w="med" len="med"/>
                     </a:lnT>
                     <a:lnB w="9525" cap="flat" cmpd="sng" algn="ctr">
                       <a:solidFill>
@@ -12528,6 +12471,11 @@
                     </a:lnB>
                   </a:tcPr>
                 </a:tc>
+                <a:extLst>
+                  <a:ext uri="{0D108BD9-81ED-4DB2-BD59-A6C34878D82A}">
+                    <a16:rowId xmlns:a16="http://schemas.microsoft.com/office/drawing/2014/main" val="10005"/>
+                  </a:ext>
+                </a:extLst>
               </a:tr>
               <a:tr h="265176">
                 <a:tc>
@@ -12535,7 +12483,7 @@
                     <a:bodyPr/>
                     <a:lstStyle/>
                     <a:p>
-                      <a:pPr indent="0" marL="0">
+                      <a:pPr marL="0" indent="0">
                         <a:buNone/>
                       </a:pPr>
                       <a:r>
@@ -12556,15 +12504,21 @@
                       </a:endParaRPr>
                     </a:p>
                   </a:txBody>
-                  <a:tcPr marL="45720" marR="45720" marT="45720" marB="45720" anchor="ctr">
+                  <a:tcPr marL="45720" marR="45720" anchor="ctr">
                     <a:lnL w="0" cap="flat" cmpd="sng" algn="ctr">
                       <a:noFill/>
                     </a:lnL>
                     <a:lnR w="0" cap="flat" cmpd="sng" algn="ctr">
                       <a:noFill/>
                     </a:lnR>
-                    <a:lnT w="0" cap="flat" cmpd="sng" algn="ctr">
-                      <a:noFill/>
+                    <a:lnT w="9525" cap="flat" cmpd="sng" algn="ctr">
+                      <a:solidFill>
+                        <a:srgbClr val="DEE1E6"/>
+                      </a:solidFill>
+                      <a:prstDash val="solid"/>
+                      <a:round/>
+                      <a:headEnd type="none" w="med" len="med"/>
+                      <a:tailEnd type="none" w="med" len="med"/>
                     </a:lnT>
                     <a:lnB w="9525" cap="flat" cmpd="sng" algn="ctr">
                       <a:solidFill>
@@ -12582,7 +12536,7 @@
                     <a:bodyPr/>
                     <a:lstStyle/>
                     <a:p>
-                      <a:pPr indent="0" marL="0">
+                      <a:pPr marL="0" indent="0">
                         <a:buNone/>
                       </a:pPr>
                       <a:r>
@@ -12603,15 +12557,21 @@
                       </a:endParaRPr>
                     </a:p>
                   </a:txBody>
-                  <a:tcPr marL="45720" marR="45720" marT="45720" marB="45720" anchor="ctr">
+                  <a:tcPr marL="45720" marR="45720" anchor="ctr">
                     <a:lnL w="0" cap="flat" cmpd="sng" algn="ctr">
                       <a:noFill/>
                     </a:lnL>
                     <a:lnR w="0" cap="flat" cmpd="sng" algn="ctr">
                       <a:noFill/>
                     </a:lnR>
-                    <a:lnT w="0" cap="flat" cmpd="sng" algn="ctr">
-                      <a:noFill/>
+                    <a:lnT w="9525" cap="flat" cmpd="sng" algn="ctr">
+                      <a:solidFill>
+                        <a:srgbClr val="DEE1E6"/>
+                      </a:solidFill>
+                      <a:prstDash val="solid"/>
+                      <a:round/>
+                      <a:headEnd type="none" w="med" len="med"/>
+                      <a:tailEnd type="none" w="med" len="med"/>
                     </a:lnT>
                     <a:lnB w="9525" cap="flat" cmpd="sng" algn="ctr">
                       <a:solidFill>
@@ -12629,7 +12589,7 @@
                     <a:bodyPr/>
                     <a:lstStyle/>
                     <a:p>
-                      <a:pPr indent="0" marL="0">
+                      <a:pPr marL="0" indent="0">
                         <a:buNone/>
                       </a:pPr>
                       <a:r>
@@ -12650,15 +12610,21 @@
                       </a:endParaRPr>
                     </a:p>
                   </a:txBody>
-                  <a:tcPr marL="45720" marR="45720" marT="45720" marB="45720" anchor="ctr">
+                  <a:tcPr marL="45720" marR="45720" anchor="ctr">
                     <a:lnL w="0" cap="flat" cmpd="sng" algn="ctr">
                       <a:noFill/>
                     </a:lnL>
                     <a:lnR w="0" cap="flat" cmpd="sng" algn="ctr">
                       <a:noFill/>
                     </a:lnR>
-                    <a:lnT w="0" cap="flat" cmpd="sng" algn="ctr">
-                      <a:noFill/>
+                    <a:lnT w="9525" cap="flat" cmpd="sng" algn="ctr">
+                      <a:solidFill>
+                        <a:srgbClr val="DEE1E6"/>
+                      </a:solidFill>
+                      <a:prstDash val="solid"/>
+                      <a:round/>
+                      <a:headEnd type="none" w="med" len="med"/>
+                      <a:tailEnd type="none" w="med" len="med"/>
                     </a:lnT>
                     <a:lnB w="9525" cap="flat" cmpd="sng" algn="ctr">
                       <a:solidFill>
@@ -12676,7 +12642,7 @@
                     <a:bodyPr/>
                     <a:lstStyle/>
                     <a:p>
-                      <a:pPr indent="0" marL="0">
+                      <a:pPr marL="0" indent="0">
                         <a:buNone/>
                       </a:pPr>
                       <a:r>
@@ -12697,15 +12663,21 @@
                       </a:endParaRPr>
                     </a:p>
                   </a:txBody>
-                  <a:tcPr marL="45720" marR="45720" marT="45720" marB="45720" anchor="ctr">
+                  <a:tcPr marL="45720" marR="45720" anchor="ctr">
                     <a:lnL w="0" cap="flat" cmpd="sng" algn="ctr">
                       <a:noFill/>
                     </a:lnL>
                     <a:lnR w="0" cap="flat" cmpd="sng" algn="ctr">
                       <a:noFill/>
                     </a:lnR>
-                    <a:lnT w="0" cap="flat" cmpd="sng" algn="ctr">
-                      <a:noFill/>
+                    <a:lnT w="9525" cap="flat" cmpd="sng" algn="ctr">
+                      <a:solidFill>
+                        <a:srgbClr val="DEE1E6"/>
+                      </a:solidFill>
+                      <a:prstDash val="solid"/>
+                      <a:round/>
+                      <a:headEnd type="none" w="med" len="med"/>
+                      <a:tailEnd type="none" w="med" len="med"/>
                     </a:lnT>
                     <a:lnB w="9525" cap="flat" cmpd="sng" algn="ctr">
                       <a:solidFill>
@@ -12718,6 +12690,11 @@
                     </a:lnB>
                   </a:tcPr>
                 </a:tc>
+                <a:extLst>
+                  <a:ext uri="{0D108BD9-81ED-4DB2-BD59-A6C34878D82A}">
+                    <a16:rowId xmlns:a16="http://schemas.microsoft.com/office/drawing/2014/main" val="10006"/>
+                  </a:ext>
+                </a:extLst>
               </a:tr>
               <a:tr h="265176">
                 <a:tc>
@@ -12725,7 +12702,7 @@
                     <a:bodyPr/>
                     <a:lstStyle/>
                     <a:p>
-                      <a:pPr indent="0" marL="0">
+                      <a:pPr marL="0" indent="0">
                         <a:buNone/>
                       </a:pPr>
                       <a:r>
@@ -12746,15 +12723,21 @@
                       </a:endParaRPr>
                     </a:p>
                   </a:txBody>
-                  <a:tcPr marL="45720" marR="45720" marT="45720" marB="45720" anchor="ctr">
+                  <a:tcPr marL="45720" marR="45720" anchor="ctr">
                     <a:lnL w="0" cap="flat" cmpd="sng" algn="ctr">
                       <a:noFill/>
                     </a:lnL>
                     <a:lnR w="0" cap="flat" cmpd="sng" algn="ctr">
                       <a:noFill/>
                     </a:lnR>
-                    <a:lnT w="0" cap="flat" cmpd="sng" algn="ctr">
-                      <a:noFill/>
+                    <a:lnT w="9525" cap="flat" cmpd="sng" algn="ctr">
+                      <a:solidFill>
+                        <a:srgbClr val="DEE1E6"/>
+                      </a:solidFill>
+                      <a:prstDash val="solid"/>
+                      <a:round/>
+                      <a:headEnd type="none" w="med" len="med"/>
+                      <a:tailEnd type="none" w="med" len="med"/>
                     </a:lnT>
                     <a:lnB w="9525" cap="flat" cmpd="sng" algn="ctr">
                       <a:solidFill>
@@ -12772,7 +12755,7 @@
                     <a:bodyPr/>
                     <a:lstStyle/>
                     <a:p>
-                      <a:pPr indent="0" marL="0">
+                      <a:pPr marL="0" indent="0">
                         <a:buNone/>
                       </a:pPr>
                       <a:r>
@@ -12793,15 +12776,21 @@
                       </a:endParaRPr>
                     </a:p>
                   </a:txBody>
-                  <a:tcPr marL="45720" marR="45720" marT="45720" marB="45720" anchor="ctr">
+                  <a:tcPr marL="45720" marR="45720" anchor="ctr">
                     <a:lnL w="0" cap="flat" cmpd="sng" algn="ctr">
                       <a:noFill/>
                     </a:lnL>
                     <a:lnR w="0" cap="flat" cmpd="sng" algn="ctr">
                       <a:noFill/>
                     </a:lnR>
-                    <a:lnT w="0" cap="flat" cmpd="sng" algn="ctr">
-                      <a:noFill/>
+                    <a:lnT w="9525" cap="flat" cmpd="sng" algn="ctr">
+                      <a:solidFill>
+                        <a:srgbClr val="DEE1E6"/>
+                      </a:solidFill>
+                      <a:prstDash val="solid"/>
+                      <a:round/>
+                      <a:headEnd type="none" w="med" len="med"/>
+                      <a:tailEnd type="none" w="med" len="med"/>
                     </a:lnT>
                     <a:lnB w="9525" cap="flat" cmpd="sng" algn="ctr">
                       <a:solidFill>
@@ -12819,7 +12808,7 @@
                     <a:bodyPr/>
                     <a:lstStyle/>
                     <a:p>
-                      <a:pPr indent="0" marL="0">
+                      <a:pPr marL="0" indent="0">
                         <a:buNone/>
                       </a:pPr>
                       <a:r>
@@ -12840,15 +12829,21 @@
                       </a:endParaRPr>
                     </a:p>
                   </a:txBody>
-                  <a:tcPr marL="45720" marR="45720" marT="45720" marB="45720" anchor="ctr">
+                  <a:tcPr marL="45720" marR="45720" anchor="ctr">
                     <a:lnL w="0" cap="flat" cmpd="sng" algn="ctr">
                       <a:noFill/>
                     </a:lnL>
                     <a:lnR w="0" cap="flat" cmpd="sng" algn="ctr">
                       <a:noFill/>
                     </a:lnR>
-                    <a:lnT w="0" cap="flat" cmpd="sng" algn="ctr">
-                      <a:noFill/>
+                    <a:lnT w="9525" cap="flat" cmpd="sng" algn="ctr">
+                      <a:solidFill>
+                        <a:srgbClr val="DEE1E6"/>
+                      </a:solidFill>
+                      <a:prstDash val="solid"/>
+                      <a:round/>
+                      <a:headEnd type="none" w="med" len="med"/>
+                      <a:tailEnd type="none" w="med" len="med"/>
                     </a:lnT>
                     <a:lnB w="9525" cap="flat" cmpd="sng" algn="ctr">
                       <a:solidFill>
@@ -12866,7 +12861,7 @@
                     <a:bodyPr/>
                     <a:lstStyle/>
                     <a:p>
-                      <a:pPr indent="0" marL="0">
+                      <a:pPr marL="0" indent="0">
                         <a:buNone/>
                       </a:pPr>
                       <a:r>
@@ -12887,15 +12882,21 @@
                       </a:endParaRPr>
                     </a:p>
                   </a:txBody>
-                  <a:tcPr marL="45720" marR="45720" marT="45720" marB="45720" anchor="ctr">
+                  <a:tcPr marL="45720" marR="45720" anchor="ctr">
                     <a:lnL w="0" cap="flat" cmpd="sng" algn="ctr">
                       <a:noFill/>
                     </a:lnL>
                     <a:lnR w="0" cap="flat" cmpd="sng" algn="ctr">
                       <a:noFill/>
                     </a:lnR>
-                    <a:lnT w="0" cap="flat" cmpd="sng" algn="ctr">
-                      <a:noFill/>
+                    <a:lnT w="9525" cap="flat" cmpd="sng" algn="ctr">
+                      <a:solidFill>
+                        <a:srgbClr val="DEE1E6"/>
+                      </a:solidFill>
+                      <a:prstDash val="solid"/>
+                      <a:round/>
+                      <a:headEnd type="none" w="med" len="med"/>
+                      <a:tailEnd type="none" w="med" len="med"/>
                     </a:lnT>
                     <a:lnB w="9525" cap="flat" cmpd="sng" algn="ctr">
                       <a:solidFill>
@@ -12908,6 +12909,11 @@
                     </a:lnB>
                   </a:tcPr>
                 </a:tc>
+                <a:extLst>
+                  <a:ext uri="{0D108BD9-81ED-4DB2-BD59-A6C34878D82A}">
+                    <a16:rowId xmlns:a16="http://schemas.microsoft.com/office/drawing/2014/main" val="10007"/>
+                  </a:ext>
+                </a:extLst>
               </a:tr>
               <a:tr h="265176">
                 <a:tc>
@@ -12915,7 +12921,7 @@
                     <a:bodyPr/>
                     <a:lstStyle/>
                     <a:p>
-                      <a:pPr indent="0" marL="0">
+                      <a:pPr marL="0" indent="0">
                         <a:buNone/>
                       </a:pPr>
                       <a:r>
@@ -12936,15 +12942,21 @@
                       </a:endParaRPr>
                     </a:p>
                   </a:txBody>
-                  <a:tcPr marL="45720" marR="45720" marT="45720" marB="45720" anchor="ctr">
+                  <a:tcPr marL="45720" marR="45720" anchor="ctr">
                     <a:lnL w="0" cap="flat" cmpd="sng" algn="ctr">
                       <a:noFill/>
                     </a:lnL>
                     <a:lnR w="0" cap="flat" cmpd="sng" algn="ctr">
                       <a:noFill/>
                     </a:lnR>
-                    <a:lnT w="0" cap="flat" cmpd="sng" algn="ctr">
-                      <a:noFill/>
+                    <a:lnT w="9525" cap="flat" cmpd="sng" algn="ctr">
+                      <a:solidFill>
+                        <a:srgbClr val="DEE1E6"/>
+                      </a:solidFill>
+                      <a:prstDash val="solid"/>
+                      <a:round/>
+                      <a:headEnd type="none" w="med" len="med"/>
+                      <a:tailEnd type="none" w="med" len="med"/>
                     </a:lnT>
                     <a:lnB w="9525" cap="flat" cmpd="sng" algn="ctr">
                       <a:solidFill>
@@ -12962,7 +12974,7 @@
                     <a:bodyPr/>
                     <a:lstStyle/>
                     <a:p>
-                      <a:pPr indent="0" marL="0">
+                      <a:pPr marL="0" indent="0">
                         <a:buNone/>
                       </a:pPr>
                       <a:r>
@@ -12983,15 +12995,21 @@
                       </a:endParaRPr>
                     </a:p>
                   </a:txBody>
-                  <a:tcPr marL="45720" marR="45720" marT="45720" marB="45720" anchor="ctr">
+                  <a:tcPr marL="45720" marR="45720" anchor="ctr">
                     <a:lnL w="0" cap="flat" cmpd="sng" algn="ctr">
                       <a:noFill/>
                     </a:lnL>
                     <a:lnR w="0" cap="flat" cmpd="sng" algn="ctr">
                       <a:noFill/>
                     </a:lnR>
-                    <a:lnT w="0" cap="flat" cmpd="sng" algn="ctr">
-                      <a:noFill/>
+                    <a:lnT w="9525" cap="flat" cmpd="sng" algn="ctr">
+                      <a:solidFill>
+                        <a:srgbClr val="DEE1E6"/>
+                      </a:solidFill>
+                      <a:prstDash val="solid"/>
+                      <a:round/>
+                      <a:headEnd type="none" w="med" len="med"/>
+                      <a:tailEnd type="none" w="med" len="med"/>
                     </a:lnT>
                     <a:lnB w="9525" cap="flat" cmpd="sng" algn="ctr">
                       <a:solidFill>
@@ -13009,7 +13027,7 @@
                     <a:bodyPr/>
                     <a:lstStyle/>
                     <a:p>
-                      <a:pPr indent="0" marL="0">
+                      <a:pPr marL="0" indent="0">
                         <a:buNone/>
                       </a:pPr>
                       <a:r>
@@ -13030,15 +13048,21 @@
                       </a:endParaRPr>
                     </a:p>
                   </a:txBody>
-                  <a:tcPr marL="45720" marR="45720" marT="45720" marB="45720" anchor="ctr">
+                  <a:tcPr marL="45720" marR="45720" anchor="ctr">
                     <a:lnL w="0" cap="flat" cmpd="sng" algn="ctr">
                       <a:noFill/>
                     </a:lnL>
                     <a:lnR w="0" cap="flat" cmpd="sng" algn="ctr">
                       <a:noFill/>
                     </a:lnR>
-                    <a:lnT w="0" cap="flat" cmpd="sng" algn="ctr">
-                      <a:noFill/>
+                    <a:lnT w="9525" cap="flat" cmpd="sng" algn="ctr">
+                      <a:solidFill>
+                        <a:srgbClr val="DEE1E6"/>
+                      </a:solidFill>
+                      <a:prstDash val="solid"/>
+                      <a:round/>
+                      <a:headEnd type="none" w="med" len="med"/>
+                      <a:tailEnd type="none" w="med" len="med"/>
                     </a:lnT>
                     <a:lnB w="9525" cap="flat" cmpd="sng" algn="ctr">
                       <a:solidFill>
@@ -13056,7 +13080,7 @@
                     <a:bodyPr/>
                     <a:lstStyle/>
                     <a:p>
-                      <a:pPr indent="0" marL="0">
+                      <a:pPr marL="0" indent="0">
                         <a:buNone/>
                       </a:pPr>
                       <a:r>
@@ -13077,15 +13101,21 @@
                       </a:endParaRPr>
                     </a:p>
                   </a:txBody>
-                  <a:tcPr marL="45720" marR="45720" marT="45720" marB="45720" anchor="ctr">
+                  <a:tcPr marL="45720" marR="45720" anchor="ctr">
                     <a:lnL w="0" cap="flat" cmpd="sng" algn="ctr">
                       <a:noFill/>
                     </a:lnL>
                     <a:lnR w="0" cap="flat" cmpd="sng" algn="ctr">
                       <a:noFill/>
                     </a:lnR>
-                    <a:lnT w="0" cap="flat" cmpd="sng" algn="ctr">
-                      <a:noFill/>
+                    <a:lnT w="9525" cap="flat" cmpd="sng" algn="ctr">
+                      <a:solidFill>
+                        <a:srgbClr val="DEE1E6"/>
+                      </a:solidFill>
+                      <a:prstDash val="solid"/>
+                      <a:round/>
+                      <a:headEnd type="none" w="med" len="med"/>
+                      <a:tailEnd type="none" w="med" len="med"/>
                     </a:lnT>
                     <a:lnB w="9525" cap="flat" cmpd="sng" algn="ctr">
                       <a:solidFill>
@@ -13098,6 +13128,11 @@
                     </a:lnB>
                   </a:tcPr>
                 </a:tc>
+                <a:extLst>
+                  <a:ext uri="{0D108BD9-81ED-4DB2-BD59-A6C34878D82A}">
+                    <a16:rowId xmlns:a16="http://schemas.microsoft.com/office/drawing/2014/main" val="10008"/>
+                  </a:ext>
+                </a:extLst>
               </a:tr>
               <a:tr h="265176">
                 <a:tc>
@@ -13105,7 +13140,7 @@
                     <a:bodyPr/>
                     <a:lstStyle/>
                     <a:p>
-                      <a:pPr indent="0" marL="0">
+                      <a:pPr marL="0" indent="0">
                         <a:buNone/>
                       </a:pPr>
                       <a:r>
@@ -13126,15 +13161,21 @@
                       </a:endParaRPr>
                     </a:p>
                   </a:txBody>
-                  <a:tcPr marL="45720" marR="45720" marT="45720" marB="45720" anchor="ctr">
+                  <a:tcPr marL="45720" marR="45720" anchor="ctr">
                     <a:lnL w="0" cap="flat" cmpd="sng" algn="ctr">
                       <a:noFill/>
                     </a:lnL>
                     <a:lnR w="0" cap="flat" cmpd="sng" algn="ctr">
                       <a:noFill/>
                     </a:lnR>
-                    <a:lnT w="0" cap="flat" cmpd="sng" algn="ctr">
-                      <a:noFill/>
+                    <a:lnT w="9525" cap="flat" cmpd="sng" algn="ctr">
+                      <a:solidFill>
+                        <a:srgbClr val="DEE1E6"/>
+                      </a:solidFill>
+                      <a:prstDash val="solid"/>
+                      <a:round/>
+                      <a:headEnd type="none" w="med" len="med"/>
+                      <a:tailEnd type="none" w="med" len="med"/>
                     </a:lnT>
                     <a:lnB w="9525" cap="flat" cmpd="sng" algn="ctr">
                       <a:solidFill>
@@ -13152,7 +13193,7 @@
                     <a:bodyPr/>
                     <a:lstStyle/>
                     <a:p>
-                      <a:pPr indent="0" marL="0">
+                      <a:pPr marL="0" indent="0">
                         <a:buNone/>
                       </a:pPr>
                       <a:r>
@@ -13173,15 +13214,21 @@
                       </a:endParaRPr>
                     </a:p>
                   </a:txBody>
-                  <a:tcPr marL="45720" marR="45720" marT="45720" marB="45720" anchor="ctr">
+                  <a:tcPr marL="45720" marR="45720" anchor="ctr">
                     <a:lnL w="0" cap="flat" cmpd="sng" algn="ctr">
                       <a:noFill/>
                     </a:lnL>
                     <a:lnR w="0" cap="flat" cmpd="sng" algn="ctr">
                       <a:noFill/>
                     </a:lnR>
-                    <a:lnT w="0" cap="flat" cmpd="sng" algn="ctr">
-                      <a:noFill/>
+                    <a:lnT w="9525" cap="flat" cmpd="sng" algn="ctr">
+                      <a:solidFill>
+                        <a:srgbClr val="DEE1E6"/>
+                      </a:solidFill>
+                      <a:prstDash val="solid"/>
+                      <a:round/>
+                      <a:headEnd type="none" w="med" len="med"/>
+                      <a:tailEnd type="none" w="med" len="med"/>
                     </a:lnT>
                     <a:lnB w="9525" cap="flat" cmpd="sng" algn="ctr">
                       <a:solidFill>
@@ -13199,7 +13246,7 @@
                     <a:bodyPr/>
                     <a:lstStyle/>
                     <a:p>
-                      <a:pPr indent="0" marL="0">
+                      <a:pPr marL="0" indent="0">
                         <a:buNone/>
                       </a:pPr>
                       <a:r>
@@ -13220,15 +13267,21 @@
                       </a:endParaRPr>
                     </a:p>
                   </a:txBody>
-                  <a:tcPr marL="45720" marR="45720" marT="45720" marB="45720" anchor="ctr">
+                  <a:tcPr marL="45720" marR="45720" anchor="ctr">
                     <a:lnL w="0" cap="flat" cmpd="sng" algn="ctr">
                       <a:noFill/>
                     </a:lnL>
                     <a:lnR w="0" cap="flat" cmpd="sng" algn="ctr">
                       <a:noFill/>
                     </a:lnR>
-                    <a:lnT w="0" cap="flat" cmpd="sng" algn="ctr">
-                      <a:noFill/>
+                    <a:lnT w="9525" cap="flat" cmpd="sng" algn="ctr">
+                      <a:solidFill>
+                        <a:srgbClr val="DEE1E6"/>
+                      </a:solidFill>
+                      <a:prstDash val="solid"/>
+                      <a:round/>
+                      <a:headEnd type="none" w="med" len="med"/>
+                      <a:tailEnd type="none" w="med" len="med"/>
                     </a:lnT>
                     <a:lnB w="9525" cap="flat" cmpd="sng" algn="ctr">
                       <a:solidFill>
@@ -13246,7 +13299,7 @@
                     <a:bodyPr/>
                     <a:lstStyle/>
                     <a:p>
-                      <a:pPr indent="0" marL="0">
+                      <a:pPr marL="0" indent="0">
                         <a:buNone/>
                       </a:pPr>
                       <a:r>
@@ -13267,15 +13320,21 @@
                       </a:endParaRPr>
                     </a:p>
                   </a:txBody>
-                  <a:tcPr marL="45720" marR="45720" marT="45720" marB="45720" anchor="ctr">
+                  <a:tcPr marL="45720" marR="45720" anchor="ctr">
                     <a:lnL w="0" cap="flat" cmpd="sng" algn="ctr">
                       <a:noFill/>
                     </a:lnL>
                     <a:lnR w="0" cap="flat" cmpd="sng" algn="ctr">
                       <a:noFill/>
                     </a:lnR>
-                    <a:lnT w="0" cap="flat" cmpd="sng" algn="ctr">
-                      <a:noFill/>
+                    <a:lnT w="9525" cap="flat" cmpd="sng" algn="ctr">
+                      <a:solidFill>
+                        <a:srgbClr val="DEE1E6"/>
+                      </a:solidFill>
+                      <a:prstDash val="solid"/>
+                      <a:round/>
+                      <a:headEnd type="none" w="med" len="med"/>
+                      <a:tailEnd type="none" w="med" len="med"/>
                     </a:lnT>
                     <a:lnB w="9525" cap="flat" cmpd="sng" algn="ctr">
                       <a:solidFill>
@@ -13288,6 +13347,11 @@
                     </a:lnB>
                   </a:tcPr>
                 </a:tc>
+                <a:extLst>
+                  <a:ext uri="{0D108BD9-81ED-4DB2-BD59-A6C34878D82A}">
+                    <a16:rowId xmlns:a16="http://schemas.microsoft.com/office/drawing/2014/main" val="10009"/>
+                  </a:ext>
+                </a:extLst>
               </a:tr>
             </a:tbl>
           </a:graphicData>
@@ -13314,7 +13378,7 @@
           <a:bodyPr wrap="square" lIns="0" tIns="0" rIns="0" bIns="0" rtlCol="0" anchor="ctr"/>
           <a:lstStyle/>
           <a:p>
-            <a:pPr indent="0" marL="0">
+            <a:pPr marL="0" indent="0">
               <a:buNone/>
             </a:pPr>
             <a:r>
@@ -13334,14 +13398,14 @@
       </p:sp>
       <p:pic>
         <p:nvPicPr>
-          <p:cNvPr id="6" name="example track map" descr="Example cargo AIS track near Norfolk, OBJECTID 50958">    </p:cNvPr>
+          <p:cNvPr id="6" name="example track map" descr="Example cargo AIS track near Norfolk, OBJECTID 50958"/>
           <p:cNvPicPr>
             <a:picLocks noChangeAspect="1"/>
           </p:cNvPicPr>
           <p:nvPr/>
         </p:nvPicPr>
         <p:blipFill>
-          <a:blip r:embed="rId1"/>
+          <a:blip r:embed="rId3"/>
           <a:stretch>
             <a:fillRect/>
           </a:stretch>
@@ -13380,7 +13444,7 @@
       </p:sp>
       <p:sp>
         <p:nvSpPr>
-          <p:cNvPr id="8" name="row caption"/>
+          <p:cNvPr id="4" name="row caption"/>
           <p:cNvSpPr txBox="1"/>
           <p:nvPr/>
         </p:nvSpPr>
@@ -13399,7 +13463,7 @@
           <a:bodyPr wrap="square" lIns="0" tIns="0" rIns="0" bIns="0" rtlCol="0" anchor="ctr"/>
           <a:lstStyle/>
           <a:p>
-            <a:pPr indent="0" marL="0">
+            <a:pPr marL="0" indent="0">
               <a:buNone/>
             </a:pPr>
             <a:r>
@@ -13413,9 +13477,6 @@
               </a:rPr>
               <a:t>OBJECTID 50958 · MMSI 563156300 · </a:t>
             </a:r>
-            <a:pPr indent="0" marL="0">
-              <a:buNone/>
-            </a:pPr>
             <a:r>
               <a:rPr lang="en-US" sz="1050" dirty="0">
                 <a:solidFill>
@@ -13430,7 +13491,7 @@
             <a:endParaRPr lang="en-US" sz="1050" dirty="0"/>
           </a:p>
           <a:p>
-            <a:pPr indent="0" marL="0">
+            <a:pPr marL="0" indent="0">
               <a:buNone/>
             </a:pPr>
             <a:r>
@@ -13468,7 +13529,7 @@
           </a:prstGeom>
           <a:extLst>
             <a:ext uri="{C572A759-6A51-4108-AA02-DFA0A04FC94B}">
-              <ma14:wrappingTextBoxFlag xmlns:ma14="http://schemas.microsoft.com/office/mac/drawingml/2011/main" val="0"/>
+              <ma14:wrappingTextBoxFlag xmlns:ma14="http://schemas.microsoft.com/office/mac/drawingml/2011/main" xmlns="" val="0"/>
             </a:ext>
           </a:extLst>
         </p:spPr>
@@ -13489,7 +13550,7 @@
           <a:p>
             <a:pPr algn="r"/>
             <a:fld id="{F7021451-1387-4CA6-816F-3879F97B5CBC}" type="slidenum">
-              <a:rPr b="0" lang="en-US"/>
+              <a:rPr lang="en-US" b="0"/>
               <a:t>7</a:t>
             </a:fld>
             <a:endParaRPr lang="en-US"/>
@@ -13524,9 +13585,11 @@
       <p:sp>
         <p:nvSpPr>
           <p:cNvPr id="2" name="Text 0"/>
-          <p:cNvSpPr/>
+          <p:cNvSpPr>
+            <a:spLocks noGrp="1"/>
+          </p:cNvSpPr>
           <p:nvPr>
-            <p:ph idx="100" type="body" hasCustomPrompt="1"/>
+            <p:ph type="body" idx="100" hasCustomPrompt="1"/>
           </p:nvPr>
         </p:nvSpPr>
         <p:spPr>
@@ -13544,11 +13607,11 @@
           <a:bodyPr wrap="square" lIns="0" tIns="0" rIns="0" bIns="0" rtlCol="0"/>
           <a:lstStyle/>
           <a:p>
-            <a:pPr indent="0" marL="0">
-              <a:buNone/>
-            </a:pPr>
-            <a:r>
-              <a:rPr lang="en-US" sz="1100" spc="150" kern="0" dirty="0">
+            <a:pPr marL="0" indent="0">
+              <a:buNone/>
+            </a:pPr>
+            <a:r>
+              <a:rPr lang="en-US" sz="1100" kern="0" spc="150" dirty="0">
                 <a:solidFill>
                   <a:schemeClr val="accent1"/>
                 </a:solidFill>
@@ -13565,9 +13628,11 @@
       <p:sp>
         <p:nvSpPr>
           <p:cNvPr id="3" name="Text 0"/>
-          <p:cNvSpPr/>
+          <p:cNvSpPr>
+            <a:spLocks noGrp="1"/>
+          </p:cNvSpPr>
           <p:nvPr>
-            <p:ph idx="101" type="title" hasCustomPrompt="1"/>
+            <p:ph type="title" idx="101" hasCustomPrompt="1"/>
           </p:nvPr>
         </p:nvSpPr>
         <p:spPr>
@@ -13585,7 +13650,7 @@
           <a:bodyPr wrap="square" lIns="0" tIns="0" rIns="0" bIns="0" rtlCol="0" anchor="t"/>
           <a:lstStyle/>
           <a:p>
-            <a:pPr algn="l" indent="0" marL="0">
+            <a:pPr marL="0" indent="0" algn="l">
               <a:buNone/>
             </a:pPr>
             <a:r>
@@ -13605,14 +13670,14 @@
       </p:sp>
       <p:pic>
         <p:nvPicPr>
-          <p:cNvPr id="4" name="bbox map" descr="First-pass bounding rectangle from 77.0W to 75.5W and 36.3N to 37.5N">    </p:cNvPr>
+          <p:cNvPr id="4" name="bbox map" descr="First-pass bounding rectangle from 77.0W to 75.5W and 36.3N to 37.5N"/>
           <p:cNvPicPr>
             <a:picLocks noChangeAspect="1"/>
           </p:cNvPicPr>
           <p:nvPr/>
         </p:nvPicPr>
         <p:blipFill>
-          <a:blip r:embed="rId1"/>
+          <a:blip r:embed="rId3"/>
           <a:stretch>
             <a:fillRect/>
           </a:stretch>
@@ -13648,7 +13713,7 @@
           <a:bodyPr wrap="square" lIns="0" tIns="0" rIns="0" bIns="0" rtlCol="0" anchor="ctr"/>
           <a:lstStyle/>
           <a:p>
-            <a:pPr indent="0" marL="0">
+            <a:pPr marL="0" indent="0">
               <a:buNone/>
             </a:pPr>
             <a:r>
@@ -13687,7 +13752,7 @@
           <a:bodyPr wrap="square" lIns="0" tIns="0" rIns="0" bIns="0" rtlCol="0" anchor="ctr"/>
           <a:lstStyle/>
           <a:p>
-            <a:pPr indent="0" marL="0">
+            <a:pPr marL="0" indent="0">
               <a:buNone/>
             </a:pPr>
             <a:r>
@@ -13704,7 +13769,7 @@
             <a:endParaRPr lang="en-US" sz="1100" dirty="0"/>
           </a:p>
           <a:p>
-            <a:pPr indent="0" marL="0">
+            <a:pPr marL="0" indent="0">
               <a:buNone/>
             </a:pPr>
             <a:r>
@@ -13747,7 +13812,7 @@
           <a:bodyPr wrap="square" lIns="0" tIns="0" rIns="0" bIns="0" rtlCol="0" anchor="ctr"/>
           <a:lstStyle/>
           <a:p>
-            <a:pPr algn="ctr" indent="0" marL="0">
+            <a:pPr marL="0" indent="0" algn="ctr">
               <a:buNone/>
             </a:pPr>
             <a:r>
@@ -13830,7 +13895,7 @@
           <a:bodyPr wrap="square" lIns="0" tIns="0" rIns="0" bIns="0" rtlCol="0" anchor="ctr"/>
           <a:lstStyle/>
           <a:p>
-            <a:pPr indent="0" marL="0">
+            <a:pPr marL="0" indent="0">
               <a:buNone/>
             </a:pPr>
             <a:r>
@@ -13869,7 +13934,7 @@
           <a:bodyPr wrap="square" lIns="0" tIns="0" rIns="0" bIns="0" rtlCol="0" anchor="ctr"/>
           <a:lstStyle/>
           <a:p>
-            <a:pPr algn="r" indent="0" marL="0">
+            <a:pPr marL="0" indent="0" algn="r">
               <a:buNone/>
             </a:pPr>
             <a:r>
@@ -13930,11 +13995,11 @@
           <a:bodyPr wrap="square" lIns="0" tIns="0" rIns="0" bIns="0" rtlCol="0" anchor="ctr"/>
           <a:lstStyle/>
           <a:p>
-            <a:pPr indent="0" marL="0">
-              <a:buNone/>
-            </a:pPr>
-            <a:r>
-              <a:rPr lang="en-US" sz="1000" spc="120" kern="0" dirty="0">
+            <a:pPr marL="0" indent="0">
+              <a:buNone/>
+            </a:pPr>
+            <a:r>
+              <a:rPr lang="en-US" sz="1000" kern="0" spc="120" dirty="0">
                 <a:solidFill>
                   <a:srgbClr val="0052FF"/>
                 </a:solidFill>
@@ -13969,7 +14034,7 @@
           <a:bodyPr wrap="square" lIns="0" tIns="0" rIns="0" bIns="0" rtlCol="0" anchor="ctr"/>
           <a:lstStyle/>
           <a:p>
-            <a:pPr indent="0" marL="0">
+            <a:pPr marL="0" indent="0">
               <a:buNone/>
             </a:pPr>
             <a:r>
@@ -13983,9 +14048,6 @@
               </a:rPr>
               <a:t>1,865</a:t>
             </a:r>
-            <a:pPr indent="0" marL="0">
-              <a:buNone/>
-            </a:pPr>
             <a:r>
               <a:rPr lang="en-US" sz="1050" dirty="0">
                 <a:solidFill>
@@ -14022,7 +14084,7 @@
           <a:bodyPr wrap="square" lIns="0" tIns="0" rIns="0" bIns="0" rtlCol="0" anchor="ctr"/>
           <a:lstStyle/>
           <a:p>
-            <a:pPr indent="0" marL="0">
+            <a:pPr marL="0" indent="0">
               <a:buNone/>
             </a:pPr>
             <a:r>
@@ -14083,11 +14145,11 @@
           <a:bodyPr wrap="square" lIns="0" tIns="0" rIns="0" bIns="0" rtlCol="0" anchor="ctr"/>
           <a:lstStyle/>
           <a:p>
-            <a:pPr indent="0" marL="0">
-              <a:buNone/>
-            </a:pPr>
-            <a:r>
-              <a:rPr lang="en-US" sz="1000" spc="120" kern="0" dirty="0">
+            <a:pPr marL="0" indent="0">
+              <a:buNone/>
+            </a:pPr>
+            <a:r>
+              <a:rPr lang="en-US" sz="1000" kern="0" spc="120" dirty="0">
                 <a:solidFill>
                   <a:srgbClr val="0A0B0D"/>
                 </a:solidFill>
@@ -14122,7 +14184,7 @@
           <a:bodyPr wrap="square" lIns="0" tIns="0" rIns="0" bIns="0" rtlCol="0" anchor="ctr"/>
           <a:lstStyle/>
           <a:p>
-            <a:pPr indent="0" marL="0">
+            <a:pPr marL="0" indent="0">
               <a:buNone/>
             </a:pPr>
             <a:r>
@@ -14136,9 +14198,6 @@
               </a:rPr>
               <a:t>138</a:t>
             </a:r>
-            <a:pPr indent="0" marL="0">
-              <a:buNone/>
-            </a:pPr>
             <a:r>
               <a:rPr lang="en-US" sz="1050" dirty="0">
                 <a:solidFill>
@@ -14175,7 +14234,7 @@
           <a:bodyPr wrap="square" lIns="0" tIns="0" rIns="0" bIns="0" rtlCol="0" anchor="ctr"/>
           <a:lstStyle/>
           <a:p>
-            <a:pPr indent="0" marL="0">
+            <a:pPr marL="0" indent="0">
               <a:buNone/>
             </a:pPr>
             <a:r>
@@ -14214,7 +14273,7 @@
           <a:bodyPr wrap="square" lIns="0" tIns="0" rIns="0" bIns="0" rtlCol="0" anchor="ctr"/>
           <a:lstStyle/>
           <a:p>
-            <a:pPr indent="0" marL="0">
+            <a:pPr marL="0" indent="0">
               <a:buNone/>
             </a:pPr>
             <a:r>
@@ -14253,7 +14312,7 @@
           <a:bodyPr wrap="square" lIns="0" tIns="0" rIns="0" bIns="0" rtlCol="0" anchor="ctr"/>
           <a:lstStyle/>
           <a:p>
-            <a:pPr indent="0" marL="0">
+            <a:pPr marL="0" indent="0">
               <a:buNone/>
             </a:pPr>
             <a:r>
@@ -14292,7 +14351,7 @@
           <a:bodyPr wrap="square" lIns="0" tIns="0" rIns="0" bIns="0" rtlCol="0" anchor="ctr"/>
           <a:lstStyle/>
           <a:p>
-            <a:pPr indent="0" marL="0">
+            <a:pPr marL="0" indent="0">
               <a:buNone/>
             </a:pPr>
             <a:r>
@@ -14331,7 +14390,7 @@
           <a:bodyPr wrap="square" lIns="0" tIns="0" rIns="0" bIns="0" rtlCol="0" anchor="ctr"/>
           <a:lstStyle/>
           <a:p>
-            <a:pPr indent="0" marL="0">
+            <a:pPr marL="0" indent="0">
               <a:buNone/>
             </a:pPr>
             <a:r>
@@ -14370,7 +14429,7 @@
           <a:bodyPr wrap="square" lIns="0" tIns="0" rIns="0" bIns="0" rtlCol="0" anchor="ctr"/>
           <a:lstStyle/>
           <a:p>
-            <a:pPr indent="0" marL="0">
+            <a:pPr marL="0" indent="0">
               <a:buNone/>
             </a:pPr>
             <a:r>
@@ -14409,7 +14468,7 @@
           <a:bodyPr wrap="square" lIns="0" tIns="0" rIns="0" bIns="0" rtlCol="0" anchor="ctr"/>
           <a:lstStyle/>
           <a:p>
-            <a:pPr indent="0" marL="0">
+            <a:pPr marL="0" indent="0">
               <a:buNone/>
             </a:pPr>
             <a:r>
@@ -14448,7 +14507,7 @@
           <a:bodyPr wrap="square" lIns="0" tIns="0" rIns="0" bIns="0" rtlCol="0" anchor="ctr"/>
           <a:lstStyle/>
           <a:p>
-            <a:pPr indent="0" marL="0">
+            <a:pPr marL="0" indent="0">
               <a:buNone/>
             </a:pPr>
             <a:r>
@@ -14468,7 +14527,7 @@
       </p:sp>
       <p:sp>
         <p:nvSpPr>
-          <p:cNvPr id="25" name="Slide Number Placeholder 0"/>
+          <p:cNvPr id="27" name="Slide Number Placeholder 0"/>
           <p:cNvSpPr>
             <a:spLocks noGrp="1"/>
           </p:cNvSpPr>
@@ -14486,7 +14545,7 @@
           </a:prstGeom>
           <a:extLst>
             <a:ext uri="{C572A759-6A51-4108-AA02-DFA0A04FC94B}">
-              <ma14:wrappingTextBoxFlag xmlns:ma14="http://schemas.microsoft.com/office/mac/drawingml/2011/main" val="0"/>
+              <ma14:wrappingTextBoxFlag xmlns:ma14="http://schemas.microsoft.com/office/mac/drawingml/2011/main" xmlns="" val="0"/>
             </a:ext>
           </a:extLst>
         </p:spPr>
@@ -14507,7 +14566,7 @@
           <a:p>
             <a:pPr algn="r"/>
             <a:fld id="{F7021451-1387-4CA6-816F-3879F97B5CBC}" type="slidenum">
-              <a:rPr b="0" lang="en-US"/>
+              <a:rPr lang="en-US" b="0"/>
               <a:t>8</a:t>
             </a:fld>
             <a:endParaRPr lang="en-US"/>
@@ -14542,9 +14601,11 @@
       <p:sp>
         <p:nvSpPr>
           <p:cNvPr id="2" name="Text 0"/>
-          <p:cNvSpPr/>
+          <p:cNvSpPr>
+            <a:spLocks noGrp="1"/>
+          </p:cNvSpPr>
           <p:nvPr>
-            <p:ph idx="100" type="body" hasCustomPrompt="1"/>
+            <p:ph type="body" idx="100" hasCustomPrompt="1"/>
           </p:nvPr>
         </p:nvSpPr>
         <p:spPr>
@@ -14562,11 +14623,11 @@
           <a:bodyPr wrap="square" lIns="0" tIns="0" rIns="0" bIns="0" rtlCol="0"/>
           <a:lstStyle/>
           <a:p>
-            <a:pPr indent="0" marL="0">
-              <a:buNone/>
-            </a:pPr>
-            <a:r>
-              <a:rPr lang="en-US" sz="1100" spc="150" kern="0" dirty="0">
+            <a:pPr marL="0" indent="0">
+              <a:buNone/>
+            </a:pPr>
+            <a:r>
+              <a:rPr lang="en-US" sz="1100" kern="0" spc="150" dirty="0">
                 <a:solidFill>
                   <a:schemeClr val="accent1"/>
                 </a:solidFill>
@@ -14583,9 +14644,11 @@
       <p:sp>
         <p:nvSpPr>
           <p:cNvPr id="3" name="Text 0"/>
-          <p:cNvSpPr/>
+          <p:cNvSpPr>
+            <a:spLocks noGrp="1"/>
+          </p:cNvSpPr>
           <p:nvPr>
-            <p:ph idx="101" type="title" hasCustomPrompt="1"/>
+            <p:ph type="title" idx="101" hasCustomPrompt="1"/>
           </p:nvPr>
         </p:nvSpPr>
         <p:spPr>
@@ -14603,7 +14666,7 @@
           <a:bodyPr wrap="square" lIns="0" tIns="0" rIns="0" bIns="0" rtlCol="0" anchor="t"/>
           <a:lstStyle/>
           <a:p>
-            <a:pPr algn="l" indent="0" marL="0">
+            <a:pPr marL="0" indent="0" algn="l">
               <a:buNone/>
             </a:pPr>
             <a:r>
@@ -14664,11 +14727,11 @@
           <a:bodyPr wrap="square" lIns="0" tIns="0" rIns="0" bIns="0" rtlCol="0" anchor="ctr"/>
           <a:lstStyle/>
           <a:p>
-            <a:pPr indent="0" marL="0">
-              <a:buNone/>
-            </a:pPr>
-            <a:r>
-              <a:rPr lang="en-US" sz="1100" spc="150" kern="0" dirty="0">
+            <a:pPr marL="0" indent="0">
+              <a:buNone/>
+            </a:pPr>
+            <a:r>
+              <a:rPr lang="en-US" sz="1100" kern="0" spc="150" dirty="0">
                 <a:solidFill>
                   <a:srgbClr val="7FA6FF"/>
                 </a:solidFill>
@@ -14703,7 +14766,7 @@
           <a:bodyPr wrap="square" lIns="0" tIns="0" rIns="0" bIns="0" rtlCol="0" anchor="t"/>
           <a:lstStyle/>
           <a:p>
-            <a:pPr indent="0" marL="0">
+            <a:pPr marL="0" indent="0">
               <a:buNone/>
             </a:pPr>
             <a:r>
@@ -14742,7 +14805,7 @@
           <a:bodyPr wrap="square" lIns="0" tIns="0" rIns="0" bIns="0" rtlCol="0" anchor="t"/>
           <a:lstStyle/>
           <a:p>
-            <a:pPr indent="0" marL="0">
+            <a:pPr marL="0" indent="0">
               <a:buNone/>
             </a:pPr>
             <a:r>
@@ -14781,7 +14844,7 @@
           <a:bodyPr wrap="square" lIns="0" tIns="0" rIns="0" bIns="0" rtlCol="0" anchor="t"/>
           <a:lstStyle/>
           <a:p>
-            <a:pPr indent="0" marL="0">
+            <a:pPr marL="0" indent="0">
               <a:buNone/>
             </a:pPr>
             <a:r>
@@ -14820,7 +14883,7 @@
           <a:bodyPr wrap="square" lIns="0" tIns="0" rIns="0" bIns="0" rtlCol="0" anchor="t"/>
           <a:lstStyle/>
           <a:p>
-            <a:pPr indent="0" marL="0">
+            <a:pPr marL="0" indent="0">
               <a:buNone/>
             </a:pPr>
             <a:r>
@@ -14859,7 +14922,7 @@
           <a:bodyPr wrap="square" lIns="0" tIns="0" rIns="0" bIns="0" rtlCol="0" anchor="t"/>
           <a:lstStyle/>
           <a:p>
-            <a:pPr indent="0" marL="0">
+            <a:pPr marL="0" indent="0">
               <a:buNone/>
             </a:pPr>
             <a:r>
@@ -14898,7 +14961,7 @@
           <a:bodyPr wrap="square" lIns="0" tIns="0" rIns="0" bIns="0" rtlCol="0" anchor="t"/>
           <a:lstStyle/>
           <a:p>
-            <a:pPr indent="0" marL="0">
+            <a:pPr marL="0" indent="0">
               <a:buNone/>
             </a:pPr>
             <a:r>
@@ -14937,7 +15000,7 @@
           <a:bodyPr wrap="square" lIns="0" tIns="0" rIns="0" bIns="0" rtlCol="0" anchor="t"/>
           <a:lstStyle/>
           <a:p>
-            <a:pPr indent="0" marL="0">
+            <a:pPr marL="0" indent="0">
               <a:buNone/>
             </a:pPr>
             <a:r>
@@ -14976,7 +15039,7 @@
           <a:bodyPr wrap="square" lIns="0" tIns="0" rIns="0" bIns="0" rtlCol="0" anchor="t"/>
           <a:lstStyle/>
           <a:p>
-            <a:pPr indent="0" marL="0">
+            <a:pPr marL="0" indent="0">
               <a:buNone/>
             </a:pPr>
             <a:r>
@@ -15015,7 +15078,7 @@
           <a:bodyPr wrap="square" lIns="0" tIns="0" rIns="0" bIns="0" rtlCol="0" anchor="t"/>
           <a:lstStyle/>
           <a:p>
-            <a:pPr indent="0" marL="0">
+            <a:pPr marL="0" indent="0">
               <a:buNone/>
             </a:pPr>
             <a:r>
@@ -15054,7 +15117,7 @@
           <a:bodyPr wrap="square" lIns="0" tIns="0" rIns="0" bIns="0" rtlCol="0" anchor="t"/>
           <a:lstStyle/>
           <a:p>
-            <a:pPr indent="0" marL="0">
+            <a:pPr marL="0" indent="0">
               <a:buNone/>
             </a:pPr>
             <a:r>
@@ -15117,285 +15180,7 @@
       </p:sp>
       <p:pic>
         <p:nvPicPr>
-          <p:cNvPr id="18" name="pipe icon 0" descr="preencoded.png">    </p:cNvPr>
-          <p:cNvPicPr>
-            <a:picLocks noChangeAspect="1"/>
-          </p:cNvPicPr>
-          <p:nvPr/>
-        </p:nvPicPr>
-        <p:blipFill>
-          <a:blip r:embed="rId1"/>
-          <a:stretch>
-            <a:fillRect/>
-          </a:stretch>
-        </p:blipFill>
-        <p:spPr>
-          <a:xfrm>
-            <a:off x="4439961" y="1541313"/>
-            <a:ext cx="209215" cy="209215"/>
-          </a:xfrm>
-          <a:prstGeom prst="rect">
-            <a:avLst/>
-          </a:prstGeom>
-        </p:spPr>
-      </p:pic>
-      <p:sp>
-        <p:nvSpPr>
-          <p:cNvPr id="19" name="pipe text 0"/>
-          <p:cNvSpPr txBox="1"/>
-          <p:nvPr/>
-        </p:nvSpPr>
-        <p:spPr>
-          <a:xfrm>
-            <a:off x="4910328" y="1417320"/>
-            <a:ext cx="3200400" cy="475488"/>
-          </a:xfrm>
-          <a:prstGeom prst="rect">
-            <a:avLst/>
-          </a:prstGeom>
-          <a:noFill/>
-          <a:ln/>
-        </p:spPr>
-        <p:txBody>
-          <a:bodyPr wrap="square" lIns="0" tIns="0" rIns="0" bIns="0" rtlCol="0" anchor="ctr"/>
-          <a:lstStyle/>
-          <a:p>
-            <a:pPr indent="0" marL="0">
-              <a:buNone/>
-            </a:pPr>
-            <a:r>
-              <a:rPr lang="en-US" sz="1300" dirty="0">
-                <a:solidFill>
-                  <a:srgbClr val="0A0B0D"/>
-                </a:solidFill>
-                <a:latin typeface="프리젠테이션 7 Bold" pitchFamily="34" charset="0"/>
-                <a:ea typeface="프리젠테이션 7 Bold" pitchFamily="34" charset="-122"/>
-                <a:cs typeface="프리젠테이션 7 Bold" pitchFamily="34" charset="-120"/>
-              </a:rPr>
-              <a:t>1. Spatial-index extract</a:t>
-            </a:r>
-            <a:endParaRPr lang="en-US" sz="1300" dirty="0"/>
-          </a:p>
-          <a:p>
-            <a:pPr indent="0" marL="0">
-              <a:buNone/>
-            </a:pPr>
-            <a:r>
-              <a:rPr lang="en-US" sz="1100" dirty="0">
-                <a:solidFill>
-                  <a:srgbClr val="5B616E"/>
-                </a:solidFill>
-                <a:latin typeface="프리젠테이션 4 Regular" pitchFamily="34" charset="0"/>
-                <a:ea typeface="프리젠테이션 4 Regular" pitchFamily="34" charset="-122"/>
-                <a:cs typeface="프리젠테이션 4 Regular" pitchFamily="34" charset="-120"/>
-              </a:rPr>
-              <a:t>RTree + exact intersection on the rectangle</a:t>
-            </a:r>
-            <a:endParaRPr lang="en-US" sz="1300" dirty="0"/>
-          </a:p>
-        </p:txBody>
-      </p:sp>
-      <p:sp>
-        <p:nvSpPr>
-          <p:cNvPr id="20" name="status 0"/>
-          <p:cNvSpPr txBox="1"/>
-          <p:nvPr/>
-        </p:nvSpPr>
-        <p:spPr>
-          <a:xfrm>
-            <a:off x="8183880" y="1508760"/>
-            <a:ext cx="502920" cy="274320"/>
-          </a:xfrm>
-          <a:prstGeom prst="rect">
-            <a:avLst/>
-          </a:prstGeom>
-          <a:noFill/>
-          <a:ln/>
-        </p:spPr>
-        <p:txBody>
-          <a:bodyPr wrap="square" lIns="0" tIns="0" rIns="0" bIns="0" rtlCol="0" anchor="ctr"/>
-          <a:lstStyle/>
-          <a:p>
-            <a:pPr algn="r" indent="0" marL="0">
-              <a:buNone/>
-            </a:pPr>
-            <a:r>
-              <a:rPr lang="en-US" sz="1000" spc="100" kern="0" dirty="0">
-                <a:solidFill>
-                  <a:srgbClr val="05B169"/>
-                </a:solidFill>
-                <a:latin typeface="프리젠테이션 7 Bold" pitchFamily="34" charset="0"/>
-                <a:ea typeface="프리젠테이션 7 Bold" pitchFamily="34" charset="-122"/>
-                <a:cs typeface="프리젠테이션 7 Bold" pitchFamily="34" charset="-120"/>
-              </a:rPr>
-              <a:t>DONE</a:t>
-            </a:r>
-            <a:endParaRPr lang="en-US" sz="1000" dirty="0"/>
-          </a:p>
-        </p:txBody>
-      </p:sp>
-      <p:sp>
-        <p:nvSpPr>
-          <p:cNvPr id="21" name="pipe icon 1 bg"/>
-          <p:cNvSpPr/>
-          <p:nvPr/>
-        </p:nvSpPr>
-        <p:spPr>
-          <a:xfrm>
-            <a:off x="4343400" y="1965960"/>
-            <a:ext cx="402336" cy="402336"/>
-          </a:xfrm>
-          <a:prstGeom prst="ellipse">
-            <a:avLst/>
-          </a:prstGeom>
-          <a:solidFill>
-            <a:srgbClr val="0052FF"/>
-          </a:solidFill>
-          <a:ln/>
-        </p:spPr>
-      </p:sp>
-      <p:pic>
-        <p:nvPicPr>
-          <p:cNvPr id="22" name="pipe icon 1" descr="preencoded.png">    </p:cNvPr>
-          <p:cNvPicPr>
-            <a:picLocks noChangeAspect="1"/>
-          </p:cNvPicPr>
-          <p:nvPr/>
-        </p:nvPicPr>
-        <p:blipFill>
-          <a:blip r:embed="rId2"/>
-          <a:stretch>
-            <a:fillRect/>
-          </a:stretch>
-        </p:blipFill>
-        <p:spPr>
-          <a:xfrm>
-            <a:off x="4439961" y="2062521"/>
-            <a:ext cx="209215" cy="209215"/>
-          </a:xfrm>
-          <a:prstGeom prst="rect">
-            <a:avLst/>
-          </a:prstGeom>
-        </p:spPr>
-      </p:pic>
-      <p:sp>
-        <p:nvSpPr>
-          <p:cNvPr id="23" name="pipe text 1"/>
-          <p:cNvSpPr txBox="1"/>
-          <p:nvPr/>
-        </p:nvSpPr>
-        <p:spPr>
-          <a:xfrm>
-            <a:off x="4910328" y="1938528"/>
-            <a:ext cx="3200400" cy="475488"/>
-          </a:xfrm>
-          <a:prstGeom prst="rect">
-            <a:avLst/>
-          </a:prstGeom>
-          <a:noFill/>
-          <a:ln/>
-        </p:spPr>
-        <p:txBody>
-          <a:bodyPr wrap="square" lIns="0" tIns="0" rIns="0" bIns="0" rtlCol="0" anchor="ctr"/>
-          <a:lstStyle/>
-          <a:p>
-            <a:pPr indent="0" marL="0">
-              <a:buNone/>
-            </a:pPr>
-            <a:r>
-              <a:rPr lang="en-US" sz="1300" dirty="0">
-                <a:solidFill>
-                  <a:srgbClr val="0A0B0D"/>
-                </a:solidFill>
-                <a:latin typeface="프리젠테이션 7 Bold" pitchFamily="34" charset="0"/>
-                <a:ea typeface="프리젠테이션 7 Bold" pitchFamily="34" charset="-122"/>
-                <a:cs typeface="프리젠테이션 7 Bold" pitchFamily="34" charset="-120"/>
-              </a:rPr>
-              <a:t>2. Filter vessel groups</a:t>
-            </a:r>
-            <a:endParaRPr lang="en-US" sz="1300" dirty="0"/>
-          </a:p>
-          <a:p>
-            <a:pPr indent="0" marL="0">
-              <a:buNone/>
-            </a:pPr>
-            <a:r>
-              <a:rPr lang="en-US" sz="1100" dirty="0">
-                <a:solidFill>
-                  <a:srgbClr val="5B616E"/>
-                </a:solidFill>
-                <a:latin typeface="프리젠테이션 4 Regular" pitchFamily="34" charset="0"/>
-                <a:ea typeface="프리젠테이션 4 Regular" pitchFamily="34" charset="-122"/>
-                <a:cs typeface="프리젠테이션 4 Regular" pitchFamily="34" charset="-120"/>
-              </a:rPr>
-              <a:t>Cargo &amp; Tanker → 10,943 rows</a:t>
-            </a:r>
-            <a:endParaRPr lang="en-US" sz="1300" dirty="0"/>
-          </a:p>
-        </p:txBody>
-      </p:sp>
-      <p:sp>
-        <p:nvSpPr>
-          <p:cNvPr id="24" name="status 1"/>
-          <p:cNvSpPr txBox="1"/>
-          <p:nvPr/>
-        </p:nvSpPr>
-        <p:spPr>
-          <a:xfrm>
-            <a:off x="8183880" y="2029968"/>
-            <a:ext cx="502920" cy="274320"/>
-          </a:xfrm>
-          <a:prstGeom prst="rect">
-            <a:avLst/>
-          </a:prstGeom>
-          <a:noFill/>
-          <a:ln/>
-        </p:spPr>
-        <p:txBody>
-          <a:bodyPr wrap="square" lIns="0" tIns="0" rIns="0" bIns="0" rtlCol="0" anchor="ctr"/>
-          <a:lstStyle/>
-          <a:p>
-            <a:pPr algn="r" indent="0" marL="0">
-              <a:buNone/>
-            </a:pPr>
-            <a:r>
-              <a:rPr lang="en-US" sz="1000" spc="100" kern="0" dirty="0">
-                <a:solidFill>
-                  <a:srgbClr val="05B169"/>
-                </a:solidFill>
-                <a:latin typeface="프리젠테이션 7 Bold" pitchFamily="34" charset="0"/>
-                <a:ea typeface="프리젠테이션 7 Bold" pitchFamily="34" charset="-122"/>
-                <a:cs typeface="프리젠테이션 7 Bold" pitchFamily="34" charset="-120"/>
-              </a:rPr>
-              <a:t>DONE</a:t>
-            </a:r>
-            <a:endParaRPr lang="en-US" sz="1000" dirty="0"/>
-          </a:p>
-        </p:txBody>
-      </p:sp>
-      <p:sp>
-        <p:nvSpPr>
-          <p:cNvPr id="25" name="pipe icon 2 bg"/>
-          <p:cNvSpPr/>
-          <p:nvPr/>
-        </p:nvSpPr>
-        <p:spPr>
-          <a:xfrm>
-            <a:off x="4343400" y="2487168"/>
-            <a:ext cx="402336" cy="402336"/>
-          </a:xfrm>
-          <a:prstGeom prst="ellipse">
-            <a:avLst/>
-          </a:prstGeom>
-          <a:solidFill>
-            <a:srgbClr val="EEF0F3"/>
-          </a:solidFill>
-          <a:ln/>
-        </p:spPr>
-      </p:sp>
-      <p:pic>
-        <p:nvPicPr>
-          <p:cNvPr id="26" name="pipe icon 2" descr="preencoded.png">    </p:cNvPr>
+          <p:cNvPr id="18" name="pipe icon 0" descr="preencoded.png"/>
           <p:cNvPicPr>
             <a:picLocks noChangeAspect="1"/>
           </p:cNvPicPr>
@@ -15409,7 +15194,7 @@
         </p:blipFill>
         <p:spPr>
           <a:xfrm>
-            <a:off x="4439961" y="2583729"/>
+            <a:off x="4439961" y="1541313"/>
             <a:ext cx="209215" cy="209215"/>
           </a:xfrm>
           <a:prstGeom prst="rect">
@@ -15419,13 +15204,13 @@
       </p:pic>
       <p:sp>
         <p:nvSpPr>
-          <p:cNvPr id="27" name="pipe text 2"/>
-          <p:cNvSpPr txBox="1"/>
-          <p:nvPr/>
-        </p:nvSpPr>
-        <p:spPr>
-          <a:xfrm>
-            <a:off x="4910328" y="2459736"/>
+          <p:cNvPr id="19" name="pipe text 0"/>
+          <p:cNvSpPr txBox="1"/>
+          <p:nvPr/>
+        </p:nvSpPr>
+        <p:spPr>
+          <a:xfrm>
+            <a:off x="4910328" y="1417320"/>
             <a:ext cx="3200400" cy="475488"/>
           </a:xfrm>
           <a:prstGeom prst="rect">
@@ -15438,7 +15223,7 @@
           <a:bodyPr wrap="square" lIns="0" tIns="0" rIns="0" bIns="0" rtlCol="0" anchor="ctr"/>
           <a:lstStyle/>
           <a:p>
-            <a:pPr indent="0" marL="0">
+            <a:pPr marL="0" indent="0">
               <a:buNone/>
             </a:pPr>
             <a:r>
@@ -15450,12 +15235,12 @@
                 <a:ea typeface="프리젠테이션 7 Bold" pitchFamily="34" charset="-122"/>
                 <a:cs typeface="프리젠테이션 7 Bold" pitchFamily="34" charset="-120"/>
               </a:rPr>
-              <a:t>3. Confirm study boundary</a:t>
+              <a:t>1. Spatial-index extract</a:t>
             </a:r>
             <a:endParaRPr lang="en-US" sz="1300" dirty="0"/>
           </a:p>
           <a:p>
-            <a:pPr indent="0" marL="0">
+            <a:pPr marL="0" indent="0">
               <a:buNone/>
             </a:pPr>
             <a:r>
@@ -15467,7 +15252,7 @@
                 <a:ea typeface="프리젠테이션 4 Regular" pitchFamily="34" charset="-122"/>
                 <a:cs typeface="프리젠테이션 4 Regular" pitchFamily="34" charset="-120"/>
               </a:rPr>
-              <a:t>ENC-based approach area, then rerun the filter</a:t>
+              <a:t>RTree + exact intersection on the rectangle</a:t>
             </a:r>
             <a:endParaRPr lang="en-US" sz="1300" dirty="0"/>
           </a:p>
@@ -15475,13 +15260,13 @@
       </p:sp>
       <p:sp>
         <p:nvSpPr>
-          <p:cNvPr id="28" name="status 2"/>
-          <p:cNvSpPr txBox="1"/>
-          <p:nvPr/>
-        </p:nvSpPr>
-        <p:spPr>
-          <a:xfrm>
-            <a:off x="8183880" y="2551176"/>
+          <p:cNvPr id="20" name="status 0"/>
+          <p:cNvSpPr txBox="1"/>
+          <p:nvPr/>
+        </p:nvSpPr>
+        <p:spPr>
+          <a:xfrm>
+            <a:off x="8183880" y="1508760"/>
             <a:ext cx="502920" cy="274320"/>
           </a:xfrm>
           <a:prstGeom prst="rect">
@@ -15494,19 +15279,19 @@
           <a:bodyPr wrap="square" lIns="0" tIns="0" rIns="0" bIns="0" rtlCol="0" anchor="ctr"/>
           <a:lstStyle/>
           <a:p>
-            <a:pPr algn="r" indent="0" marL="0">
-              <a:buNone/>
-            </a:pPr>
-            <a:r>
-              <a:rPr lang="en-US" sz="1000" spc="100" kern="0" dirty="0">
-                <a:solidFill>
-                  <a:srgbClr val="8A919E"/>
+            <a:pPr marL="0" indent="0" algn="r">
+              <a:buNone/>
+            </a:pPr>
+            <a:r>
+              <a:rPr lang="en-US" sz="1000" kern="0" spc="100" dirty="0">
+                <a:solidFill>
+                  <a:srgbClr val="05B169"/>
                 </a:solidFill>
                 <a:latin typeface="프리젠테이션 7 Bold" pitchFamily="34" charset="0"/>
                 <a:ea typeface="프리젠테이션 7 Bold" pitchFamily="34" charset="-122"/>
                 <a:cs typeface="프리젠테이션 7 Bold" pitchFamily="34" charset="-120"/>
               </a:rPr>
-              <a:t>NEXT</a:t>
+              <a:t>DONE</a:t>
             </a:r>
             <a:endParaRPr lang="en-US" sz="1000" dirty="0"/>
           </a:p>
@@ -15514,27 +15299,27 @@
       </p:sp>
       <p:sp>
         <p:nvSpPr>
-          <p:cNvPr id="29" name="pipe icon 3 bg"/>
+          <p:cNvPr id="21" name="pipe icon 1 bg"/>
           <p:cNvSpPr/>
           <p:nvPr/>
         </p:nvSpPr>
         <p:spPr>
           <a:xfrm>
-            <a:off x="4343400" y="3008376"/>
+            <a:off x="4343400" y="1965960"/>
             <a:ext cx="402336" cy="402336"/>
           </a:xfrm>
           <a:prstGeom prst="ellipse">
             <a:avLst/>
           </a:prstGeom>
           <a:solidFill>
-            <a:srgbClr val="EEF0F3"/>
+            <a:srgbClr val="0052FF"/>
           </a:solidFill>
           <a:ln/>
         </p:spPr>
       </p:sp>
       <p:pic>
         <p:nvPicPr>
-          <p:cNvPr id="30" name="pipe icon 3" descr="preencoded.png">    </p:cNvPr>
+          <p:cNvPr id="22" name="pipe icon 1" descr="preencoded.png"/>
           <p:cNvPicPr>
             <a:picLocks noChangeAspect="1"/>
           </p:cNvPicPr>
@@ -15548,7 +15333,7 @@
         </p:blipFill>
         <p:spPr>
           <a:xfrm>
-            <a:off x="4439961" y="3104937"/>
+            <a:off x="4439961" y="2062521"/>
             <a:ext cx="209215" cy="209215"/>
           </a:xfrm>
           <a:prstGeom prst="rect">
@@ -15558,13 +15343,13 @@
       </p:pic>
       <p:sp>
         <p:nvSpPr>
-          <p:cNvPr id="31" name="pipe text 3"/>
-          <p:cNvSpPr txBox="1"/>
-          <p:nvPr/>
-        </p:nvSpPr>
-        <p:spPr>
-          <a:xfrm>
-            <a:off x="4910328" y="2980944"/>
+          <p:cNvPr id="23" name="pipe text 1"/>
+          <p:cNvSpPr txBox="1"/>
+          <p:nvPr/>
+        </p:nvSpPr>
+        <p:spPr>
+          <a:xfrm>
+            <a:off x="4910328" y="1938528"/>
             <a:ext cx="3200400" cy="475488"/>
           </a:xfrm>
           <a:prstGeom prst="rect">
@@ -15577,7 +15362,7 @@
           <a:bodyPr wrap="square" lIns="0" tIns="0" rIns="0" bIns="0" rtlCol="0" anchor="ctr"/>
           <a:lstStyle/>
           <a:p>
-            <a:pPr indent="0" marL="0">
+            <a:pPr marL="0" indent="0">
               <a:buNone/>
             </a:pPr>
             <a:r>
@@ -15589,12 +15374,12 @@
                 <a:ea typeface="프리젠테이션 7 Bold" pitchFamily="34" charset="-122"/>
                 <a:cs typeface="프리젠테이션 7 Bold" pitchFamily="34" charset="-120"/>
               </a:rPr>
-              <a:t>4. Resolve vessel-type scope</a:t>
+              <a:t>2. Filter vessel groups</a:t>
             </a:r>
             <a:endParaRPr lang="en-US" sz="1300" dirty="0"/>
           </a:p>
           <a:p>
-            <a:pPr indent="0" marL="0">
+            <a:pPr marL="0" indent="0">
               <a:buNone/>
             </a:pPr>
             <a:r>
@@ -15606,7 +15391,7 @@
                 <a:ea typeface="프리젠테이션 4 Regular" pitchFamily="34" charset="-122"/>
                 <a:cs typeface="프리젠테이션 4 Regular" pitchFamily="34" charset="-120"/>
               </a:rPr>
-              <a:t>VesselType codebook; all Cargo or a sub-type?</a:t>
+              <a:t>Cargo &amp; Tanker → 10,943 rows</a:t>
             </a:r>
             <a:endParaRPr lang="en-US" sz="1300" dirty="0"/>
           </a:p>
@@ -15614,13 +15399,13 @@
       </p:sp>
       <p:sp>
         <p:nvSpPr>
-          <p:cNvPr id="32" name="status 3"/>
-          <p:cNvSpPr txBox="1"/>
-          <p:nvPr/>
-        </p:nvSpPr>
-        <p:spPr>
-          <a:xfrm>
-            <a:off x="8183880" y="3072384"/>
+          <p:cNvPr id="24" name="status 1"/>
+          <p:cNvSpPr txBox="1"/>
+          <p:nvPr/>
+        </p:nvSpPr>
+        <p:spPr>
+          <a:xfrm>
+            <a:off x="8183880" y="2029968"/>
             <a:ext cx="502920" cy="274320"/>
           </a:xfrm>
           <a:prstGeom prst="rect">
@@ -15633,19 +15418,19 @@
           <a:bodyPr wrap="square" lIns="0" tIns="0" rIns="0" bIns="0" rtlCol="0" anchor="ctr"/>
           <a:lstStyle/>
           <a:p>
-            <a:pPr algn="r" indent="0" marL="0">
-              <a:buNone/>
-            </a:pPr>
-            <a:r>
-              <a:rPr lang="en-US" sz="1000" spc="100" kern="0" dirty="0">
-                <a:solidFill>
-                  <a:srgbClr val="8A919E"/>
+            <a:pPr marL="0" indent="0" algn="r">
+              <a:buNone/>
+            </a:pPr>
+            <a:r>
+              <a:rPr lang="en-US" sz="1000" kern="0" spc="100" dirty="0">
+                <a:solidFill>
+                  <a:srgbClr val="05B169"/>
                 </a:solidFill>
                 <a:latin typeface="프리젠테이션 7 Bold" pitchFamily="34" charset="0"/>
                 <a:ea typeface="프리젠테이션 7 Bold" pitchFamily="34" charset="-122"/>
                 <a:cs typeface="프리젠테이션 7 Bold" pitchFamily="34" charset="-120"/>
               </a:rPr>
-              <a:t>NEXT</a:t>
+              <a:t>DONE</a:t>
             </a:r>
             <a:endParaRPr lang="en-US" sz="1000" dirty="0"/>
           </a:p>
@@ -15653,13 +15438,13 @@
       </p:sp>
       <p:sp>
         <p:nvSpPr>
-          <p:cNvPr id="33" name="pipe icon 4 bg"/>
+          <p:cNvPr id="25" name="pipe icon 2 bg"/>
           <p:cNvSpPr/>
           <p:nvPr/>
         </p:nvSpPr>
         <p:spPr>
           <a:xfrm>
-            <a:off x="4343400" y="3529584"/>
+            <a:off x="4343400" y="2487168"/>
             <a:ext cx="402336" cy="402336"/>
           </a:xfrm>
           <a:prstGeom prst="ellipse">
@@ -15673,7 +15458,7 @@
       </p:sp>
       <p:pic>
         <p:nvPicPr>
-          <p:cNvPr id="34" name="pipe icon 4" descr="preencoded.png">    </p:cNvPr>
+          <p:cNvPr id="26" name="pipe icon 2" descr="preencoded.png"/>
           <p:cNvPicPr>
             <a:picLocks noChangeAspect="1"/>
           </p:cNvPicPr>
@@ -15687,7 +15472,7 @@
         </p:blipFill>
         <p:spPr>
           <a:xfrm>
-            <a:off x="4439961" y="3626145"/>
+            <a:off x="4439961" y="2583729"/>
             <a:ext cx="209215" cy="209215"/>
           </a:xfrm>
           <a:prstGeom prst="rect">
@@ -15697,13 +15482,13 @@
       </p:pic>
       <p:sp>
         <p:nvSpPr>
-          <p:cNvPr id="35" name="pipe text 4"/>
-          <p:cNvSpPr txBox="1"/>
-          <p:nvPr/>
-        </p:nvSpPr>
-        <p:spPr>
-          <a:xfrm>
-            <a:off x="4910328" y="3502152"/>
+          <p:cNvPr id="27" name="pipe text 2"/>
+          <p:cNvSpPr txBox="1"/>
+          <p:nvPr/>
+        </p:nvSpPr>
+        <p:spPr>
+          <a:xfrm>
+            <a:off x="4910328" y="2459736"/>
             <a:ext cx="3200400" cy="475488"/>
           </a:xfrm>
           <a:prstGeom prst="rect">
@@ -15716,7 +15501,7 @@
           <a:bodyPr wrap="square" lIns="0" tIns="0" rIns="0" bIns="0" rtlCol="0" anchor="ctr"/>
           <a:lstStyle/>
           <a:p>
-            <a:pPr indent="0" marL="0">
+            <a:pPr marL="0" indent="0">
               <a:buNone/>
             </a:pPr>
             <a:r>
@@ -15728,12 +15513,12 @@
                 <a:ea typeface="프리젠테이션 7 Bold" pitchFamily="34" charset="-122"/>
                 <a:cs typeface="프리젠테이션 7 Bold" pitchFamily="34" charset="-120"/>
               </a:rPr>
-              <a:t>5. Clip or keep whole + QC</a:t>
+              <a:t>3. Confirm study boundary</a:t>
             </a:r>
             <a:endParaRPr lang="en-US" sz="1300" dirty="0"/>
           </a:p>
           <a:p>
-            <a:pPr indent="0" marL="0">
+            <a:pPr marL="0" indent="0">
               <a:buNone/>
             </a:pPr>
             <a:r>
@@ -15745,7 +15530,7 @@
                 <a:ea typeface="프리젠테이션 4 Regular" pitchFamily="34" charset="-122"/>
                 <a:cs typeface="프리젠테이션 4 Regular" pitchFamily="34" charset="-120"/>
               </a:rPr>
-              <a:t>Per analysis; missing MMSI / time, invalid paths</a:t>
+              <a:t>ENC-based approach area, then rerun the filter</a:t>
             </a:r>
             <a:endParaRPr lang="en-US" sz="1300" dirty="0"/>
           </a:p>
@@ -15753,13 +15538,13 @@
       </p:sp>
       <p:sp>
         <p:nvSpPr>
-          <p:cNvPr id="36" name="status 4"/>
-          <p:cNvSpPr txBox="1"/>
-          <p:nvPr/>
-        </p:nvSpPr>
-        <p:spPr>
-          <a:xfrm>
-            <a:off x="8183880" y="3593592"/>
+          <p:cNvPr id="28" name="status 2"/>
+          <p:cNvSpPr txBox="1"/>
+          <p:nvPr/>
+        </p:nvSpPr>
+        <p:spPr>
+          <a:xfrm>
+            <a:off x="8183880" y="2551176"/>
             <a:ext cx="502920" cy="274320"/>
           </a:xfrm>
           <a:prstGeom prst="rect">
@@ -15772,11 +15557,11 @@
           <a:bodyPr wrap="square" lIns="0" tIns="0" rIns="0" bIns="0" rtlCol="0" anchor="ctr"/>
           <a:lstStyle/>
           <a:p>
-            <a:pPr algn="r" indent="0" marL="0">
-              <a:buNone/>
-            </a:pPr>
-            <a:r>
-              <a:rPr lang="en-US" sz="1000" spc="100" kern="0" dirty="0">
+            <a:pPr marL="0" indent="0" algn="r">
+              <a:buNone/>
+            </a:pPr>
+            <a:r>
+              <a:rPr lang="en-US" sz="1000" kern="0" spc="100" dirty="0">
                 <a:solidFill>
                   <a:srgbClr val="8A919E"/>
                 </a:solidFill>
@@ -15792,13 +15577,13 @@
       </p:sp>
       <p:sp>
         <p:nvSpPr>
-          <p:cNvPr id="37" name="pipe icon 5 bg"/>
+          <p:cNvPr id="29" name="pipe icon 3 bg"/>
           <p:cNvSpPr/>
           <p:nvPr/>
         </p:nvSpPr>
         <p:spPr>
           <a:xfrm>
-            <a:off x="4343400" y="4050792"/>
+            <a:off x="4343400" y="3008376"/>
             <a:ext cx="402336" cy="402336"/>
           </a:xfrm>
           <a:prstGeom prst="ellipse">
@@ -15812,7 +15597,7 @@
       </p:sp>
       <p:pic>
         <p:nvPicPr>
-          <p:cNvPr id="38" name="pipe icon 5" descr="preencoded.png">    </p:cNvPr>
+          <p:cNvPr id="30" name="pipe icon 3" descr="preencoded.png"/>
           <p:cNvPicPr>
             <a:picLocks noChangeAspect="1"/>
           </p:cNvPicPr>
@@ -15826,7 +15611,7 @@
         </p:blipFill>
         <p:spPr>
           <a:xfrm>
-            <a:off x="4439961" y="4147353"/>
+            <a:off x="4439961" y="3104937"/>
             <a:ext cx="209215" cy="209215"/>
           </a:xfrm>
           <a:prstGeom prst="rect">
@@ -15836,13 +15621,13 @@
       </p:pic>
       <p:sp>
         <p:nvSpPr>
-          <p:cNvPr id="39" name="pipe text 5"/>
-          <p:cNvSpPr txBox="1"/>
-          <p:nvPr/>
-        </p:nvSpPr>
-        <p:spPr>
-          <a:xfrm>
-            <a:off x="4910328" y="4023360"/>
+          <p:cNvPr id="31" name="pipe text 3"/>
+          <p:cNvSpPr txBox="1"/>
+          <p:nvPr/>
+        </p:nvSpPr>
+        <p:spPr>
+          <a:xfrm>
+            <a:off x="4910328" y="2980944"/>
             <a:ext cx="3200400" cy="475488"/>
           </a:xfrm>
           <a:prstGeom prst="rect">
@@ -15855,7 +15640,7 @@
           <a:bodyPr wrap="square" lIns="0" tIns="0" rIns="0" bIns="0" rtlCol="0" anchor="ctr"/>
           <a:lstStyle/>
           <a:p>
-            <a:pPr indent="0" marL="0">
+            <a:pPr marL="0" indent="0">
               <a:buNone/>
             </a:pPr>
             <a:r>
@@ -15867,12 +15652,12 @@
                 <a:ea typeface="프리젠테이션 7 Bold" pitchFamily="34" charset="-122"/>
                 <a:cs typeface="프리젠테이션 7 Bold" pitchFamily="34" charset="-120"/>
               </a:rPr>
-              <a:t>6. Reproject &amp; build dataset</a:t>
+              <a:t>4. Resolve vessel-type scope</a:t>
             </a:r>
             <a:endParaRPr lang="en-US" sz="1300" dirty="0"/>
           </a:p>
           <a:p>
-            <a:pPr indent="0" marL="0">
+            <a:pPr marL="0" indent="0">
               <a:buNone/>
             </a:pPr>
             <a:r>
@@ -15884,7 +15669,7 @@
                 <a:ea typeface="프리젠테이션 4 Regular" pitchFamily="34" charset="-122"/>
                 <a:cs typeface="프리젠테이션 4 Regular" pitchFamily="34" charset="-120"/>
               </a:rPr>
-              <a:t>EPSG:4269 → UTM 18N; GeoPandas → GeoParquet</a:t>
+              <a:t>VesselType codebook; all Cargo or a sub-type?</a:t>
             </a:r>
             <a:endParaRPr lang="en-US" sz="1300" dirty="0"/>
           </a:p>
@@ -15892,13 +15677,13 @@
       </p:sp>
       <p:sp>
         <p:nvSpPr>
-          <p:cNvPr id="40" name="status 5"/>
-          <p:cNvSpPr txBox="1"/>
-          <p:nvPr/>
-        </p:nvSpPr>
-        <p:spPr>
-          <a:xfrm>
-            <a:off x="8183880" y="4114800"/>
+          <p:cNvPr id="32" name="status 3"/>
+          <p:cNvSpPr txBox="1"/>
+          <p:nvPr/>
+        </p:nvSpPr>
+        <p:spPr>
+          <a:xfrm>
+            <a:off x="8183880" y="3072384"/>
             <a:ext cx="502920" cy="274320"/>
           </a:xfrm>
           <a:prstGeom prst="rect">
@@ -15911,11 +15696,11 @@
           <a:bodyPr wrap="square" lIns="0" tIns="0" rIns="0" bIns="0" rtlCol="0" anchor="ctr"/>
           <a:lstStyle/>
           <a:p>
-            <a:pPr algn="r" indent="0" marL="0">
-              <a:buNone/>
-            </a:pPr>
-            <a:r>
-              <a:rPr lang="en-US" sz="1000" spc="100" kern="0" dirty="0">
+            <a:pPr marL="0" indent="0" algn="r">
+              <a:buNone/>
+            </a:pPr>
+            <a:r>
+              <a:rPr lang="en-US" sz="1000" kern="0" spc="100" dirty="0">
                 <a:solidFill>
                   <a:srgbClr val="8A919E"/>
                 </a:solidFill>
@@ -15931,14 +15716,58 @@
       </p:sp>
       <p:sp>
         <p:nvSpPr>
-          <p:cNvPr id="41" name="refs"/>
-          <p:cNvSpPr txBox="1"/>
-          <p:nvPr/>
-        </p:nvSpPr>
-        <p:spPr>
-          <a:xfrm>
-            <a:off x="4343400" y="4553712"/>
-            <a:ext cx="4343400" cy="182880"/>
+          <p:cNvPr id="33" name="pipe icon 4 bg"/>
+          <p:cNvSpPr/>
+          <p:nvPr/>
+        </p:nvSpPr>
+        <p:spPr>
+          <a:xfrm>
+            <a:off x="4343400" y="3529584"/>
+            <a:ext cx="402336" cy="402336"/>
+          </a:xfrm>
+          <a:prstGeom prst="ellipse">
+            <a:avLst/>
+          </a:prstGeom>
+          <a:solidFill>
+            <a:srgbClr val="EEF0F3"/>
+          </a:solidFill>
+          <a:ln/>
+        </p:spPr>
+      </p:sp>
+      <p:pic>
+        <p:nvPicPr>
+          <p:cNvPr id="34" name="pipe icon 4" descr="preencoded.png"/>
+          <p:cNvPicPr>
+            <a:picLocks noChangeAspect="1"/>
+          </p:cNvPicPr>
+          <p:nvPr/>
+        </p:nvPicPr>
+        <p:blipFill>
+          <a:blip r:embed="rId7"/>
+          <a:stretch>
+            <a:fillRect/>
+          </a:stretch>
+        </p:blipFill>
+        <p:spPr>
+          <a:xfrm>
+            <a:off x="4439961" y="3626145"/>
+            <a:ext cx="209215" cy="209215"/>
+          </a:xfrm>
+          <a:prstGeom prst="rect">
+            <a:avLst/>
+          </a:prstGeom>
+        </p:spPr>
+      </p:pic>
+      <p:sp>
+        <p:nvSpPr>
+          <p:cNvPr id="35" name="pipe text 4"/>
+          <p:cNvSpPr txBox="1"/>
+          <p:nvPr/>
+        </p:nvSpPr>
+        <p:spPr>
+          <a:xfrm>
+            <a:off x="4910328" y="3502152"/>
+            <a:ext cx="3200400" cy="475488"/>
           </a:xfrm>
           <a:prstGeom prst="rect">
             <a:avLst/>
@@ -15950,18 +15779,252 @@
           <a:bodyPr wrap="square" lIns="0" tIns="0" rIns="0" bIns="0" rtlCol="0" anchor="ctr"/>
           <a:lstStyle/>
           <a:p>
-            <a:pPr indent="0" marL="0">
-              <a:buNone/>
-            </a:pPr>
-            <a:r>
-              <a:rPr lang="en-US" sz="900" dirty="0">
-                <a:solidFill>
-                  <a:srgbClr val="8A919E"/>
+            <a:pPr marL="0" indent="0">
+              <a:buNone/>
+            </a:pPr>
+            <a:r>
+              <a:rPr lang="en-US" sz="1300" dirty="0">
+                <a:solidFill>
+                  <a:srgbClr val="0A0B0D"/>
+                </a:solidFill>
+                <a:latin typeface="프리젠테이션 7 Bold" pitchFamily="34" charset="0"/>
+                <a:ea typeface="프리젠테이션 7 Bold" pitchFamily="34" charset="-122"/>
+                <a:cs typeface="프리젠테이션 7 Bold" pitchFamily="34" charset="-120"/>
+              </a:rPr>
+              <a:t>5. Clip or keep whole + QC</a:t>
+            </a:r>
+            <a:endParaRPr lang="en-US" sz="1300" dirty="0"/>
+          </a:p>
+          <a:p>
+            <a:pPr marL="0" indent="0">
+              <a:buNone/>
+            </a:pPr>
+            <a:r>
+              <a:rPr lang="en-US" sz="1100" dirty="0">
+                <a:solidFill>
+                  <a:srgbClr val="5B616E"/>
                 </a:solidFill>
                 <a:latin typeface="프리젠테이션 4 Regular" pitchFamily="34" charset="0"/>
                 <a:ea typeface="프리젠테이션 4 Regular" pitchFamily="34" charset="-122"/>
                 <a:cs typeface="프리젠테이션 4 Regular" pitchFamily="34" charset="-120"/>
               </a:rPr>
+              <a:t>Per analysis; missing MMSI / time, invalid paths</a:t>
+            </a:r>
+            <a:endParaRPr lang="en-US" sz="1300" dirty="0"/>
+          </a:p>
+        </p:txBody>
+      </p:sp>
+      <p:sp>
+        <p:nvSpPr>
+          <p:cNvPr id="36" name="status 4"/>
+          <p:cNvSpPr txBox="1"/>
+          <p:nvPr/>
+        </p:nvSpPr>
+        <p:spPr>
+          <a:xfrm>
+            <a:off x="8183880" y="3593592"/>
+            <a:ext cx="502920" cy="274320"/>
+          </a:xfrm>
+          <a:prstGeom prst="rect">
+            <a:avLst/>
+          </a:prstGeom>
+          <a:noFill/>
+          <a:ln/>
+        </p:spPr>
+        <p:txBody>
+          <a:bodyPr wrap="square" lIns="0" tIns="0" rIns="0" bIns="0" rtlCol="0" anchor="ctr"/>
+          <a:lstStyle/>
+          <a:p>
+            <a:pPr marL="0" indent="0" algn="r">
+              <a:buNone/>
+            </a:pPr>
+            <a:r>
+              <a:rPr lang="en-US" sz="1000" kern="0" spc="100" dirty="0">
+                <a:solidFill>
+                  <a:srgbClr val="8A919E"/>
+                </a:solidFill>
+                <a:latin typeface="프리젠테이션 7 Bold" pitchFamily="34" charset="0"/>
+                <a:ea typeface="프리젠테이션 7 Bold" pitchFamily="34" charset="-122"/>
+                <a:cs typeface="프리젠테이션 7 Bold" pitchFamily="34" charset="-120"/>
+              </a:rPr>
+              <a:t>NEXT</a:t>
+            </a:r>
+            <a:endParaRPr lang="en-US" sz="1000" dirty="0"/>
+          </a:p>
+        </p:txBody>
+      </p:sp>
+      <p:sp>
+        <p:nvSpPr>
+          <p:cNvPr id="37" name="pipe icon 5 bg"/>
+          <p:cNvSpPr/>
+          <p:nvPr/>
+        </p:nvSpPr>
+        <p:spPr>
+          <a:xfrm>
+            <a:off x="4343400" y="4050792"/>
+            <a:ext cx="402336" cy="402336"/>
+          </a:xfrm>
+          <a:prstGeom prst="ellipse">
+            <a:avLst/>
+          </a:prstGeom>
+          <a:solidFill>
+            <a:srgbClr val="EEF0F3"/>
+          </a:solidFill>
+          <a:ln/>
+        </p:spPr>
+      </p:sp>
+      <p:pic>
+        <p:nvPicPr>
+          <p:cNvPr id="38" name="pipe icon 5" descr="preencoded.png"/>
+          <p:cNvPicPr>
+            <a:picLocks noChangeAspect="1"/>
+          </p:cNvPicPr>
+          <p:nvPr/>
+        </p:nvPicPr>
+        <p:blipFill>
+          <a:blip r:embed="rId8"/>
+          <a:stretch>
+            <a:fillRect/>
+          </a:stretch>
+        </p:blipFill>
+        <p:spPr>
+          <a:xfrm>
+            <a:off x="4439961" y="4147353"/>
+            <a:ext cx="209215" cy="209215"/>
+          </a:xfrm>
+          <a:prstGeom prst="rect">
+            <a:avLst/>
+          </a:prstGeom>
+        </p:spPr>
+      </p:pic>
+      <p:sp>
+        <p:nvSpPr>
+          <p:cNvPr id="39" name="pipe text 5"/>
+          <p:cNvSpPr txBox="1"/>
+          <p:nvPr/>
+        </p:nvSpPr>
+        <p:spPr>
+          <a:xfrm>
+            <a:off x="4910328" y="4023360"/>
+            <a:ext cx="3200400" cy="475488"/>
+          </a:xfrm>
+          <a:prstGeom prst="rect">
+            <a:avLst/>
+          </a:prstGeom>
+          <a:noFill/>
+          <a:ln/>
+        </p:spPr>
+        <p:txBody>
+          <a:bodyPr wrap="square" lIns="0" tIns="0" rIns="0" bIns="0" rtlCol="0" anchor="ctr"/>
+          <a:lstStyle/>
+          <a:p>
+            <a:pPr marL="0" indent="0">
+              <a:buNone/>
+            </a:pPr>
+            <a:r>
+              <a:rPr lang="en-US" sz="1300" dirty="0">
+                <a:solidFill>
+                  <a:srgbClr val="0A0B0D"/>
+                </a:solidFill>
+                <a:latin typeface="프리젠테이션 7 Bold" pitchFamily="34" charset="0"/>
+                <a:ea typeface="프리젠테이션 7 Bold" pitchFamily="34" charset="-122"/>
+                <a:cs typeface="프리젠테이션 7 Bold" pitchFamily="34" charset="-120"/>
+              </a:rPr>
+              <a:t>6. Reproject &amp; build dataset</a:t>
+            </a:r>
+            <a:endParaRPr lang="en-US" sz="1300" dirty="0"/>
+          </a:p>
+          <a:p>
+            <a:pPr marL="0" indent="0">
+              <a:buNone/>
+            </a:pPr>
+            <a:r>
+              <a:rPr lang="en-US" sz="1100" dirty="0">
+                <a:solidFill>
+                  <a:srgbClr val="5B616E"/>
+                </a:solidFill>
+                <a:latin typeface="프리젠테이션 4 Regular" pitchFamily="34" charset="0"/>
+                <a:ea typeface="프리젠테이션 4 Regular" pitchFamily="34" charset="-122"/>
+                <a:cs typeface="프리젠테이션 4 Regular" pitchFamily="34" charset="-120"/>
+              </a:rPr>
+              <a:t>EPSG:4269 → UTM 18N; GeoPandas → GeoParquet</a:t>
+            </a:r>
+            <a:endParaRPr lang="en-US" sz="1300" dirty="0"/>
+          </a:p>
+        </p:txBody>
+      </p:sp>
+      <p:sp>
+        <p:nvSpPr>
+          <p:cNvPr id="40" name="status 5"/>
+          <p:cNvSpPr txBox="1"/>
+          <p:nvPr/>
+        </p:nvSpPr>
+        <p:spPr>
+          <a:xfrm>
+            <a:off x="8183880" y="4114800"/>
+            <a:ext cx="502920" cy="274320"/>
+          </a:xfrm>
+          <a:prstGeom prst="rect">
+            <a:avLst/>
+          </a:prstGeom>
+          <a:noFill/>
+          <a:ln/>
+        </p:spPr>
+        <p:txBody>
+          <a:bodyPr wrap="square" lIns="0" tIns="0" rIns="0" bIns="0" rtlCol="0" anchor="ctr"/>
+          <a:lstStyle/>
+          <a:p>
+            <a:pPr marL="0" indent="0" algn="r">
+              <a:buNone/>
+            </a:pPr>
+            <a:r>
+              <a:rPr lang="en-US" sz="1000" kern="0" spc="100" dirty="0">
+                <a:solidFill>
+                  <a:srgbClr val="8A919E"/>
+                </a:solidFill>
+                <a:latin typeface="프리젠테이션 7 Bold" pitchFamily="34" charset="0"/>
+                <a:ea typeface="프리젠테이션 7 Bold" pitchFamily="34" charset="-122"/>
+                <a:cs typeface="프리젠테이션 7 Bold" pitchFamily="34" charset="-120"/>
+              </a:rPr>
+              <a:t>NEXT</a:t>
+            </a:r>
+            <a:endParaRPr lang="en-US" sz="1000" dirty="0"/>
+          </a:p>
+        </p:txBody>
+      </p:sp>
+      <p:sp>
+        <p:nvSpPr>
+          <p:cNvPr id="41" name="refs"/>
+          <p:cNvSpPr txBox="1"/>
+          <p:nvPr/>
+        </p:nvSpPr>
+        <p:spPr>
+          <a:xfrm>
+            <a:off x="4343400" y="4553712"/>
+            <a:ext cx="4343400" cy="182880"/>
+          </a:xfrm>
+          <a:prstGeom prst="rect">
+            <a:avLst/>
+          </a:prstGeom>
+          <a:noFill/>
+          <a:ln/>
+        </p:spPr>
+        <p:txBody>
+          <a:bodyPr wrap="square" lIns="0" tIns="0" rIns="0" bIns="0" rtlCol="0" anchor="ctr"/>
+          <a:lstStyle/>
+          <a:p>
+            <a:pPr marL="0" indent="0">
+              <a:buNone/>
+            </a:pPr>
+            <a:r>
+              <a:rPr lang="en-US" sz="900" dirty="0">
+                <a:solidFill>
+                  <a:srgbClr val="8A919E"/>
+                </a:solidFill>
+                <a:latin typeface="프리젠테이션 4 Regular" pitchFamily="34" charset="0"/>
+                <a:ea typeface="프리젠테이션 4 Regular" pitchFamily="34" charset="-122"/>
+                <a:cs typeface="프리젠테이션 4 Regular" pitchFamily="34" charset="-120"/>
+              </a:rPr>
               <a:t>[1] NOAA OCM, AIS Vessel Tracks 2024   [3] NOAA OCS, Electronic Navigational Charts</a:t>
             </a:r>
             <a:endParaRPr lang="en-US" sz="900" dirty="0"/>
@@ -15970,7 +16033,7 @@
       </p:sp>
       <p:sp>
         <p:nvSpPr>
-          <p:cNvPr id="25" name="Slide Number Placeholder 0"/>
+          <p:cNvPr id="42" name="Slide Number Placeholder 0"/>
           <p:cNvSpPr>
             <a:spLocks noGrp="1"/>
           </p:cNvSpPr>
@@ -15988,7 +16051,7 @@
           </a:prstGeom>
           <a:extLst>
             <a:ext uri="{C572A759-6A51-4108-AA02-DFA0A04FC94B}">
-              <ma14:wrappingTextBoxFlag xmlns:ma14="http://schemas.microsoft.com/office/mac/drawingml/2011/main" val="0"/>
+              <ma14:wrappingTextBoxFlag xmlns:ma14="http://schemas.microsoft.com/office/mac/drawingml/2011/main" xmlns="" val="0"/>
             </a:ext>
           </a:extLst>
         </p:spPr>
@@ -16009,7 +16072,7 @@
           <a:p>
             <a:pPr algn="r"/>
             <a:fld id="{F7021451-1387-4CA6-816F-3879F97B5CBC}" type="slidenum">
-              <a:rPr b="0" lang="en-US"/>
+              <a:rPr lang="en-US" b="0"/>
               <a:t>9</a:t>
             </a:fld>
             <a:endParaRPr lang="en-US"/>
@@ -16317,4 +16380,319 @@
     </a:ext>
   </a:extLst>
 </a:theme>
+</file>
+
+<file path=ppt/theme/theme2.xml><?xml version="1.0" encoding="utf-8"?>
+<a:theme xmlns:a="http://schemas.openxmlformats.org/drawingml/2006/main" name="Office 테마">
+  <a:themeElements>
+    <a:clrScheme name="Office">
+      <a:dk1>
+        <a:sysClr val="windowText" lastClr="000000"/>
+      </a:dk1>
+      <a:lt1>
+        <a:sysClr val="window" lastClr="FFFFFF"/>
+      </a:lt1>
+      <a:dk2>
+        <a:srgbClr val="0E2841"/>
+      </a:dk2>
+      <a:lt2>
+        <a:srgbClr val="E8E8E8"/>
+      </a:lt2>
+      <a:accent1>
+        <a:srgbClr val="156082"/>
+      </a:accent1>
+      <a:accent2>
+        <a:srgbClr val="E97132"/>
+      </a:accent2>
+      <a:accent3>
+        <a:srgbClr val="196B24"/>
+      </a:accent3>
+      <a:accent4>
+        <a:srgbClr val="0F9ED5"/>
+      </a:accent4>
+      <a:accent5>
+        <a:srgbClr val="A02B93"/>
+      </a:accent5>
+      <a:accent6>
+        <a:srgbClr val="4EA72E"/>
+      </a:accent6>
+      <a:hlink>
+        <a:srgbClr val="467886"/>
+      </a:hlink>
+      <a:folHlink>
+        <a:srgbClr val="96607D"/>
+      </a:folHlink>
+    </a:clrScheme>
+    <a:fontScheme name="Office">
+      <a:majorFont>
+        <a:latin typeface="맑은 고딕" panose="02110004020202020204"/>
+        <a:ea typeface=""/>
+        <a:cs typeface=""/>
+        <a:font script="Jpan" typeface="游ゴシック Light"/>
+        <a:font script="Hang" typeface="맑은 고딕"/>
+        <a:font script="Hans" typeface="等线 Light"/>
+        <a:font script="Hant" typeface="新細明體"/>
+        <a:font script="Arab" typeface="Times New Roman"/>
+        <a:font script="Hebr" typeface="Times New Roman"/>
+        <a:font script="Thai" typeface="Angsana New"/>
+        <a:font script="Ethi" typeface="Nyala"/>
+        <a:font script="Beng" typeface="Vrinda"/>
+        <a:font script="Gujr" typeface="Shruti"/>
+        <a:font script="Khmr" typeface="MoolBoran"/>
+        <a:font script="Knda" typeface="Tunga"/>
+        <a:font script="Guru" typeface="Raavi"/>
+        <a:font script="Cans" typeface="Euphemia"/>
+        <a:font script="Cher" typeface="Plantagenet Cherokee"/>
+        <a:font script="Yiii" typeface="Microsoft Yi Baiti"/>
+        <a:font script="Tibt" typeface="Microsoft Himalaya"/>
+        <a:font script="Thaa" typeface="MV Boli"/>
+        <a:font script="Deva" typeface="Mangal"/>
+        <a:font script="Telu" typeface="Gautami"/>
+        <a:font script="Taml" typeface="Latha"/>
+        <a:font script="Syrc" typeface="Estrangelo Edessa"/>
+        <a:font script="Orya" typeface="Kalinga"/>
+        <a:font script="Mlym" typeface="Kartika"/>
+        <a:font script="Laoo" typeface="DokChampa"/>
+        <a:font script="Sinh" typeface="Iskoola Pota"/>
+        <a:font script="Mong" typeface="Mongolian Baiti"/>
+        <a:font script="Viet" typeface="Times New Roman"/>
+        <a:font script="Uigh" typeface="Microsoft Uighur"/>
+        <a:font script="Geor" typeface="Sylfaen"/>
+        <a:font script="Armn" typeface="Arial"/>
+        <a:font script="Bugi" typeface="Leelawadee UI"/>
+        <a:font script="Bopo" typeface="Microsoft JhengHei"/>
+        <a:font script="Java" typeface="Javanese Text"/>
+        <a:font script="Lisu" typeface="Segoe UI"/>
+        <a:font script="Mymr" typeface="Myanmar Text"/>
+        <a:font script="Nkoo" typeface="Ebrima"/>
+        <a:font script="Olck" typeface="Nirmala UI"/>
+        <a:font script="Osma" typeface="Ebrima"/>
+        <a:font script="Phag" typeface="Phagspa"/>
+        <a:font script="Syrn" typeface="Estrangelo Edessa"/>
+        <a:font script="Syrj" typeface="Estrangelo Edessa"/>
+        <a:font script="Syre" typeface="Estrangelo Edessa"/>
+        <a:font script="Sora" typeface="Nirmala UI"/>
+        <a:font script="Tale" typeface="Microsoft Tai Le"/>
+        <a:font script="Talu" typeface="Microsoft New Tai Lue"/>
+        <a:font script="Tfng" typeface="Ebrima"/>
+      </a:majorFont>
+      <a:minorFont>
+        <a:latin typeface="맑은 고딕" panose="02110004020202020204"/>
+        <a:ea typeface=""/>
+        <a:cs typeface=""/>
+        <a:font script="Jpan" typeface="游ゴシック"/>
+        <a:font script="Hang" typeface="맑은 고딕"/>
+        <a:font script="Hans" typeface="等线"/>
+        <a:font script="Hant" typeface="新細明體"/>
+        <a:font script="Arab" typeface="Arial"/>
+        <a:font script="Hebr" typeface="Arial"/>
+        <a:font script="Thai" typeface="Cordia New"/>
+        <a:font script="Ethi" typeface="Nyala"/>
+        <a:font script="Beng" typeface="Vrinda"/>
+        <a:font script="Gujr" typeface="Shruti"/>
+        <a:font script="Khmr" typeface="DaunPenh"/>
+        <a:font script="Knda" typeface="Tunga"/>
+        <a:font script="Guru" typeface="Raavi"/>
+        <a:font script="Cans" typeface="Euphemia"/>
+        <a:font script="Cher" typeface="Plantagenet Cherokee"/>
+        <a:font script="Yiii" typeface="Microsoft Yi Baiti"/>
+        <a:font script="Tibt" typeface="Microsoft Himalaya"/>
+        <a:font script="Thaa" typeface="MV Boli"/>
+        <a:font script="Deva" typeface="Mangal"/>
+        <a:font script="Telu" typeface="Gautami"/>
+        <a:font script="Taml" typeface="Latha"/>
+        <a:font script="Syrc" typeface="Estrangelo Edessa"/>
+        <a:font script="Orya" typeface="Kalinga"/>
+        <a:font script="Mlym" typeface="Kartika"/>
+        <a:font script="Laoo" typeface="DokChampa"/>
+        <a:font script="Sinh" typeface="Iskoola Pota"/>
+        <a:font script="Mong" typeface="Mongolian Baiti"/>
+        <a:font script="Viet" typeface="Arial"/>
+        <a:font script="Uigh" typeface="Microsoft Uighur"/>
+        <a:font script="Geor" typeface="Sylfaen"/>
+        <a:font script="Armn" typeface="Arial"/>
+        <a:font script="Bugi" typeface="Leelawadee UI"/>
+        <a:font script="Bopo" typeface="Microsoft JhengHei"/>
+        <a:font script="Java" typeface="Javanese Text"/>
+        <a:font script="Lisu" typeface="Segoe UI"/>
+        <a:font script="Mymr" typeface="Myanmar Text"/>
+        <a:font script="Nkoo" typeface="Ebrima"/>
+        <a:font script="Olck" typeface="Nirmala UI"/>
+        <a:font script="Osma" typeface="Ebrima"/>
+        <a:font script="Phag" typeface="Phagspa"/>
+        <a:font script="Syrn" typeface="Estrangelo Edessa"/>
+        <a:font script="Syrj" typeface="Estrangelo Edessa"/>
+        <a:font script="Syre" typeface="Estrangelo Edessa"/>
+        <a:font script="Sora" typeface="Nirmala UI"/>
+        <a:font script="Tale" typeface="Microsoft Tai Le"/>
+        <a:font script="Talu" typeface="Microsoft New Tai Lue"/>
+        <a:font script="Tfng" typeface="Ebrima"/>
+      </a:minorFont>
+    </a:fontScheme>
+    <a:fmtScheme name="Office">
+      <a:fillStyleLst>
+        <a:solidFill>
+          <a:schemeClr val="phClr"/>
+        </a:solidFill>
+        <a:gradFill rotWithShape="1">
+          <a:gsLst>
+            <a:gs pos="0">
+              <a:schemeClr val="phClr">
+                <a:lumMod val="110000"/>
+                <a:satMod val="105000"/>
+                <a:tint val="67000"/>
+              </a:schemeClr>
+            </a:gs>
+            <a:gs pos="50000">
+              <a:schemeClr val="phClr">
+                <a:lumMod val="105000"/>
+                <a:satMod val="103000"/>
+                <a:tint val="73000"/>
+              </a:schemeClr>
+            </a:gs>
+            <a:gs pos="100000">
+              <a:schemeClr val="phClr">
+                <a:lumMod val="105000"/>
+                <a:satMod val="109000"/>
+                <a:tint val="81000"/>
+              </a:schemeClr>
+            </a:gs>
+          </a:gsLst>
+          <a:lin ang="5400000" scaled="0"/>
+        </a:gradFill>
+        <a:gradFill rotWithShape="1">
+          <a:gsLst>
+            <a:gs pos="0">
+              <a:schemeClr val="phClr">
+                <a:satMod val="103000"/>
+                <a:lumMod val="102000"/>
+                <a:tint val="94000"/>
+              </a:schemeClr>
+            </a:gs>
+            <a:gs pos="50000">
+              <a:schemeClr val="phClr">
+                <a:satMod val="110000"/>
+                <a:lumMod val="100000"/>
+                <a:shade val="100000"/>
+              </a:schemeClr>
+            </a:gs>
+            <a:gs pos="100000">
+              <a:schemeClr val="phClr">
+                <a:lumMod val="99000"/>
+                <a:satMod val="120000"/>
+                <a:shade val="78000"/>
+              </a:schemeClr>
+            </a:gs>
+          </a:gsLst>
+          <a:lin ang="5400000" scaled="0"/>
+        </a:gradFill>
+      </a:fillStyleLst>
+      <a:lnStyleLst>
+        <a:ln w="12700" cap="flat" cmpd="sng" algn="ctr">
+          <a:solidFill>
+            <a:schemeClr val="phClr"/>
+          </a:solidFill>
+          <a:prstDash val="solid"/>
+          <a:miter lim="800000"/>
+        </a:ln>
+        <a:ln w="19050" cap="flat" cmpd="sng" algn="ctr">
+          <a:solidFill>
+            <a:schemeClr val="phClr"/>
+          </a:solidFill>
+          <a:prstDash val="solid"/>
+          <a:miter lim="800000"/>
+        </a:ln>
+        <a:ln w="25400" cap="flat" cmpd="sng" algn="ctr">
+          <a:solidFill>
+            <a:schemeClr val="phClr"/>
+          </a:solidFill>
+          <a:prstDash val="solid"/>
+          <a:miter lim="800000"/>
+        </a:ln>
+      </a:lnStyleLst>
+      <a:effectStyleLst>
+        <a:effectStyle>
+          <a:effectLst/>
+        </a:effectStyle>
+        <a:effectStyle>
+          <a:effectLst/>
+        </a:effectStyle>
+        <a:effectStyle>
+          <a:effectLst>
+            <a:outerShdw blurRad="57150" dist="19050" dir="5400000" algn="ctr" rotWithShape="0">
+              <a:srgbClr val="000000">
+                <a:alpha val="63000"/>
+              </a:srgbClr>
+            </a:outerShdw>
+          </a:effectLst>
+        </a:effectStyle>
+      </a:effectStyleLst>
+      <a:bgFillStyleLst>
+        <a:solidFill>
+          <a:schemeClr val="phClr"/>
+        </a:solidFill>
+        <a:solidFill>
+          <a:schemeClr val="phClr">
+            <a:tint val="95000"/>
+            <a:satMod val="170000"/>
+          </a:schemeClr>
+        </a:solidFill>
+        <a:gradFill rotWithShape="1">
+          <a:gsLst>
+            <a:gs pos="0">
+              <a:schemeClr val="phClr">
+                <a:tint val="93000"/>
+                <a:satMod val="150000"/>
+                <a:shade val="98000"/>
+                <a:lumMod val="102000"/>
+              </a:schemeClr>
+            </a:gs>
+            <a:gs pos="50000">
+              <a:schemeClr val="phClr">
+                <a:tint val="98000"/>
+                <a:satMod val="130000"/>
+                <a:shade val="90000"/>
+                <a:lumMod val="103000"/>
+              </a:schemeClr>
+            </a:gs>
+            <a:gs pos="100000">
+              <a:schemeClr val="phClr">
+                <a:shade val="63000"/>
+                <a:satMod val="120000"/>
+              </a:schemeClr>
+            </a:gs>
+          </a:gsLst>
+          <a:lin ang="5400000" scaled="0"/>
+        </a:gradFill>
+      </a:bgFillStyleLst>
+    </a:fmtScheme>
+  </a:themeElements>
+  <a:objectDefaults>
+    <a:lnDef>
+      <a:spPr/>
+      <a:bodyPr/>
+      <a:lstStyle/>
+      <a:style>
+        <a:lnRef idx="2">
+          <a:schemeClr val="accent1"/>
+        </a:lnRef>
+        <a:fillRef idx="0">
+          <a:schemeClr val="accent1"/>
+        </a:fillRef>
+        <a:effectRef idx="1">
+          <a:schemeClr val="accent1"/>
+        </a:effectRef>
+        <a:fontRef idx="minor">
+          <a:schemeClr val="tx1"/>
+        </a:fontRef>
+      </a:style>
+    </a:lnDef>
+  </a:objectDefaults>
+  <a:extraClrSchemeLst/>
+  <a:extLst>
+    <a:ext uri="{05A4C25C-085E-4340-85A3-A5531E510DB2}">
+      <thm15:themeFamily xmlns:thm15="http://schemas.microsoft.com/office/thememl/2012/main" name="Office Theme" id="{2E142A2C-CD16-42D6-873A-C26D2A0506FA}" vid="{1BDDFF52-6CD6-40A5-AB3C-68EB2F1E4D0A}"/>
+    </a:ext>
+  </a:extLst>
+</a:theme>
 </file>